--- a/contest/presentation/2026_74K_발표자료_10분.pptx
+++ b/contest/presentation/2026_74K_발표자료_10분.pptx
@@ -21,9 +21,10 @@
     <p:sldId id="269" r:id="rId15"/>
     <p:sldId id="270" r:id="rId16"/>
     <p:sldId id="271" r:id="rId17"/>
+    <p:sldId id="272" r:id="rId18"/>
   </p:sldIdLst>
   <p:notesMasterIdLst>
-    <p:notesMasterId r:id="rId18"/>
+    <p:notesMasterId r:id="rId19"/>
   </p:notesMasterIdLst>
   <p:sldSz cx="12192000" cy="6858000"/>
   <p:notesSz cx="6858000" cy="12192000"/>
@@ -120,6 +121,681 @@
     </a:lvl9pPr>
   </p:defaultTextStyle>
 </p:presentation>
+</file>
+
+<file path=ppt/charts/chart1.xml><?xml version="1.0" encoding="utf-8"?>
+<c:chartSpace xmlns:c="http://schemas.openxmlformats.org/drawingml/2006/chart" xmlns:a="http://schemas.openxmlformats.org/drawingml/2006/main" xmlns:r="http://schemas.openxmlformats.org/officeDocument/2006/relationships">
+  <c:date1904 val="0"/>
+  <c:roundedCorners val="1"/>
+  <c:chart>
+    <c:autoTitleDeleted val="1"/>
+    <c:plotArea>
+      <c:layout/>
+      <c:barChart>
+        <c:barDir val="bar"/>
+        <c:grouping val="clustered"/>
+        <c:varyColors val="0"/>
+        <c:ser>
+          <c:idx val="0"/>
+          <c:order val="0"/>
+          <c:tx>
+            <c:strRef>
+              <c:f>Sheet1!$B$1</c:f>
+              <c:strCache>
+                <c:ptCount val="1"/>
+                <c:pt idx="0">
+                  <c:v>η_Plate</c:v>
+                </c:pt>
+              </c:strCache>
+            </c:strRef>
+          </c:tx>
+          <c:spPr>
+            <a:solidFill>
+              <a:srgbClr val="2E5697"/>
+            </a:solidFill>
+            <a:effectLst/>
+          </c:spPr>
+          <c:invertIfNegative val="0"/>
+          <c:dLbls>
+            <c:numFmt formatCode="0.000" sourceLinked="0"/>
+            <c:txPr>
+              <a:bodyPr/>
+              <a:lstStyle/>
+              <a:p>
+                <a:pPr>
+                  <a:defRPr b="0" i="0" strike="noStrike" sz="850" u="none">
+                    <a:solidFill>
+                      <a:srgbClr val="262626"/>
+                    </a:solidFill>
+                    <a:latin typeface="Malgun Gothic"/>
+                  </a:defRPr>
+                </a:pPr>
+              </a:p>
+            </c:txPr>
+            <c:showLegendKey val="0"/>
+            <c:showVal val="1"/>
+            <c:showCatName val="0"/>
+            <c:showSerName val="0"/>
+            <c:showPercent val="0"/>
+            <c:showBubbleSize val="0"/>
+            <c:showLeaderLines val="0"/>
+          </c:dLbls>
+          <c:dPt>
+            <c:idx val="0"/>
+            <c:invertIfNegative val="0"/>
+            <c:bubble3D val="0"/>
+            <c:spPr>
+              <a:solidFill>
+                <a:srgbClr val="2E5697"/>
+              </a:solidFill>
+              <a:effectLst/>
+            </c:spPr>
+          </c:dPt>
+          <c:dPt>
+            <c:idx val="1"/>
+            <c:invertIfNegative val="0"/>
+            <c:bubble3D val="0"/>
+            <c:spPr>
+              <a:solidFill>
+                <a:srgbClr val="2E5697"/>
+              </a:solidFill>
+              <a:effectLst/>
+            </c:spPr>
+          </c:dPt>
+          <c:dPt>
+            <c:idx val="2"/>
+            <c:invertIfNegative val="0"/>
+            <c:bubble3D val="0"/>
+            <c:spPr>
+              <a:solidFill>
+                <a:srgbClr val="2E5697"/>
+              </a:solidFill>
+              <a:effectLst/>
+            </c:spPr>
+          </c:dPt>
+          <c:dPt>
+            <c:idx val="3"/>
+            <c:invertIfNegative val="0"/>
+            <c:bubble3D val="0"/>
+            <c:spPr>
+              <a:solidFill>
+                <a:srgbClr val="2E5697"/>
+              </a:solidFill>
+              <a:effectLst/>
+            </c:spPr>
+          </c:dPt>
+          <c:dPt>
+            <c:idx val="4"/>
+            <c:invertIfNegative val="0"/>
+            <c:bubble3D val="0"/>
+            <c:spPr>
+              <a:solidFill>
+                <a:srgbClr val="2E5697"/>
+              </a:solidFill>
+              <a:effectLst/>
+            </c:spPr>
+          </c:dPt>
+          <c:dPt>
+            <c:idx val="5"/>
+            <c:invertIfNegative val="0"/>
+            <c:bubble3D val="0"/>
+            <c:spPr>
+              <a:solidFill>
+                <a:srgbClr val="2E5697"/>
+              </a:solidFill>
+              <a:effectLst/>
+            </c:spPr>
+          </c:dPt>
+          <c:dPt>
+            <c:idx val="6"/>
+            <c:invertIfNegative val="0"/>
+            <c:bubble3D val="0"/>
+            <c:spPr>
+              <a:solidFill>
+                <a:srgbClr val="C00000"/>
+              </a:solidFill>
+              <a:effectLst/>
+            </c:spPr>
+          </c:dPt>
+          <c:cat>
+            <c:multiLvlStrRef>
+              <c:f>Sheet1!$A$2:$A$8</c:f>
+              <c:multiLvlStrCache>
+                <c:ptCount val="7"/>
+                <c:lvl>
+                  <c:pt idx="0">
+                    <c:v>호퍼</c:v>
+                  </c:pt>
+                  <c:pt idx="1">
+                    <c:v>내저판</c:v>
+                  </c:pt>
+                  <c:pt idx="2">
+                    <c:v>선저외판</c:v>
+                  </c:pt>
+                  <c:pt idx="3">
+                    <c:v>선측외판</c:v>
+                  </c:pt>
+                  <c:pt idx="4">
+                    <c:v>이너헐</c:v>
+                  </c:pt>
+                  <c:pt idx="5">
+                    <c:v>상갑판</c:v>
+                  </c:pt>
+                  <c:pt idx="6">
+                    <c:v>C.L. 격벽</c:v>
+                  </c:pt>
+                </c:lvl>
+              </c:multiLvlStrCache>
+            </c:multiLvlStrRef>
+          </c:cat>
+          <c:val>
+            <c:numRef>
+              <c:f>Sheet1!$B$2:$B$8</c:f>
+              <c:numCache>
+                <c:formatCode>General</c:formatCode>
+                <c:ptCount val="7"/>
+                <c:pt idx="0">
+                  <c:v>0.442</c:v>
+                </c:pt>
+                <c:pt idx="1">
+                  <c:v>0.465</c:v>
+                </c:pt>
+                <c:pt idx="2">
+                  <c:v>0.626</c:v>
+                </c:pt>
+                <c:pt idx="3">
+                  <c:v>0.644</c:v>
+                </c:pt>
+                <c:pt idx="4">
+                  <c:v>0.794</c:v>
+                </c:pt>
+                <c:pt idx="5">
+                  <c:v>0.847</c:v>
+                </c:pt>
+                <c:pt idx="6">
+                  <c:v>0.97</c:v>
+                </c:pt>
+              </c:numCache>
+            </c:numRef>
+          </c:val>
+        </c:ser>
+        <c:dLbls>
+          <c:numFmt formatCode="0.000" sourceLinked="0"/>
+          <c:txPr>
+            <a:bodyPr/>
+            <a:lstStyle/>
+            <a:p>
+              <a:pPr>
+                <a:defRPr b="0" i="0" strike="noStrike" sz="850" u="none">
+                  <a:solidFill>
+                    <a:srgbClr val="262626"/>
+                  </a:solidFill>
+                  <a:latin typeface="Malgun Gothic"/>
+                </a:defRPr>
+              </a:pPr>
+            </a:p>
+          </c:txPr>
+          <c:showLegendKey val="0"/>
+          <c:showVal val="1"/>
+          <c:showCatName val="0"/>
+          <c:showSerName val="0"/>
+          <c:showPercent val="0"/>
+          <c:showBubbleSize val="0"/>
+          <c:showLeaderLines val="0"/>
+        </c:dLbls>
+        <c:gapWidth val="42"/>
+        <c:overlap val="0"/>
+        <c:axId val="2094734554"/>
+        <c:axId val="2094734552"/>
+        <c:axId val="2094734556"/>
+      </c:barChart>
+      <c:catAx>
+        <c:axId val="2094734554"/>
+        <c:scaling>
+          <c:orientation val="minMax"/>
+        </c:scaling>
+        <c:delete val="0"/>
+        <c:axPos val="l"/>
+        <c:numFmt formatCode="General" sourceLinked="1"/>
+        <c:majorTickMark val="out"/>
+        <c:minorTickMark val="none"/>
+        <c:tickLblPos val="nextTo"/>
+        <c:spPr>
+          <a:ln w="12700" cap="flat">
+            <a:solidFill>
+              <a:srgbClr val="888888"/>
+            </a:solidFill>
+            <a:prstDash val="solid"/>
+            <a:round/>
+          </a:ln>
+        </c:spPr>
+        <c:txPr>
+          <a:bodyPr/>
+          <a:lstStyle/>
+          <a:p>
+            <a:pPr>
+              <a:defRPr sz="950" b="0" i="0" u="none" strike="noStrike">
+                <a:solidFill>
+                  <a:srgbClr val="000000"/>
+                </a:solidFill>
+                <a:latin typeface="Malgun Gothic"/>
+              </a:defRPr>
+            </a:pPr>
+            <a:endParaRPr lang="en-US"/>
+          </a:p>
+        </c:txPr>
+        <c:crossAx val="2094734552"/>
+        <c:crosses val="autoZero"/>
+        <c:auto val="1"/>
+        <c:lblAlgn val="ctr"/>
+        <c:noMultiLvlLbl val="1"/>
+      </c:catAx>
+      <c:valAx>
+        <c:axId val="2094734552"/>
+        <c:scaling>
+          <c:orientation val="minMax"/>
+          <c:max val="1"/>
+          <c:min val="0"/>
+        </c:scaling>
+        <c:delete val="0"/>
+        <c:axPos val="b"/>
+        <c:majorGridlines>
+          <c:spPr>
+            <a:ln w="12700" cap="flat">
+              <a:solidFill>
+                <a:srgbClr val="D9D9D9"/>
+              </a:solidFill>
+              <a:prstDash val="dash"/>
+              <a:round/>
+            </a:ln>
+          </c:spPr>
+        </c:majorGridlines>
+        <c:numFmt formatCode="0.00" sourceLinked="0"/>
+        <c:majorTickMark val="out"/>
+        <c:minorTickMark val="none"/>
+        <c:tickLblPos val="low"/>
+        <c:spPr>
+          <a:ln w="12700" cap="flat">
+            <a:solidFill>
+              <a:srgbClr val="888888"/>
+            </a:solidFill>
+            <a:prstDash val="solid"/>
+            <a:round/>
+          </a:ln>
+        </c:spPr>
+        <c:txPr>
+          <a:bodyPr/>
+          <a:lstStyle/>
+          <a:p>
+            <a:pPr>
+              <a:defRPr sz="850" b="0" i="0" u="none" strike="noStrike">
+                <a:solidFill>
+                  <a:srgbClr val="000000"/>
+                </a:solidFill>
+                <a:latin typeface="Malgun Gothic"/>
+              </a:defRPr>
+            </a:pPr>
+            <a:endParaRPr lang="en-US"/>
+          </a:p>
+        </c:txPr>
+        <c:crossAx val="2094734554"/>
+        <c:crosses val="autoZero"/>
+        <c:crossBetween val="between"/>
+        <c:majorUnit val="0.25"/>
+      </c:valAx>
+      <c:spPr>
+        <a:noFill/>
+        <a:ln>
+          <a:noFill/>
+        </a:ln>
+        <a:effectLst/>
+      </c:spPr>
+    </c:plotArea>
+    <c:plotVisOnly val="1"/>
+    <c:dispBlanksAs val="span"/>
+  </c:chart>
+  <c:spPr>
+    <a:noFill/>
+    <a:ln>
+      <a:noFill/>
+    </a:ln>
+    <a:effectLst/>
+  </c:spPr>
+  <c:externalData r:id="rId1">
+    <c:autoUpdate val="0"/>
+  </c:externalData>
+</c:chartSpace>
+</file>
+
+<file path=ppt/charts/chart2.xml><?xml version="1.0" encoding="utf-8"?>
+<c:chartSpace xmlns:c="http://schemas.openxmlformats.org/drawingml/2006/chart" xmlns:a="http://schemas.openxmlformats.org/drawingml/2006/main" xmlns:r="http://schemas.openxmlformats.org/officeDocument/2006/relationships">
+  <c:date1904 val="0"/>
+  <c:roundedCorners val="1"/>
+  <c:chart>
+    <c:autoTitleDeleted val="1"/>
+    <c:plotArea>
+      <c:layout/>
+      <c:barChart>
+        <c:barDir val="col"/>
+        <c:grouping val="clustered"/>
+        <c:varyColors val="0"/>
+        <c:ser>
+          <c:idx val="0"/>
+          <c:order val="0"/>
+          <c:tx>
+            <c:strRef>
+              <c:f>Sheet1!$B$1</c:f>
+              <c:strCache>
+                <c:ptCount val="1"/>
+                <c:pt idx="0">
+                  <c:v>채택한 규칙 최소값</c:v>
+                </c:pt>
+              </c:strCache>
+            </c:strRef>
+          </c:tx>
+          <c:spPr>
+            <a:solidFill>
+              <a:srgbClr val="8DA9C4"/>
+            </a:solidFill>
+            <a:effectLst/>
+          </c:spPr>
+          <c:invertIfNegative val="0"/>
+          <c:dLbls>
+            <c:numFmt formatCode="0.00" sourceLinked="0"/>
+            <c:txPr>
+              <a:bodyPr/>
+              <a:lstStyle/>
+              <a:p>
+                <a:pPr>
+                  <a:defRPr b="0" i="0" strike="noStrike" sz="900" u="none">
+                    <a:solidFill>
+                      <a:srgbClr val="262626"/>
+                    </a:solidFill>
+                    <a:latin typeface="Malgun Gothic"/>
+                  </a:defRPr>
+                </a:pPr>
+              </a:p>
+            </c:txPr>
+            <c:showLegendKey val="0"/>
+            <c:showVal val="1"/>
+            <c:showCatName val="0"/>
+            <c:showSerName val="0"/>
+            <c:showPercent val="0"/>
+            <c:showBubbleSize val="0"/>
+            <c:showLeaderLines val="0"/>
+          </c:dLbls>
+          <c:cat>
+            <c:multiLvlStrRef>
+              <c:f>Sheet1!$A$2:$A$3</c:f>
+              <c:multiLvlStrCache>
+                <c:ptCount val="2"/>
+                <c:lvl>
+                  <c:pt idx="0">
+                    <c:v>굽힘 호깅 / 갑판</c:v>
+                  </c:pt>
+                  <c:pt idx="1">
+                    <c:v>굽힘 새깅 / 선저</c:v>
+                  </c:pt>
+                </c:lvl>
+              </c:multiLvlStrCache>
+            </c:multiLvlStrRef>
+          </c:cat>
+          <c:val>
+            <c:numRef>
+              <c:f>Sheet1!$B$2:$B$3</c:f>
+              <c:numCache>
+                <c:formatCode>General</c:formatCode>
+                <c:ptCount val="2"/>
+                <c:pt idx="0">
+                  <c:v>1.525</c:v>
+                </c:pt>
+                <c:pt idx="1">
+                  <c:v>1.171</c:v>
+                </c:pt>
+              </c:numCache>
+            </c:numRef>
+          </c:val>
+        </c:ser>
+        <c:ser>
+          <c:idx val="1"/>
+          <c:order val="1"/>
+          <c:tx>
+            <c:strRef>
+              <c:f>Sheet1!$C$1</c:f>
+              <c:strCache>
+                <c:ptCount val="1"/>
+                <c:pt idx="0">
+                  <c:v>단면이 견디는 허용 상한</c:v>
+                </c:pt>
+              </c:strCache>
+            </c:strRef>
+          </c:tx>
+          <c:spPr>
+            <a:solidFill>
+              <a:srgbClr val="C00000"/>
+            </a:solidFill>
+            <a:effectLst/>
+          </c:spPr>
+          <c:invertIfNegative val="0"/>
+          <c:dLbls>
+            <c:numFmt formatCode="0.00" sourceLinked="0"/>
+            <c:txPr>
+              <a:bodyPr/>
+              <a:lstStyle/>
+              <a:p>
+                <a:pPr>
+                  <a:defRPr b="0" i="0" strike="noStrike" sz="900" u="none">
+                    <a:solidFill>
+                      <a:srgbClr val="262626"/>
+                    </a:solidFill>
+                    <a:latin typeface="Malgun Gothic"/>
+                  </a:defRPr>
+                </a:pPr>
+              </a:p>
+            </c:txPr>
+            <c:showLegendKey val="0"/>
+            <c:showVal val="1"/>
+            <c:showCatName val="0"/>
+            <c:showSerName val="0"/>
+            <c:showPercent val="0"/>
+            <c:showBubbleSize val="0"/>
+            <c:showLeaderLines val="0"/>
+          </c:dLbls>
+          <c:cat>
+            <c:multiLvlStrRef>
+              <c:f>Sheet1!$A$2:$A$3</c:f>
+              <c:multiLvlStrCache>
+                <c:ptCount val="2"/>
+                <c:lvl>
+                  <c:pt idx="0">
+                    <c:v>굽힘 호깅 / 갑판</c:v>
+                  </c:pt>
+                  <c:pt idx="1">
+                    <c:v>굽힘 새깅 / 선저</c:v>
+                  </c:pt>
+                </c:lvl>
+              </c:multiLvlStrCache>
+            </c:multiLvlStrRef>
+          </c:cat>
+          <c:val>
+            <c:numRef>
+              <c:f>Sheet1!$C$2:$C$3</c:f>
+              <c:numCache>
+                <c:formatCode>General</c:formatCode>
+                <c:ptCount val="2"/>
+                <c:pt idx="0">
+                  <c:v>3.146</c:v>
+                </c:pt>
+                <c:pt idx="1">
+                  <c:v>4.151</c:v>
+                </c:pt>
+              </c:numCache>
+            </c:numRef>
+          </c:val>
+        </c:ser>
+        <c:dLbls>
+          <c:numFmt formatCode="0.00" sourceLinked="0"/>
+          <c:txPr>
+            <a:bodyPr/>
+            <a:lstStyle/>
+            <a:p>
+              <a:pPr>
+                <a:defRPr b="0" i="0" strike="noStrike" sz="900" u="none">
+                  <a:solidFill>
+                    <a:srgbClr val="262626"/>
+                  </a:solidFill>
+                  <a:latin typeface="Malgun Gothic"/>
+                </a:defRPr>
+              </a:pPr>
+            </a:p>
+          </c:txPr>
+          <c:showLegendKey val="0"/>
+          <c:showVal val="1"/>
+          <c:showCatName val="0"/>
+          <c:showSerName val="0"/>
+          <c:showPercent val="0"/>
+          <c:showBubbleSize val="0"/>
+          <c:showLeaderLines val="0"/>
+        </c:dLbls>
+        <c:gapWidth val="80"/>
+        <c:overlap val="0"/>
+        <c:axId val="2094734554"/>
+        <c:axId val="2094734552"/>
+        <c:axId val="2094734556"/>
+      </c:barChart>
+      <c:catAx>
+        <c:axId val="2094734554"/>
+        <c:scaling>
+          <c:orientation val="minMax"/>
+        </c:scaling>
+        <c:delete val="0"/>
+        <c:axPos val="b"/>
+        <c:numFmt formatCode="General" sourceLinked="1"/>
+        <c:majorTickMark val="out"/>
+        <c:minorTickMark val="none"/>
+        <c:tickLblPos val="low"/>
+        <c:spPr>
+          <a:ln w="12700" cap="flat">
+            <a:solidFill>
+              <a:srgbClr val="888888"/>
+            </a:solidFill>
+            <a:prstDash val="solid"/>
+            <a:round/>
+          </a:ln>
+        </c:spPr>
+        <c:txPr>
+          <a:bodyPr/>
+          <a:lstStyle/>
+          <a:p>
+            <a:pPr>
+              <a:defRPr sz="1000" b="0" i="0" u="none" strike="noStrike">
+                <a:solidFill>
+                  <a:srgbClr val="000000"/>
+                </a:solidFill>
+                <a:latin typeface="Malgun Gothic"/>
+              </a:defRPr>
+            </a:pPr>
+            <a:endParaRPr lang="en-US"/>
+          </a:p>
+        </c:txPr>
+        <c:crossAx val="2094734552"/>
+        <c:crosses val="autoZero"/>
+        <c:auto val="1"/>
+        <c:lblAlgn val="ctr"/>
+        <c:noMultiLvlLbl val="1"/>
+      </c:catAx>
+      <c:valAx>
+        <c:axId val="2094734552"/>
+        <c:scaling>
+          <c:orientation val="minMax"/>
+          <c:max val="5"/>
+          <c:min val="0"/>
+        </c:scaling>
+        <c:delete val="0"/>
+        <c:axPos val="l"/>
+        <c:majorGridlines>
+          <c:spPr>
+            <a:ln w="12700" cap="flat">
+              <a:solidFill>
+                <a:srgbClr val="D9D9D9"/>
+              </a:solidFill>
+              <a:prstDash val="dash"/>
+              <a:round/>
+            </a:ln>
+          </c:spPr>
+        </c:majorGridlines>
+        <c:numFmt formatCode="General" sourceLinked="0"/>
+        <c:majorTickMark val="out"/>
+        <c:minorTickMark val="none"/>
+        <c:tickLblPos val="nextTo"/>
+        <c:spPr>
+          <a:ln w="12700" cap="flat">
+            <a:solidFill>
+              <a:srgbClr val="888888"/>
+            </a:solidFill>
+            <a:prstDash val="solid"/>
+            <a:round/>
+          </a:ln>
+        </c:spPr>
+        <c:txPr>
+          <a:bodyPr/>
+          <a:lstStyle/>
+          <a:p>
+            <a:pPr>
+              <a:defRPr sz="850" b="0" i="0" u="none" strike="noStrike">
+                <a:solidFill>
+                  <a:srgbClr val="000000"/>
+                </a:solidFill>
+                <a:latin typeface="Malgun Gothic"/>
+              </a:defRPr>
+            </a:pPr>
+            <a:endParaRPr lang="en-US"/>
+          </a:p>
+        </c:txPr>
+        <c:crossAx val="2094734554"/>
+        <c:crosses val="autoZero"/>
+        <c:crossBetween val="between"/>
+        <c:majorUnit val="1"/>
+      </c:valAx>
+      <c:spPr>
+        <a:noFill/>
+        <a:ln>
+          <a:noFill/>
+        </a:ln>
+        <a:effectLst/>
+      </c:spPr>
+    </c:plotArea>
+    <c:legend>
+      <c:legendPos val="b"/>
+      <c:overlay val="0"/>
+      <c:txPr>
+        <a:bodyPr/>
+        <a:lstStyle/>
+        <a:p>
+          <a:pPr>
+            <a:defRPr sz="900">
+              <a:latin typeface="Malgun Gothic"/>
+              <a:cs typeface="Malgun Gothic"/>
+            </a:defRPr>
+          </a:pPr>
+          <a:endParaRPr lang="en-US"/>
+        </a:p>
+      </c:txPr>
+    </c:legend>
+    <c:plotVisOnly val="1"/>
+    <c:dispBlanksAs val="span"/>
+  </c:chart>
+  <c:spPr>
+    <a:noFill/>
+    <a:ln>
+      <a:noFill/>
+    </a:ln>
+    <a:effectLst/>
+  </c:spPr>
+  <c:externalData r:id="rId1">
+    <c:autoUpdate val="0"/>
+  </c:externalData>
+</c:chartSpace>
 </file>
 
 <file path=ppt/notesMasters/notesMaster1.xml><?xml version="1.0" encoding="utf-8"?>
@@ -605,7 +1281,7 @@
           <a:p>
             <a:r>
               <a:rPr lang="en-US" dirty="0"/>
-              <a:t>구획 설계입니다. 경험식으로 선미격벽과 충돌격벽을 배치한 뒤 화물창을 여섯 구획으로 나눴으며, 구획 길이 25미터는 웹프레임 간격 3.125미터의 정확히 여덟 칸입니다. 기관실은 축과 축발전기, 주기관 길이를 고려해 37미터로 정했습니다. 메탄올 탱크는 IMO 지침에 따라 코퍼댐으로 둘러쌌고, 용적 4,923세제곱미터로 왕복 항해에 충분한 여유를 확보했습니다.</a:t>
+              <a:t>구획 설계입니다. 경험식으로 선미격벽과 충돌격벽을 배치한 뒤 화물창을 여섯 구획으로 나눴으며, 구획 길이 25미터는 웹프레임 간격 3.125미터의 정확히 여덟 칸입니다. 기관실은 축과 축발전기, 주기관 길이를 고려해 37미터로 정했습니다. 메탄올 탱크는 IMO 지침에 따라 코퍼댐으로 둘러쌌고, 용적 4,923세제곱미터입니다.</a:t>
             </a:r>
             <a:endParaRPr lang="en-US" dirty="0"/>
           </a:p>
@@ -693,7 +1369,7 @@
           <a:p>
             <a:r>
               <a:rPr lang="en-US" dirty="0"/>
-              <a:t>화물창은 MARPOL에 따라 윙탱크 폭과 이중저 높이를 각각 2.4미터로 한 이중선체이며, 총 용적 77,839세제곱미터입니다. 가상 기름 유출량과 슬롭탱크 용량도 규정 이내입니다. 건현은 ICLL 기준 허용 만재흘수 16.4미터로 스캔틀링 흘수 14.1미터를 상회하며, 의장수 2,559로 앵커와 체인 사양을 결정했습니다. 가시거리는 전 흘수 조건에서 500미터 이내로 SOLAS 시야 규정을 만족합니다.</a:t>
+              <a:t>화물창은 MARPOL에 따라 윙탱크 폭과 이중저 높이를 각각 2.4미터로 한 이중선체이며, 총 용적 77,839세제곱미터입니다. 가상 기름 유출량과 슬롭탱크 용량도 규정 이내입니다. 건현은 ICLL 기준 허용 만재흘수 16.4미터로 스캔틀링 흘수를 상회하고, 의장수 2,559로 앵커와 체인을 결정했습니다. 가시거리도 전 흘수 조건에서 SOLAS 규정을 만족합니다.</a:t>
             </a:r>
             <a:endParaRPr lang="en-US" dirty="0"/>
           </a:p>
@@ -781,7 +1457,7 @@
           <a:p>
             <a:r>
               <a:rPr lang="en-US" dirty="0"/>
-              <a:t>복원성입니다. 경하중량은 로터 세일을 포함해 14,724톤이며, 경하부터 만재까지 출항과 도착을 나눈 열 가지 적재조건을 검토했습니다. 모든 조건에서 IS Code 2008 비손상 복원성 기준과 종강도 허용치를 만족했습니다. 손상 복원성은 MARPOL 28규칙에 따라 네 가지 손상 케이스를 두 조건에 적용했고, 전 케이스에서 잔존복원성 기준을 만족했습니다.</a:t>
+              <a:t>복원성입니다. 경하중량은 로터 세일을 포함해 14,724톤이며, 경하부터 만재까지 출항과 도착을 나눈 열 가지 적재조건을 검토했습니다. 모든 조건에서 IS Code 2008 비손상 기준과 종강도 허용치를 만족했습니다. 손상 복원성은 MARPOL 28규칙의 네 가지 손상 케이스 전부에서 잔존복원성 기준을 만족했습니다.</a:t>
             </a:r>
             <a:endParaRPr lang="en-US" dirty="0"/>
           </a:p>
@@ -869,7 +1545,7 @@
           <a:p>
             <a:r>
               <a:rPr lang="en-US" dirty="0"/>
-              <a:t>구조는 CSR 하중 체인을 원문 그대로 구현한 것이 특징입니다. 22개 동적 하중케이스 전부를 반영했고, 존별 대표 부재가 아니라 모든 요소판 단위로 전수 검토했습니다. 그 결과 관성모멘트는 요구값 대비 109퍼센트 여유가 있고, 극한강도 이용률 78.5퍼센트, 피로수명 46.4년으로 전 항목을 만족합니다. 모든 계산은 선급 프로그램과 0.003퍼센트 이내로 일치했습니다.</a:t>
+              <a:t>구조 설계입니다. CSR 조문을 단순화 없이 그대로 구현한 것이 특징입니다. 동적 하중케이스 22개 전부에 대해 압력을 산출했고, 존별 대표 부재가 아니라 판 17개 스트레이크와 종보강재 16개 항목을 요소판 단위로 전수 검토했습니다. 그 결과 관성모멘트는 요구 대비 109퍼센트, 갑판 단면계수는 40.6퍼센트 여유를 확보했습니다.</a:t>
             </a:r>
             <a:endParaRPr lang="en-US" dirty="0"/>
           </a:p>
@@ -957,7 +1633,7 @@
           <a:p>
             <a:r>
               <a:rPr lang="en-US" dirty="0"/>
-              <a:t>친환경 설계입니다. 본 항로가 지나는 카리브해는 북동무역풍이 연중 안정적이라, 왕로와 귀로 어느 구간에도 정면풍이 걸리지 않습니다. 이 점을 활용해 28미터 로터 세일 3기를 배치했고, 제동마력 725킬로와트, NCR의 8.8퍼센트를 절감합니다. 그 결과 최종 EEDI는 3.475로 Phase 3 요구값 3.568을 만족합니다.</a:t>
+              <a:t>검증은 두 방향입니다. 먼저 한국선급 SeaTrust-HullScan과 교차검증해 극한강도 굽힘모멘트가 0.003퍼센트 차이로 일치했고, 피로는 156개 부재 전부 통과해 최소 수명 46.4년입니다. 정수중 굽힘모멘트는 적하지침서가 없어 규칙 최소값을 채택했는데, 이 값이 하한이므로 실제 하중이 몇 배까지 커져도 단면이 성립하는지 역산했습니다. 호깅 2.06배, 새깅 3.54배까지 여유가 있습니다.</a:t>
             </a:r>
             <a:endParaRPr lang="en-US" dirty="0"/>
           </a:p>
@@ -1045,7 +1721,7 @@
           <a:p>
             <a:r>
               <a:rPr lang="en-US" dirty="0"/>
-              <a:t>경제성입니다. 건조비는 약 2,666만 달러, 연간 운항비는 1,607만 달러이며, 현재 TD9 시황 기준 단순 투자회수기간은 약 0.81년으로 평가됩니다. 정리하면 본 설계선은 관련 국제 규정과 선급 요건을 모두 만족하면서, 메탄올 이중연료와 축발전기, 로터 세일로 EEDI Phase 3까지 만족시킨 74K급 원유운반선입니다.</a:t>
+              <a:t>친환경 설계입니다. 본 항로가 지나는 카리브해는 북동무역풍이 연중 안정적이라, 왕로와 귀로 어느 구간에도 정면풍이 걸리지 않습니다. 이 점을 활용해 28미터 로터 세일 3기를 배치했고, 제동마력 725킬로와트, NCR의 8.8퍼센트를 절감합니다. 그 결과 최종 EEDI는 3.475로 Phase 3 요구값 3.568을 만족합니다.</a:t>
             </a:r>
             <a:endParaRPr lang="en-US" dirty="0"/>
           </a:p>
@@ -1133,6 +1809,94 @@
           <a:p>
             <a:r>
               <a:rPr lang="en-US" dirty="0"/>
+              <a:t>경제성입니다. 건조비는 약 2,666만 달러, 연간 운항비는 1,607만 달러이며, 현재 TD9 시황 기준 투자회수기간은 약 0.81년입니다. 정리하면 본 설계선은 관련 국제 규정과 선급 요건을 모두 만족하면서, 메탄올 이중연료와 축발전기, 로터 세일로 EEDI Phase 3까지 만족시킨 74K급 원유운반선입니다.</a:t>
+            </a:r>
+            <a:endParaRPr lang="en-US" dirty="0"/>
+          </a:p>
+        </p:txBody>
+      </p:sp>
+      <p:sp>
+        <p:nvSpPr>
+          <p:cNvPr id="4" name="Slide Number Placeholder 3"/>
+          <p:cNvSpPr>
+            <a:spLocks noGrp="1"/>
+          </p:cNvSpPr>
+          <p:nvPr>
+            <p:ph type="sldNum" sz="quarter" idx="10"/>
+          </p:nvPr>
+        </p:nvSpPr>
+        <p:spPr/>
+        <p:txBody>
+          <a:bodyPr/>
+          <a:lstStyle/>
+          <a:p>
+            <a:fld id="{F7021451-1387-4CA6-816F-3879F97B5CBC}" type="slidenum">
+              <a:rPr lang="en-US"/>
+              <a:t>16</a:t>
+            </a:fld>
+            <a:endParaRPr lang="en-US"/>
+          </a:p>
+        </p:txBody>
+      </p:sp>
+    </p:spTree>
+    <p:extLst>
+      <p:ext uri="{BB962C8B-B14F-4D97-AF65-F5344CB8AC3E}">
+        <p14:creationId xmlns:p14="http://schemas.microsoft.com/office/powerpoint/2010/main" val="1024086991"/>
+      </p:ext>
+    </p:extLst>
+  </p:cSld>
+  <p:clrMapOvr>
+    <a:masterClrMapping/>
+  </p:clrMapOvr>
+</p:notes>
+</file>
+
+<file path=ppt/notesSlides/notesSlide17.xml><?xml version="1.0" encoding="utf-8"?>
+<p:notes xmlns:a="http://schemas.openxmlformats.org/drawingml/2006/main" xmlns:r="http://schemas.openxmlformats.org/officeDocument/2006/relationships" xmlns:p="http://schemas.openxmlformats.org/presentationml/2006/main">
+  <p:cSld>
+    <p:spTree>
+      <p:nvGrpSpPr>
+        <p:cNvPr id="1" name=""/>
+        <p:cNvGrpSpPr/>
+        <p:nvPr/>
+      </p:nvGrpSpPr>
+      <p:grpSpPr>
+        <a:xfrm>
+          <a:off x="0" y="0"/>
+          <a:ext cx="0" cy="0"/>
+          <a:chOff x="0" y="0"/>
+          <a:chExt cx="0" cy="0"/>
+        </a:xfrm>
+      </p:grpSpPr>
+      <p:sp>
+        <p:nvSpPr>
+          <p:cNvPr id="2" name="Slide Image Placeholder 1"/>
+          <p:cNvSpPr>
+            <a:spLocks noGrp="1" noRot="1" noChangeAspect="1"/>
+          </p:cNvSpPr>
+          <p:nvPr>
+            <p:ph type="sldImg"/>
+          </p:nvPr>
+        </p:nvSpPr>
+        <p:spPr/>
+      </p:sp>
+      <p:sp>
+        <p:nvSpPr>
+          <p:cNvPr id="3" name="Notes Placeholder 2"/>
+          <p:cNvSpPr>
+            <a:spLocks noGrp="1"/>
+          </p:cNvSpPr>
+          <p:nvPr>
+            <p:ph type="body" idx="1"/>
+          </p:nvPr>
+        </p:nvSpPr>
+        <p:spPr/>
+        <p:txBody>
+          <a:bodyPr/>
+          <a:lstStyle/>
+          <a:p>
+            <a:r>
+              <a:rPr lang="en-US" dirty="0"/>
               <a:t>이상으로 발표를 마치겠습니다. 감사합니다.</a:t>
             </a:r>
             <a:endParaRPr lang="en-US" dirty="0"/>
@@ -1156,7 +1920,7 @@
           <a:p>
             <a:fld id="{F7021451-1387-4CA6-816F-3879F97B5CBC}" type="slidenum">
               <a:rPr lang="en-US"/>
-              <a:t>16</a:t>
+              <a:t>17</a:t>
             </a:fld>
             <a:endParaRPr lang="en-US"/>
           </a:p>
@@ -1221,7 +1985,7 @@
           <a:p>
             <a:r>
               <a:rPr lang="en-US" dirty="0"/>
-              <a:t>발표는 개념 설계부터 선형, 추진, 구획, 복원성, 구조, 친환경 순으로 진행하겠습니다. 본 설계선의 핵심은 세 가지입니다. 첫째, 메탄올 이중연료입니다. LNG는 극저온 탱크 부담이 크고 저유황유는 북미 배출규제해역에서 세정장치가 필요한 반면, 메탄올은 상온 액상 저장이 가능하고 황 규제를 별도 장치 없이 충족합니다. 둘째는 축발전기와 로터 세일을 통한 EEDI Phase 3 대응, 셋째는 단거리 TD9 항로 전략입니다.</a:t>
+              <a:t>발표는 개념 설계부터 선형, 추진, 구획, 복원성, 구조, 친환경 순으로 진행하겠습니다. 본 설계선의 핵심은 세 가지입니다. 첫째, 메탄올 이중연료입니다. LNG의 극저온 탱크 부담도, 저유황유의 세정장치도 없이 북미 배출규제해역 기준을 충족합니다. 둘째는 축발전기와 로터 세일을 통한 EEDI Phase 3 대응, 셋째는 단거리 TD9 항로 전략입니다.</a:t>
             </a:r>
             <a:endParaRPr lang="en-US" dirty="0"/>
           </a:p>
@@ -1309,7 +2073,7 @@
           <a:p>
             <a:r>
               <a:rPr lang="en-US" dirty="0"/>
-              <a:t>먼저 항로 선정입니다. 메탄올 벙커링이 가능하고 미국 최대 원유 수출항인 Corpus Christi를 공통 양하항으로 두고 세 항로를 비교했습니다. 콜롬비아 Conveñas 항로는 세 후보 중 유일하게 본선 규격과 일치하는 공인 운임지수 TD9가 존재하고 물동량도 가장 많습니다. 특히 편도 1,652해리 단거리라 필요한 메탄올 탱크가 만재 배수용적의 1.1퍼센트에 그쳐, 메탄올 추진의 약점인 적재량 손실을 해소합니다.</a:t>
+              <a:t>먼저 항로 선정입니다. 메탄올 벙커링이 가능하고 미국 최대 원유 수출항인 Corpus Christi를 공통 양하항으로 두고 세 항로를 비교했습니다. 콜롬비아 Conveñas 항로는 본선 규격과 일치하는 공인 운임지수 TD9가 있고 물동량도 가장 많습니다. 특히 편도 1,652해리 단거리라 메탄올 탱크가 만재 배수용적의 1.1퍼센트에 그쳐, 메탄올 추진의 약점인 적재량 손실을 해소합니다.</a:t>
             </a:r>
             <a:endParaRPr lang="en-US" dirty="0"/>
           </a:p>
@@ -1397,7 +2161,7 @@
           <a:p>
             <a:r>
               <a:rPr lang="en-US" dirty="0"/>
-              <a:t>선형 설계입니다. 경하중량 약산식과 Froude 상사를 연립해 수선간장 206.3미터, 폭 35.8미터, 재화중량 74,839톤의 초기 제원을 도출했습니다. 이후 Opthull의 Lackenby 변환으로 단면적 곡선을 수정해 방형계수를 0.8014에서 0.8193으로 키우면서, 저속 비대선 특성에 맞게 부심을 선수 측 2.66퍼센트 위치에 유지했습니다.</a:t>
+              <a:t>선형 설계입니다. 경하중량 약산식과 Froude 상사를 연립해 수선간장 206.3미터, 폭 35.8미터, 재화중량 74,839톤의 초기 제원을 도출했습니다. 이후 Lackenby 변환으로 단면적 곡선을 수정해 방형계수를 0.8014에서 0.8193으로 키우면서, 부심은 선수 측 2.66퍼센트 위치에 유지했습니다.</a:t>
             </a:r>
             <a:endParaRPr lang="en-US" dirty="0"/>
           </a:p>
@@ -1485,7 +2249,7 @@
           <a:p>
             <a:r>
               <a:rPr lang="en-US" dirty="0"/>
-              <a:t>선수는 저속 비대선에서 조파저항 비중이 작다는 점을 고려해 벌브를 7.78미터에서 1.6미터로 줄인 Plank type을, 선미는 반류 분포가 균일해 추진효율에 유리한 Moderate U-type을 채택했습니다. CFD는 RANS 방정식과 레이놀즈 응력 모델, DFBI 조건으로 수행했으며, 방형계수를 키웠음에도 저항 증가가 1.66퍼센트에 그쳤습니다.</a:t>
+              <a:t>선수는 저속 비대선에서 조파저항 비중이 작다는 점을 고려해 벌브를 7.78미터에서 1.6미터로 줄인 Plank type을, 선미는 반류가 균일해 추진효율에 유리한 Moderate U-type을 채택했습니다. CFD는 RANS와 레이놀즈 응력 모델, DFBI 조건으로 수행했으며, 방형계수를 키웠음에도 저항 증가는 1.66퍼센트에 그쳤습니다.</a:t>
             </a:r>
             <a:endParaRPr lang="en-US" dirty="0"/>
           </a:p>
@@ -1573,7 +2337,7 @@
           <a:p>
             <a:r>
               <a:rPr lang="en-US" dirty="0"/>
-              <a:t>저항은 Holtrop-Mennen 경험식을 CFD 및 ITTC 1978 실선 확장 결과와 비교해 보정계수 0.7315를 산출하고 전 속도 대역에 적용했습니다. 설계속도는 속도를 올릴 때 늘어나는 연료비와, 항차수 증가에 따른 운임 수익을 함께 반영해 연간 순이익이 최대가 되는 14.3노트로 선정했습니다. 이때 설계선에 추정된 소요 마력은 약 9,650킬로와트입니다.</a:t>
+              <a:t>저항은 Holtrop-Mennen 경험식을 CFD 및 ITTC 1978 실선 확장 결과와 비교해 보정계수 0.7315를 산출해 적용했습니다. 설계속도는 연료비와 항차수 증가에 따른 운임 수익을 함께 반영해, 연간 순이익이 최대가 되는 14.3노트로 선정했습니다. 이때 추정된 소요 마력은 약 9,650킬로와트입니다.</a:t>
             </a:r>
             <a:endParaRPr lang="en-US" dirty="0"/>
           </a:p>
@@ -1661,7 +2425,7 @@
           <a:p>
             <a:r>
               <a:rPr lang="en-US" dirty="0"/>
-              <a:t>주기관은 메탄올 이중연료 운전이 가능한 5G60ME-C10.5-LGIM을 선정했습니다. 앞서 추정한 마력이 MEPC 최소추진마력 10,840킬로와트에 못 미쳐, 이를 상회하는 SMCR 10,890킬로와트 사양으로 결정했습니다. 질소산화물은 EGRTC로 대응하며, 축발전기 1,000킬로와트로 항해 중 보조기관 가동을 최소화했습니다. 이것만으로 EEDI가 4.411에서 3.580까지 내려갑니다.</a:t>
+              <a:t>주기관은 메탄올 이중연료 운전이 가능한 5G60ME-C10.5-LGIM을 선정했습니다. 앞서 추정한 마력이 MEPC 최소추진마력 10,840킬로와트에 못 미쳐, 이를 상회하는 SMCR 10,890킬로와트로 결정했습니다. 질소산화물은 EGRTC로 대응하고, 축발전기 1,000킬로와트로 항해 중 보조기관 가동을 최소화했습니다. 이것만으로 EEDI가 4.411에서 3.580까지 내려갑니다.</a:t>
             </a:r>
             <a:endParaRPr lang="en-US" dirty="0"/>
           </a:p>
@@ -1837,7 +2601,7 @@
           <a:p>
             <a:r>
               <a:rPr lang="en-US" dirty="0"/>
-              <a:t>타 면적은 네 가지 추정법의 결과 범위 안에서 42.83제곱미터로 정하고, 제작이 용이한 NACA 단면의 Semi-spade 타를 채택했습니다. 프로펠러·선체 간 간격도 모두 기준을 만족합니다. 조종성능은 두 흘수 조건에서 선회, 지그재그, 크래시 스톱, 나선 시험을 수행했고 전 항목이 IMO 기준을 만족했습니다.</a:t>
+              <a:t>타 면적은 네 가지 추정법의 결과 범위 안에서 42.83제곱미터로 정하고, 제작이 용이한 NACA 단면의 Semi-spade 타를 채택했습니다. 프로펠러·선체 간 간격도 기준을 만족합니다. 조종성능은 두 흘수 조건에서 선회, 지그재그, 크래시 스톱, 나선 시험을 수행했고 전 항목이 IMO 기준을 만족했습니다.</a:t>
             </a:r>
             <a:endParaRPr lang="en-US" dirty="0"/>
           </a:p>
@@ -8757,7 +9521,7 @@
                 <a:ea typeface="Malgun Gothic" pitchFamily="34" charset="-122"/>
                 <a:cs typeface="Malgun Gothic" pitchFamily="34" charset="-120"/>
               </a:rPr>
-              <a:t>  –  CSR 기반 중앙단면 설계 및 강도 검증</a:t>
+              <a:t>  –  CSR 규정 구현 및 중앙단면 치수 결정</a:t>
             </a:r>
             <a:endParaRPr lang="en-US" sz="2200" dirty="0"/>
           </a:p>
@@ -8788,7 +9552,7 @@
       </p:sp>
       <p:pic>
         <p:nvPicPr>
-          <p:cNvPr id="5" name="Image 0" descr="imgs/p3-061-074.png">    </p:cNvPr>
+          <p:cNvPr id="5" name="Image 0" descr="imgs/st_web.png">    </p:cNvPr>
           <p:cNvPicPr>
             <a:picLocks noChangeAspect="1"/>
           </p:cNvPicPr>
@@ -8802,8 +9566,8 @@
         </p:blipFill>
         <p:spPr>
           <a:xfrm>
-            <a:off x="701468" y="960120"/>
-            <a:ext cx="4814983" cy="3749040"/>
+            <a:off x="1154379" y="914400"/>
+            <a:ext cx="4137762" cy="3200400"/>
           </a:xfrm>
           <a:prstGeom prst="rect">
             <a:avLst/>
@@ -8818,8 +9582,8 @@
         </p:nvSpPr>
         <p:spPr>
           <a:xfrm>
-            <a:off x="502920" y="4745736"/>
-            <a:ext cx="5212080" cy="237744"/>
+            <a:off x="457200" y="4169664"/>
+            <a:ext cx="5532120" cy="237744"/>
           </a:xfrm>
           <a:prstGeom prst="rect">
             <a:avLst/>
@@ -8843,22 +9607,1114 @@
                 <a:ea typeface="Malgun Gothic" pitchFamily="34" charset="-122"/>
                 <a:cs typeface="Malgun Gothic" pitchFamily="34" charset="-120"/>
               </a:rPr>
-              <a:t>Typical Web Frame Section (70k_typical_web_section)</a:t>
+              <a:t>대표 웹 프레임 단면 — 브래킷 반경 · 개구부 · 트리핑 브래킷 (설계 도면)</a:t>
             </a:r>
             <a:endParaRPr lang="en-US" sz="1000" dirty="0"/>
           </a:p>
         </p:txBody>
       </p:sp>
+      <p:graphicFrame>
+        <p:nvGraphicFramePr>
+          <p:cNvPr id="14" name="Table 0"/>
+          <p:cNvGraphicFramePr>
+            <a:graphicFrameLocks noGrp="1"/>
+          </p:cNvGraphicFramePr>
+          <p:nvPr>
+            <p:extLst>
+              <p:ext uri="{D42A27DB-BD31-4B8C-83A1-F6EECF244321}">
+                <p14:modId xmlns:p14="http://schemas.microsoft.com/office/powerpoint/2010/main" val="1579011935"/>
+              </p:ext>
+            </p:extLst>
+          </p:nvPr>
+        </p:nvGraphicFramePr>
+        <p:xfrm>
+          <a:off x="6172200" y="914400"/>
+          <a:ext cx="5559552" cy="914400"/>
+        </p:xfrm>
+        <a:graphic>
+          <a:graphicData uri="http://schemas.openxmlformats.org/drawingml/2006/table">
+            <a:tbl>
+              <a:tblPr/>
+              <a:tblGrid>
+                <a:gridCol w="2359152"/>
+                <a:gridCol w="1005840"/>
+                <a:gridCol w="1097280"/>
+                <a:gridCol w="1097280"/>
+              </a:tblGrid>
+              <a:tr h="365760">
+                <a:tc>
+                  <a:txBody>
+                    <a:bodyPr/>
+                    <a:lstStyle/>
+                    <a:p>
+                      <a:pPr algn="ctr" indent="0" marL="0">
+                        <a:buNone/>
+                      </a:pPr>
+                      <a:r>
+                        <a:rPr lang="en-US" sz="1000" b="1" dirty="0">
+                          <a:solidFill>
+                            <a:srgbClr val="262626"/>
+                          </a:solidFill>
+                          <a:latin typeface="Malgun Gothic" pitchFamily="34" charset="0"/>
+                          <a:ea typeface="Malgun Gothic" pitchFamily="34" charset="-122"/>
+                          <a:cs typeface="Malgun Gothic" pitchFamily="34" charset="-120"/>
+                        </a:rPr>
+                        <a:t>중앙단면 성능 (net-n50)</a:t>
+                      </a:r>
+                      <a:endParaRPr lang="en-US" sz="1000" dirty="0">
+                        <a:latin typeface="Malgun Gothic" charset="0"/>
+                        <a:ea typeface="Malgun Gothic" charset="0"/>
+                        <a:cs typeface="Malgun Gothic" charset="0"/>
+                      </a:endParaRPr>
+                    </a:p>
+                  </a:txBody>
+                  <a:tcPr marL="91440" marR="91440" marT="45720" marB="45720" anchor="ctr">
+                    <a:lnL w="6350" cap="flat" cmpd="sng" algn="ctr">
+                      <a:solidFill>
+                        <a:srgbClr val="9CA3AF"/>
+                      </a:solidFill>
+                      <a:prstDash val="solid"/>
+                      <a:round/>
+                      <a:headEnd type="none" w="med" len="med"/>
+                      <a:tailEnd type="none" w="med" len="med"/>
+                    </a:lnL>
+                    <a:lnR w="6350" cap="flat" cmpd="sng" algn="ctr">
+                      <a:solidFill>
+                        <a:srgbClr val="9CA3AF"/>
+                      </a:solidFill>
+                      <a:prstDash val="solid"/>
+                      <a:round/>
+                      <a:headEnd type="none" w="med" len="med"/>
+                      <a:tailEnd type="none" w="med" len="med"/>
+                    </a:lnR>
+                    <a:lnT w="6350" cap="flat" cmpd="sng" algn="ctr">
+                      <a:solidFill>
+                        <a:srgbClr val="9CA3AF"/>
+                      </a:solidFill>
+                      <a:prstDash val="solid"/>
+                      <a:round/>
+                      <a:headEnd type="none" w="med" len="med"/>
+                      <a:tailEnd type="none" w="med" len="med"/>
+                    </a:lnT>
+                    <a:lnB w="6350" cap="flat" cmpd="sng" algn="ctr">
+                      <a:solidFill>
+                        <a:srgbClr val="9CA3AF"/>
+                      </a:solidFill>
+                      <a:prstDash val="solid"/>
+                      <a:round/>
+                      <a:headEnd type="none" w="med" len="med"/>
+                      <a:tailEnd type="none" w="med" len="med"/>
+                    </a:lnB>
+                    <a:solidFill>
+                      <a:srgbClr val="D9D9D9"/>
+                    </a:solidFill>
+                  </a:tcPr>
+                </a:tc>
+                <a:tc>
+                  <a:txBody>
+                    <a:bodyPr/>
+                    <a:lstStyle/>
+                    <a:p>
+                      <a:pPr algn="ctr" indent="0" marL="0">
+                        <a:buNone/>
+                      </a:pPr>
+                      <a:r>
+                        <a:rPr lang="en-US" sz="1000" b="1" dirty="0">
+                          <a:solidFill>
+                            <a:srgbClr val="262626"/>
+                          </a:solidFill>
+                          <a:latin typeface="Malgun Gothic" pitchFamily="34" charset="0"/>
+                          <a:ea typeface="Malgun Gothic" pitchFamily="34" charset="-122"/>
+                          <a:cs typeface="Malgun Gothic" pitchFamily="34" charset="-120"/>
+                        </a:rPr>
+                        <a:t>설계</a:t>
+                      </a:r>
+                      <a:endParaRPr lang="en-US" sz="1000" dirty="0">
+                        <a:latin typeface="Malgun Gothic" charset="0"/>
+                        <a:ea typeface="Malgun Gothic" charset="0"/>
+                        <a:cs typeface="Malgun Gothic" charset="0"/>
+                      </a:endParaRPr>
+                    </a:p>
+                  </a:txBody>
+                  <a:tcPr marL="91440" marR="91440" marT="45720" marB="45720" anchor="ctr">
+                    <a:lnL w="6350" cap="flat" cmpd="sng" algn="ctr">
+                      <a:solidFill>
+                        <a:srgbClr val="9CA3AF"/>
+                      </a:solidFill>
+                      <a:prstDash val="solid"/>
+                      <a:round/>
+                      <a:headEnd type="none" w="med" len="med"/>
+                      <a:tailEnd type="none" w="med" len="med"/>
+                    </a:lnL>
+                    <a:lnR w="6350" cap="flat" cmpd="sng" algn="ctr">
+                      <a:solidFill>
+                        <a:srgbClr val="9CA3AF"/>
+                      </a:solidFill>
+                      <a:prstDash val="solid"/>
+                      <a:round/>
+                      <a:headEnd type="none" w="med" len="med"/>
+                      <a:tailEnd type="none" w="med" len="med"/>
+                    </a:lnR>
+                    <a:lnT w="6350" cap="flat" cmpd="sng" algn="ctr">
+                      <a:solidFill>
+                        <a:srgbClr val="9CA3AF"/>
+                      </a:solidFill>
+                      <a:prstDash val="solid"/>
+                      <a:round/>
+                      <a:headEnd type="none" w="med" len="med"/>
+                      <a:tailEnd type="none" w="med" len="med"/>
+                    </a:lnT>
+                    <a:lnB w="6350" cap="flat" cmpd="sng" algn="ctr">
+                      <a:solidFill>
+                        <a:srgbClr val="9CA3AF"/>
+                      </a:solidFill>
+                      <a:prstDash val="solid"/>
+                      <a:round/>
+                      <a:headEnd type="none" w="med" len="med"/>
+                      <a:tailEnd type="none" w="med" len="med"/>
+                    </a:lnB>
+                    <a:solidFill>
+                      <a:srgbClr val="D9D9D9"/>
+                    </a:solidFill>
+                  </a:tcPr>
+                </a:tc>
+                <a:tc>
+                  <a:txBody>
+                    <a:bodyPr/>
+                    <a:lstStyle/>
+                    <a:p>
+                      <a:pPr algn="ctr" indent="0" marL="0">
+                        <a:buNone/>
+                      </a:pPr>
+                      <a:r>
+                        <a:rPr lang="en-US" sz="1000" b="1" dirty="0">
+                          <a:solidFill>
+                            <a:srgbClr val="262626"/>
+                          </a:solidFill>
+                          <a:latin typeface="Malgun Gothic" pitchFamily="34" charset="0"/>
+                          <a:ea typeface="Malgun Gothic" pitchFamily="34" charset="-122"/>
+                          <a:cs typeface="Malgun Gothic" pitchFamily="34" charset="-120"/>
+                        </a:rPr>
+                        <a:t>CSR 요구</a:t>
+                      </a:r>
+                      <a:endParaRPr lang="en-US" sz="1000" dirty="0">
+                        <a:latin typeface="Malgun Gothic" charset="0"/>
+                        <a:ea typeface="Malgun Gothic" charset="0"/>
+                        <a:cs typeface="Malgun Gothic" charset="0"/>
+                      </a:endParaRPr>
+                    </a:p>
+                  </a:txBody>
+                  <a:tcPr marL="91440" marR="91440" marT="45720" marB="45720" anchor="ctr">
+                    <a:lnL w="6350" cap="flat" cmpd="sng" algn="ctr">
+                      <a:solidFill>
+                        <a:srgbClr val="9CA3AF"/>
+                      </a:solidFill>
+                      <a:prstDash val="solid"/>
+                      <a:round/>
+                      <a:headEnd type="none" w="med" len="med"/>
+                      <a:tailEnd type="none" w="med" len="med"/>
+                    </a:lnL>
+                    <a:lnR w="6350" cap="flat" cmpd="sng" algn="ctr">
+                      <a:solidFill>
+                        <a:srgbClr val="9CA3AF"/>
+                      </a:solidFill>
+                      <a:prstDash val="solid"/>
+                      <a:round/>
+                      <a:headEnd type="none" w="med" len="med"/>
+                      <a:tailEnd type="none" w="med" len="med"/>
+                    </a:lnR>
+                    <a:lnT w="6350" cap="flat" cmpd="sng" algn="ctr">
+                      <a:solidFill>
+                        <a:srgbClr val="9CA3AF"/>
+                      </a:solidFill>
+                      <a:prstDash val="solid"/>
+                      <a:round/>
+                      <a:headEnd type="none" w="med" len="med"/>
+                      <a:tailEnd type="none" w="med" len="med"/>
+                    </a:lnT>
+                    <a:lnB w="6350" cap="flat" cmpd="sng" algn="ctr">
+                      <a:solidFill>
+                        <a:srgbClr val="9CA3AF"/>
+                      </a:solidFill>
+                      <a:prstDash val="solid"/>
+                      <a:round/>
+                      <a:headEnd type="none" w="med" len="med"/>
+                      <a:tailEnd type="none" w="med" len="med"/>
+                    </a:lnB>
+                    <a:solidFill>
+                      <a:srgbClr val="D9D9D9"/>
+                    </a:solidFill>
+                  </a:tcPr>
+                </a:tc>
+                <a:tc>
+                  <a:txBody>
+                    <a:bodyPr/>
+                    <a:lstStyle/>
+                    <a:p>
+                      <a:pPr algn="ctr" indent="0" marL="0">
+                        <a:buNone/>
+                      </a:pPr>
+                      <a:r>
+                        <a:rPr lang="en-US" sz="1000" b="1" dirty="0">
+                          <a:solidFill>
+                            <a:srgbClr val="262626"/>
+                          </a:solidFill>
+                          <a:latin typeface="Malgun Gothic" pitchFamily="34" charset="0"/>
+                          <a:ea typeface="Malgun Gothic" pitchFamily="34" charset="-122"/>
+                          <a:cs typeface="Malgun Gothic" pitchFamily="34" charset="-120"/>
+                        </a:rPr>
+                        <a:t>여유</a:t>
+                      </a:r>
+                      <a:endParaRPr lang="en-US" sz="1000" dirty="0">
+                        <a:latin typeface="Malgun Gothic" charset="0"/>
+                        <a:ea typeface="Malgun Gothic" charset="0"/>
+                        <a:cs typeface="Malgun Gothic" charset="0"/>
+                      </a:endParaRPr>
+                    </a:p>
+                  </a:txBody>
+                  <a:tcPr marL="91440" marR="91440" marT="45720" marB="45720" anchor="ctr">
+                    <a:lnL w="6350" cap="flat" cmpd="sng" algn="ctr">
+                      <a:solidFill>
+                        <a:srgbClr val="9CA3AF"/>
+                      </a:solidFill>
+                      <a:prstDash val="solid"/>
+                      <a:round/>
+                      <a:headEnd type="none" w="med" len="med"/>
+                      <a:tailEnd type="none" w="med" len="med"/>
+                    </a:lnL>
+                    <a:lnR w="6350" cap="flat" cmpd="sng" algn="ctr">
+                      <a:solidFill>
+                        <a:srgbClr val="9CA3AF"/>
+                      </a:solidFill>
+                      <a:prstDash val="solid"/>
+                      <a:round/>
+                      <a:headEnd type="none" w="med" len="med"/>
+                      <a:tailEnd type="none" w="med" len="med"/>
+                    </a:lnR>
+                    <a:lnT w="6350" cap="flat" cmpd="sng" algn="ctr">
+                      <a:solidFill>
+                        <a:srgbClr val="9CA3AF"/>
+                      </a:solidFill>
+                      <a:prstDash val="solid"/>
+                      <a:round/>
+                      <a:headEnd type="none" w="med" len="med"/>
+                      <a:tailEnd type="none" w="med" len="med"/>
+                    </a:lnT>
+                    <a:lnB w="6350" cap="flat" cmpd="sng" algn="ctr">
+                      <a:solidFill>
+                        <a:srgbClr val="9CA3AF"/>
+                      </a:solidFill>
+                      <a:prstDash val="solid"/>
+                      <a:round/>
+                      <a:headEnd type="none" w="med" len="med"/>
+                      <a:tailEnd type="none" w="med" len="med"/>
+                    </a:lnB>
+                    <a:solidFill>
+                      <a:srgbClr val="D9D9D9"/>
+                    </a:solidFill>
+                  </a:tcPr>
+                </a:tc>
+              </a:tr>
+              <a:tr h="365760">
+                <a:tc>
+                  <a:txBody>
+                    <a:bodyPr/>
+                    <a:lstStyle/>
+                    <a:p>
+                      <a:pPr algn="ctr" indent="0" marL="0">
+                        <a:buNone/>
+                      </a:pPr>
+                      <a:r>
+                        <a:rPr lang="en-US" sz="1000" dirty="0">
+                          <a:solidFill>
+                            <a:srgbClr val="262626"/>
+                          </a:solidFill>
+                          <a:latin typeface="Malgun Gothic" pitchFamily="34" charset="0"/>
+                          <a:ea typeface="Malgun Gothic" pitchFamily="34" charset="-122"/>
+                          <a:cs typeface="Malgun Gothic" pitchFamily="34" charset="-120"/>
+                        </a:rPr>
+                        <a:t>관성모멘트  I (m⁴)</a:t>
+                      </a:r>
+                      <a:endParaRPr lang="en-US" sz="1000" dirty="0">
+                        <a:latin typeface="Malgun Gothic" charset="0"/>
+                        <a:ea typeface="Malgun Gothic" charset="0"/>
+                        <a:cs typeface="Malgun Gothic" charset="0"/>
+                      </a:endParaRPr>
+                    </a:p>
+                  </a:txBody>
+                  <a:tcPr marL="91440" marR="91440" marT="45720" marB="45720" anchor="ctr">
+                    <a:lnL w="6350" cap="flat" cmpd="sng" algn="ctr">
+                      <a:solidFill>
+                        <a:srgbClr val="9CA3AF"/>
+                      </a:solidFill>
+                      <a:prstDash val="solid"/>
+                      <a:round/>
+                      <a:headEnd type="none" w="med" len="med"/>
+                      <a:tailEnd type="none" w="med" len="med"/>
+                    </a:lnL>
+                    <a:lnR w="6350" cap="flat" cmpd="sng" algn="ctr">
+                      <a:solidFill>
+                        <a:srgbClr val="9CA3AF"/>
+                      </a:solidFill>
+                      <a:prstDash val="solid"/>
+                      <a:round/>
+                      <a:headEnd type="none" w="med" len="med"/>
+                      <a:tailEnd type="none" w="med" len="med"/>
+                    </a:lnR>
+                    <a:lnT w="6350" cap="flat" cmpd="sng" algn="ctr">
+                      <a:solidFill>
+                        <a:srgbClr val="9CA3AF"/>
+                      </a:solidFill>
+                      <a:prstDash val="solid"/>
+                      <a:round/>
+                      <a:headEnd type="none" w="med" len="med"/>
+                      <a:tailEnd type="none" w="med" len="med"/>
+                    </a:lnT>
+                    <a:lnB w="6350" cap="flat" cmpd="sng" algn="ctr">
+                      <a:solidFill>
+                        <a:srgbClr val="9CA3AF"/>
+                      </a:solidFill>
+                      <a:prstDash val="solid"/>
+                      <a:round/>
+                      <a:headEnd type="none" w="med" len="med"/>
+                      <a:tailEnd type="none" w="med" len="med"/>
+                    </a:lnB>
+                  </a:tcPr>
+                </a:tc>
+                <a:tc>
+                  <a:txBody>
+                    <a:bodyPr/>
+                    <a:lstStyle/>
+                    <a:p>
+                      <a:pPr algn="ctr" indent="0" marL="0">
+                        <a:buNone/>
+                      </a:pPr>
+                      <a:r>
+                        <a:rPr lang="en-US" sz="1000" dirty="0">
+                          <a:solidFill>
+                            <a:srgbClr val="262626"/>
+                          </a:solidFill>
+                          <a:latin typeface="Malgun Gothic" pitchFamily="34" charset="0"/>
+                          <a:ea typeface="Malgun Gothic" pitchFamily="34" charset="-122"/>
+                          <a:cs typeface="Malgun Gothic" pitchFamily="34" charset="-120"/>
+                        </a:rPr>
+                        <a:t>262.07</a:t>
+                      </a:r>
+                      <a:endParaRPr lang="en-US" sz="1000" dirty="0">
+                        <a:latin typeface="Malgun Gothic" charset="0"/>
+                        <a:ea typeface="Malgun Gothic" charset="0"/>
+                        <a:cs typeface="Malgun Gothic" charset="0"/>
+                      </a:endParaRPr>
+                    </a:p>
+                  </a:txBody>
+                  <a:tcPr marL="91440" marR="91440" marT="45720" marB="45720" anchor="ctr">
+                    <a:lnL w="6350" cap="flat" cmpd="sng" algn="ctr">
+                      <a:solidFill>
+                        <a:srgbClr val="9CA3AF"/>
+                      </a:solidFill>
+                      <a:prstDash val="solid"/>
+                      <a:round/>
+                      <a:headEnd type="none" w="med" len="med"/>
+                      <a:tailEnd type="none" w="med" len="med"/>
+                    </a:lnL>
+                    <a:lnR w="6350" cap="flat" cmpd="sng" algn="ctr">
+                      <a:solidFill>
+                        <a:srgbClr val="9CA3AF"/>
+                      </a:solidFill>
+                      <a:prstDash val="solid"/>
+                      <a:round/>
+                      <a:headEnd type="none" w="med" len="med"/>
+                      <a:tailEnd type="none" w="med" len="med"/>
+                    </a:lnR>
+                    <a:lnT w="6350" cap="flat" cmpd="sng" algn="ctr">
+                      <a:solidFill>
+                        <a:srgbClr val="9CA3AF"/>
+                      </a:solidFill>
+                      <a:prstDash val="solid"/>
+                      <a:round/>
+                      <a:headEnd type="none" w="med" len="med"/>
+                      <a:tailEnd type="none" w="med" len="med"/>
+                    </a:lnT>
+                    <a:lnB w="6350" cap="flat" cmpd="sng" algn="ctr">
+                      <a:solidFill>
+                        <a:srgbClr val="9CA3AF"/>
+                      </a:solidFill>
+                      <a:prstDash val="solid"/>
+                      <a:round/>
+                      <a:headEnd type="none" w="med" len="med"/>
+                      <a:tailEnd type="none" w="med" len="med"/>
+                    </a:lnB>
+                  </a:tcPr>
+                </a:tc>
+                <a:tc>
+                  <a:txBody>
+                    <a:bodyPr/>
+                    <a:lstStyle/>
+                    <a:p>
+                      <a:pPr algn="ctr" indent="0" marL="0">
+                        <a:buNone/>
+                      </a:pPr>
+                      <a:r>
+                        <a:rPr lang="en-US" sz="1000" dirty="0">
+                          <a:solidFill>
+                            <a:srgbClr val="262626"/>
+                          </a:solidFill>
+                          <a:latin typeface="Malgun Gothic" pitchFamily="34" charset="0"/>
+                          <a:ea typeface="Malgun Gothic" pitchFamily="34" charset="-122"/>
+                          <a:cs typeface="Malgun Gothic" pitchFamily="34" charset="-120"/>
+                        </a:rPr>
+                        <a:t>125.17</a:t>
+                      </a:r>
+                      <a:endParaRPr lang="en-US" sz="1000" dirty="0">
+                        <a:latin typeface="Malgun Gothic" charset="0"/>
+                        <a:ea typeface="Malgun Gothic" charset="0"/>
+                        <a:cs typeface="Malgun Gothic" charset="0"/>
+                      </a:endParaRPr>
+                    </a:p>
+                  </a:txBody>
+                  <a:tcPr marL="91440" marR="91440" marT="45720" marB="45720" anchor="ctr">
+                    <a:lnL w="6350" cap="flat" cmpd="sng" algn="ctr">
+                      <a:solidFill>
+                        <a:srgbClr val="9CA3AF"/>
+                      </a:solidFill>
+                      <a:prstDash val="solid"/>
+                      <a:round/>
+                      <a:headEnd type="none" w="med" len="med"/>
+                      <a:tailEnd type="none" w="med" len="med"/>
+                    </a:lnL>
+                    <a:lnR w="6350" cap="flat" cmpd="sng" algn="ctr">
+                      <a:solidFill>
+                        <a:srgbClr val="9CA3AF"/>
+                      </a:solidFill>
+                      <a:prstDash val="solid"/>
+                      <a:round/>
+                      <a:headEnd type="none" w="med" len="med"/>
+                      <a:tailEnd type="none" w="med" len="med"/>
+                    </a:lnR>
+                    <a:lnT w="6350" cap="flat" cmpd="sng" algn="ctr">
+                      <a:solidFill>
+                        <a:srgbClr val="9CA3AF"/>
+                      </a:solidFill>
+                      <a:prstDash val="solid"/>
+                      <a:round/>
+                      <a:headEnd type="none" w="med" len="med"/>
+                      <a:tailEnd type="none" w="med" len="med"/>
+                    </a:lnT>
+                    <a:lnB w="6350" cap="flat" cmpd="sng" algn="ctr">
+                      <a:solidFill>
+                        <a:srgbClr val="9CA3AF"/>
+                      </a:solidFill>
+                      <a:prstDash val="solid"/>
+                      <a:round/>
+                      <a:headEnd type="none" w="med" len="med"/>
+                      <a:tailEnd type="none" w="med" len="med"/>
+                    </a:lnB>
+                  </a:tcPr>
+                </a:tc>
+                <a:tc>
+                  <a:txBody>
+                    <a:bodyPr/>
+                    <a:lstStyle/>
+                    <a:p>
+                      <a:pPr algn="ctr" indent="0" marL="0">
+                        <a:buNone/>
+                      </a:pPr>
+                      <a:r>
+                        <a:rPr lang="en-US" sz="1000" b="1" dirty="0">
+                          <a:solidFill>
+                            <a:srgbClr val="1F3864"/>
+                          </a:solidFill>
+                          <a:latin typeface="Malgun Gothic" pitchFamily="34" charset="0"/>
+                          <a:ea typeface="Malgun Gothic" pitchFamily="34" charset="-122"/>
+                          <a:cs typeface="Malgun Gothic" pitchFamily="34" charset="-120"/>
+                        </a:rPr>
+                        <a:t>+109%</a:t>
+                      </a:r>
+                      <a:endParaRPr lang="en-US" sz="1000" dirty="0">
+                        <a:latin typeface="Malgun Gothic" charset="0"/>
+                        <a:ea typeface="Malgun Gothic" charset="0"/>
+                        <a:cs typeface="Malgun Gothic" charset="0"/>
+                      </a:endParaRPr>
+                    </a:p>
+                  </a:txBody>
+                  <a:tcPr marL="91440" marR="91440" marT="45720" marB="45720" anchor="ctr">
+                    <a:lnL w="6350" cap="flat" cmpd="sng" algn="ctr">
+                      <a:solidFill>
+                        <a:srgbClr val="9CA3AF"/>
+                      </a:solidFill>
+                      <a:prstDash val="solid"/>
+                      <a:round/>
+                      <a:headEnd type="none" w="med" len="med"/>
+                      <a:tailEnd type="none" w="med" len="med"/>
+                    </a:lnL>
+                    <a:lnR w="6350" cap="flat" cmpd="sng" algn="ctr">
+                      <a:solidFill>
+                        <a:srgbClr val="9CA3AF"/>
+                      </a:solidFill>
+                      <a:prstDash val="solid"/>
+                      <a:round/>
+                      <a:headEnd type="none" w="med" len="med"/>
+                      <a:tailEnd type="none" w="med" len="med"/>
+                    </a:lnR>
+                    <a:lnT w="6350" cap="flat" cmpd="sng" algn="ctr">
+                      <a:solidFill>
+                        <a:srgbClr val="9CA3AF"/>
+                      </a:solidFill>
+                      <a:prstDash val="solid"/>
+                      <a:round/>
+                      <a:headEnd type="none" w="med" len="med"/>
+                      <a:tailEnd type="none" w="med" len="med"/>
+                    </a:lnT>
+                    <a:lnB w="6350" cap="flat" cmpd="sng" algn="ctr">
+                      <a:solidFill>
+                        <a:srgbClr val="9CA3AF"/>
+                      </a:solidFill>
+                      <a:prstDash val="solid"/>
+                      <a:round/>
+                      <a:headEnd type="none" w="med" len="med"/>
+                      <a:tailEnd type="none" w="med" len="med"/>
+                    </a:lnB>
+                  </a:tcPr>
+                </a:tc>
+              </a:tr>
+              <a:tr h="365760">
+                <a:tc>
+                  <a:txBody>
+                    <a:bodyPr/>
+                    <a:lstStyle/>
+                    <a:p>
+                      <a:pPr algn="ctr" indent="0" marL="0">
+                        <a:buNone/>
+                      </a:pPr>
+                      <a:r>
+                        <a:rPr lang="en-US" sz="1000" dirty="0">
+                          <a:solidFill>
+                            <a:srgbClr val="262626"/>
+                          </a:solidFill>
+                          <a:latin typeface="Malgun Gothic" pitchFamily="34" charset="0"/>
+                          <a:ea typeface="Malgun Gothic" pitchFamily="34" charset="-122"/>
+                          <a:cs typeface="Malgun Gothic" pitchFamily="34" charset="-120"/>
+                        </a:rPr>
+                        <a:t>갑판 단면계수  ZD (×10⁶cm³)</a:t>
+                      </a:r>
+                      <a:endParaRPr lang="en-US" sz="1000" dirty="0">
+                        <a:latin typeface="Malgun Gothic" charset="0"/>
+                        <a:ea typeface="Malgun Gothic" charset="0"/>
+                        <a:cs typeface="Malgun Gothic" charset="0"/>
+                      </a:endParaRPr>
+                    </a:p>
+                  </a:txBody>
+                  <a:tcPr marL="91440" marR="91440" marT="45720" marB="45720" anchor="ctr">
+                    <a:lnL w="6350" cap="flat" cmpd="sng" algn="ctr">
+                      <a:solidFill>
+                        <a:srgbClr val="9CA3AF"/>
+                      </a:solidFill>
+                      <a:prstDash val="solid"/>
+                      <a:round/>
+                      <a:headEnd type="none" w="med" len="med"/>
+                      <a:tailEnd type="none" w="med" len="med"/>
+                    </a:lnL>
+                    <a:lnR w="6350" cap="flat" cmpd="sng" algn="ctr">
+                      <a:solidFill>
+                        <a:srgbClr val="9CA3AF"/>
+                      </a:solidFill>
+                      <a:prstDash val="solid"/>
+                      <a:round/>
+                      <a:headEnd type="none" w="med" len="med"/>
+                      <a:tailEnd type="none" w="med" len="med"/>
+                    </a:lnR>
+                    <a:lnT w="6350" cap="flat" cmpd="sng" algn="ctr">
+                      <a:solidFill>
+                        <a:srgbClr val="9CA3AF"/>
+                      </a:solidFill>
+                      <a:prstDash val="solid"/>
+                      <a:round/>
+                      <a:headEnd type="none" w="med" len="med"/>
+                      <a:tailEnd type="none" w="med" len="med"/>
+                    </a:lnT>
+                    <a:lnB w="6350" cap="flat" cmpd="sng" algn="ctr">
+                      <a:solidFill>
+                        <a:srgbClr val="9CA3AF"/>
+                      </a:solidFill>
+                      <a:prstDash val="solid"/>
+                      <a:round/>
+                      <a:headEnd type="none" w="med" len="med"/>
+                      <a:tailEnd type="none" w="med" len="med"/>
+                    </a:lnB>
+                  </a:tcPr>
+                </a:tc>
+                <a:tc>
+                  <a:txBody>
+                    <a:bodyPr/>
+                    <a:lstStyle/>
+                    <a:p>
+                      <a:pPr algn="ctr" indent="0" marL="0">
+                        <a:buNone/>
+                      </a:pPr>
+                      <a:r>
+                        <a:rPr lang="en-US" sz="1000" dirty="0">
+                          <a:solidFill>
+                            <a:srgbClr val="262626"/>
+                          </a:solidFill>
+                          <a:latin typeface="Malgun Gothic" pitchFamily="34" charset="0"/>
+                          <a:ea typeface="Malgun Gothic" pitchFamily="34" charset="-122"/>
+                          <a:cs typeface="Malgun Gothic" pitchFamily="34" charset="-120"/>
+                        </a:rPr>
+                        <a:t>23.05</a:t>
+                      </a:r>
+                      <a:endParaRPr lang="en-US" sz="1000" dirty="0">
+                        <a:latin typeface="Malgun Gothic" charset="0"/>
+                        <a:ea typeface="Malgun Gothic" charset="0"/>
+                        <a:cs typeface="Malgun Gothic" charset="0"/>
+                      </a:endParaRPr>
+                    </a:p>
+                  </a:txBody>
+                  <a:tcPr marL="91440" marR="91440" marT="45720" marB="45720" anchor="ctr">
+                    <a:lnL w="6350" cap="flat" cmpd="sng" algn="ctr">
+                      <a:solidFill>
+                        <a:srgbClr val="9CA3AF"/>
+                      </a:solidFill>
+                      <a:prstDash val="solid"/>
+                      <a:round/>
+                      <a:headEnd type="none" w="med" len="med"/>
+                      <a:tailEnd type="none" w="med" len="med"/>
+                    </a:lnL>
+                    <a:lnR w="6350" cap="flat" cmpd="sng" algn="ctr">
+                      <a:solidFill>
+                        <a:srgbClr val="9CA3AF"/>
+                      </a:solidFill>
+                      <a:prstDash val="solid"/>
+                      <a:round/>
+                      <a:headEnd type="none" w="med" len="med"/>
+                      <a:tailEnd type="none" w="med" len="med"/>
+                    </a:lnR>
+                    <a:lnT w="6350" cap="flat" cmpd="sng" algn="ctr">
+                      <a:solidFill>
+                        <a:srgbClr val="9CA3AF"/>
+                      </a:solidFill>
+                      <a:prstDash val="solid"/>
+                      <a:round/>
+                      <a:headEnd type="none" w="med" len="med"/>
+                      <a:tailEnd type="none" w="med" len="med"/>
+                    </a:lnT>
+                    <a:lnB w="6350" cap="flat" cmpd="sng" algn="ctr">
+                      <a:solidFill>
+                        <a:srgbClr val="9CA3AF"/>
+                      </a:solidFill>
+                      <a:prstDash val="solid"/>
+                      <a:round/>
+                      <a:headEnd type="none" w="med" len="med"/>
+                      <a:tailEnd type="none" w="med" len="med"/>
+                    </a:lnB>
+                  </a:tcPr>
+                </a:tc>
+                <a:tc>
+                  <a:txBody>
+                    <a:bodyPr/>
+                    <a:lstStyle/>
+                    <a:p>
+                      <a:pPr algn="ctr" indent="0" marL="0">
+                        <a:buNone/>
+                      </a:pPr>
+                      <a:r>
+                        <a:rPr lang="en-US" sz="1000" dirty="0">
+                          <a:solidFill>
+                            <a:srgbClr val="262626"/>
+                          </a:solidFill>
+                          <a:latin typeface="Malgun Gothic" pitchFamily="34" charset="0"/>
+                          <a:ea typeface="Malgun Gothic" pitchFamily="34" charset="-122"/>
+                          <a:cs typeface="Malgun Gothic" pitchFamily="34" charset="-120"/>
+                        </a:rPr>
+                        <a:t>16.39</a:t>
+                      </a:r>
+                      <a:endParaRPr lang="en-US" sz="1000" dirty="0">
+                        <a:latin typeface="Malgun Gothic" charset="0"/>
+                        <a:ea typeface="Malgun Gothic" charset="0"/>
+                        <a:cs typeface="Malgun Gothic" charset="0"/>
+                      </a:endParaRPr>
+                    </a:p>
+                  </a:txBody>
+                  <a:tcPr marL="91440" marR="91440" marT="45720" marB="45720" anchor="ctr">
+                    <a:lnL w="6350" cap="flat" cmpd="sng" algn="ctr">
+                      <a:solidFill>
+                        <a:srgbClr val="9CA3AF"/>
+                      </a:solidFill>
+                      <a:prstDash val="solid"/>
+                      <a:round/>
+                      <a:headEnd type="none" w="med" len="med"/>
+                      <a:tailEnd type="none" w="med" len="med"/>
+                    </a:lnL>
+                    <a:lnR w="6350" cap="flat" cmpd="sng" algn="ctr">
+                      <a:solidFill>
+                        <a:srgbClr val="9CA3AF"/>
+                      </a:solidFill>
+                      <a:prstDash val="solid"/>
+                      <a:round/>
+                      <a:headEnd type="none" w="med" len="med"/>
+                      <a:tailEnd type="none" w="med" len="med"/>
+                    </a:lnR>
+                    <a:lnT w="6350" cap="flat" cmpd="sng" algn="ctr">
+                      <a:solidFill>
+                        <a:srgbClr val="9CA3AF"/>
+                      </a:solidFill>
+                      <a:prstDash val="solid"/>
+                      <a:round/>
+                      <a:headEnd type="none" w="med" len="med"/>
+                      <a:tailEnd type="none" w="med" len="med"/>
+                    </a:lnT>
+                    <a:lnB w="6350" cap="flat" cmpd="sng" algn="ctr">
+                      <a:solidFill>
+                        <a:srgbClr val="9CA3AF"/>
+                      </a:solidFill>
+                      <a:prstDash val="solid"/>
+                      <a:round/>
+                      <a:headEnd type="none" w="med" len="med"/>
+                      <a:tailEnd type="none" w="med" len="med"/>
+                    </a:lnB>
+                  </a:tcPr>
+                </a:tc>
+                <a:tc>
+                  <a:txBody>
+                    <a:bodyPr/>
+                    <a:lstStyle/>
+                    <a:p>
+                      <a:pPr algn="ctr" indent="0" marL="0">
+                        <a:buNone/>
+                      </a:pPr>
+                      <a:r>
+                        <a:rPr lang="en-US" sz="1000" b="1" dirty="0">
+                          <a:solidFill>
+                            <a:srgbClr val="1F3864"/>
+                          </a:solidFill>
+                          <a:latin typeface="Malgun Gothic" pitchFamily="34" charset="0"/>
+                          <a:ea typeface="Malgun Gothic" pitchFamily="34" charset="-122"/>
+                          <a:cs typeface="Malgun Gothic" pitchFamily="34" charset="-120"/>
+                        </a:rPr>
+                        <a:t>+40.6%</a:t>
+                      </a:r>
+                      <a:endParaRPr lang="en-US" sz="1000" dirty="0">
+                        <a:latin typeface="Malgun Gothic" charset="0"/>
+                        <a:ea typeface="Malgun Gothic" charset="0"/>
+                        <a:cs typeface="Malgun Gothic" charset="0"/>
+                      </a:endParaRPr>
+                    </a:p>
+                  </a:txBody>
+                  <a:tcPr marL="91440" marR="91440" marT="45720" marB="45720" anchor="ctr">
+                    <a:lnL w="6350" cap="flat" cmpd="sng" algn="ctr">
+                      <a:solidFill>
+                        <a:srgbClr val="9CA3AF"/>
+                      </a:solidFill>
+                      <a:prstDash val="solid"/>
+                      <a:round/>
+                      <a:headEnd type="none" w="med" len="med"/>
+                      <a:tailEnd type="none" w="med" len="med"/>
+                    </a:lnL>
+                    <a:lnR w="6350" cap="flat" cmpd="sng" algn="ctr">
+                      <a:solidFill>
+                        <a:srgbClr val="9CA3AF"/>
+                      </a:solidFill>
+                      <a:prstDash val="solid"/>
+                      <a:round/>
+                      <a:headEnd type="none" w="med" len="med"/>
+                      <a:tailEnd type="none" w="med" len="med"/>
+                    </a:lnR>
+                    <a:lnT w="6350" cap="flat" cmpd="sng" algn="ctr">
+                      <a:solidFill>
+                        <a:srgbClr val="9CA3AF"/>
+                      </a:solidFill>
+                      <a:prstDash val="solid"/>
+                      <a:round/>
+                      <a:headEnd type="none" w="med" len="med"/>
+                      <a:tailEnd type="none" w="med" len="med"/>
+                    </a:lnT>
+                    <a:lnB w="6350" cap="flat" cmpd="sng" algn="ctr">
+                      <a:solidFill>
+                        <a:srgbClr val="9CA3AF"/>
+                      </a:solidFill>
+                      <a:prstDash val="solid"/>
+                      <a:round/>
+                      <a:headEnd type="none" w="med" len="med"/>
+                      <a:tailEnd type="none" w="med" len="med"/>
+                    </a:lnB>
+                  </a:tcPr>
+                </a:tc>
+              </a:tr>
+              <a:tr h="365760">
+                <a:tc>
+                  <a:txBody>
+                    <a:bodyPr/>
+                    <a:lstStyle/>
+                    <a:p>
+                      <a:pPr algn="ctr" indent="0" marL="0">
+                        <a:buNone/>
+                      </a:pPr>
+                      <a:r>
+                        <a:rPr lang="en-US" sz="1000" dirty="0">
+                          <a:solidFill>
+                            <a:srgbClr val="262626"/>
+                          </a:solidFill>
+                          <a:latin typeface="Malgun Gothic" pitchFamily="34" charset="0"/>
+                          <a:ea typeface="Malgun Gothic" pitchFamily="34" charset="-122"/>
+                          <a:cs typeface="Malgun Gothic" pitchFamily="34" charset="-120"/>
+                        </a:rPr>
+                        <a:t>선저 단면계수  ZB (×10⁶cm³)</a:t>
+                      </a:r>
+                      <a:endParaRPr lang="en-US" sz="1000" dirty="0">
+                        <a:latin typeface="Malgun Gothic" charset="0"/>
+                        <a:ea typeface="Malgun Gothic" charset="0"/>
+                        <a:cs typeface="Malgun Gothic" charset="0"/>
+                      </a:endParaRPr>
+                    </a:p>
+                  </a:txBody>
+                  <a:tcPr marL="91440" marR="91440" marT="45720" marB="45720" anchor="ctr">
+                    <a:lnL w="6350" cap="flat" cmpd="sng" algn="ctr">
+                      <a:solidFill>
+                        <a:srgbClr val="9CA3AF"/>
+                      </a:solidFill>
+                      <a:prstDash val="solid"/>
+                      <a:round/>
+                      <a:headEnd type="none" w="med" len="med"/>
+                      <a:tailEnd type="none" w="med" len="med"/>
+                    </a:lnL>
+                    <a:lnR w="6350" cap="flat" cmpd="sng" algn="ctr">
+                      <a:solidFill>
+                        <a:srgbClr val="9CA3AF"/>
+                      </a:solidFill>
+                      <a:prstDash val="solid"/>
+                      <a:round/>
+                      <a:headEnd type="none" w="med" len="med"/>
+                      <a:tailEnd type="none" w="med" len="med"/>
+                    </a:lnR>
+                    <a:lnT w="6350" cap="flat" cmpd="sng" algn="ctr">
+                      <a:solidFill>
+                        <a:srgbClr val="9CA3AF"/>
+                      </a:solidFill>
+                      <a:prstDash val="solid"/>
+                      <a:round/>
+                      <a:headEnd type="none" w="med" len="med"/>
+                      <a:tailEnd type="none" w="med" len="med"/>
+                    </a:lnT>
+                    <a:lnB w="6350" cap="flat" cmpd="sng" algn="ctr">
+                      <a:solidFill>
+                        <a:srgbClr val="9CA3AF"/>
+                      </a:solidFill>
+                      <a:prstDash val="solid"/>
+                      <a:round/>
+                      <a:headEnd type="none" w="med" len="med"/>
+                      <a:tailEnd type="none" w="med" len="med"/>
+                    </a:lnB>
+                  </a:tcPr>
+                </a:tc>
+                <a:tc>
+                  <a:txBody>
+                    <a:bodyPr/>
+                    <a:lstStyle/>
+                    <a:p>
+                      <a:pPr algn="ctr" indent="0" marL="0">
+                        <a:buNone/>
+                      </a:pPr>
+                      <a:r>
+                        <a:rPr lang="en-US" sz="1000" dirty="0">
+                          <a:solidFill>
+                            <a:srgbClr val="262626"/>
+                          </a:solidFill>
+                          <a:latin typeface="Malgun Gothic" pitchFamily="34" charset="0"/>
+                          <a:ea typeface="Malgun Gothic" pitchFamily="34" charset="-122"/>
+                          <a:cs typeface="Malgun Gothic" pitchFamily="34" charset="-120"/>
+                        </a:rPr>
+                        <a:t>27.79</a:t>
+                      </a:r>
+                      <a:endParaRPr lang="en-US" sz="1000" dirty="0">
+                        <a:latin typeface="Malgun Gothic" charset="0"/>
+                        <a:ea typeface="Malgun Gothic" charset="0"/>
+                        <a:cs typeface="Malgun Gothic" charset="0"/>
+                      </a:endParaRPr>
+                    </a:p>
+                  </a:txBody>
+                  <a:tcPr marL="91440" marR="91440" marT="45720" marB="45720" anchor="ctr">
+                    <a:lnL w="6350" cap="flat" cmpd="sng" algn="ctr">
+                      <a:solidFill>
+                        <a:srgbClr val="9CA3AF"/>
+                      </a:solidFill>
+                      <a:prstDash val="solid"/>
+                      <a:round/>
+                      <a:headEnd type="none" w="med" len="med"/>
+                      <a:tailEnd type="none" w="med" len="med"/>
+                    </a:lnL>
+                    <a:lnR w="6350" cap="flat" cmpd="sng" algn="ctr">
+                      <a:solidFill>
+                        <a:srgbClr val="9CA3AF"/>
+                      </a:solidFill>
+                      <a:prstDash val="solid"/>
+                      <a:round/>
+                      <a:headEnd type="none" w="med" len="med"/>
+                      <a:tailEnd type="none" w="med" len="med"/>
+                    </a:lnR>
+                    <a:lnT w="6350" cap="flat" cmpd="sng" algn="ctr">
+                      <a:solidFill>
+                        <a:srgbClr val="9CA3AF"/>
+                      </a:solidFill>
+                      <a:prstDash val="solid"/>
+                      <a:round/>
+                      <a:headEnd type="none" w="med" len="med"/>
+                      <a:tailEnd type="none" w="med" len="med"/>
+                    </a:lnT>
+                    <a:lnB w="6350" cap="flat" cmpd="sng" algn="ctr">
+                      <a:solidFill>
+                        <a:srgbClr val="9CA3AF"/>
+                      </a:solidFill>
+                      <a:prstDash val="solid"/>
+                      <a:round/>
+                      <a:headEnd type="none" w="med" len="med"/>
+                      <a:tailEnd type="none" w="med" len="med"/>
+                    </a:lnB>
+                  </a:tcPr>
+                </a:tc>
+                <a:tc>
+                  <a:txBody>
+                    <a:bodyPr/>
+                    <a:lstStyle/>
+                    <a:p>
+                      <a:pPr algn="ctr" indent="0" marL="0">
+                        <a:buNone/>
+                      </a:pPr>
+                      <a:r>
+                        <a:rPr lang="en-US" sz="1000" dirty="0">
+                          <a:solidFill>
+                            <a:srgbClr val="262626"/>
+                          </a:solidFill>
+                          <a:latin typeface="Malgun Gothic" pitchFamily="34" charset="0"/>
+                          <a:ea typeface="Malgun Gothic" pitchFamily="34" charset="-122"/>
+                          <a:cs typeface="Malgun Gothic" pitchFamily="34" charset="-120"/>
+                        </a:rPr>
+                        <a:t>16.39</a:t>
+                      </a:r>
+                      <a:endParaRPr lang="en-US" sz="1000" dirty="0">
+                        <a:latin typeface="Malgun Gothic" charset="0"/>
+                        <a:ea typeface="Malgun Gothic" charset="0"/>
+                        <a:cs typeface="Malgun Gothic" charset="0"/>
+                      </a:endParaRPr>
+                    </a:p>
+                  </a:txBody>
+                  <a:tcPr marL="91440" marR="91440" marT="45720" marB="45720" anchor="ctr">
+                    <a:lnL w="6350" cap="flat" cmpd="sng" algn="ctr">
+                      <a:solidFill>
+                        <a:srgbClr val="9CA3AF"/>
+                      </a:solidFill>
+                      <a:prstDash val="solid"/>
+                      <a:round/>
+                      <a:headEnd type="none" w="med" len="med"/>
+                      <a:tailEnd type="none" w="med" len="med"/>
+                    </a:lnL>
+                    <a:lnR w="6350" cap="flat" cmpd="sng" algn="ctr">
+                      <a:solidFill>
+                        <a:srgbClr val="9CA3AF"/>
+                      </a:solidFill>
+                      <a:prstDash val="solid"/>
+                      <a:round/>
+                      <a:headEnd type="none" w="med" len="med"/>
+                      <a:tailEnd type="none" w="med" len="med"/>
+                    </a:lnR>
+                    <a:lnT w="6350" cap="flat" cmpd="sng" algn="ctr">
+                      <a:solidFill>
+                        <a:srgbClr val="9CA3AF"/>
+                      </a:solidFill>
+                      <a:prstDash val="solid"/>
+                      <a:round/>
+                      <a:headEnd type="none" w="med" len="med"/>
+                      <a:tailEnd type="none" w="med" len="med"/>
+                    </a:lnT>
+                    <a:lnB w="6350" cap="flat" cmpd="sng" algn="ctr">
+                      <a:solidFill>
+                        <a:srgbClr val="9CA3AF"/>
+                      </a:solidFill>
+                      <a:prstDash val="solid"/>
+                      <a:round/>
+                      <a:headEnd type="none" w="med" len="med"/>
+                      <a:tailEnd type="none" w="med" len="med"/>
+                    </a:lnB>
+                  </a:tcPr>
+                </a:tc>
+                <a:tc>
+                  <a:txBody>
+                    <a:bodyPr/>
+                    <a:lstStyle/>
+                    <a:p>
+                      <a:pPr algn="ctr" indent="0" marL="0">
+                        <a:buNone/>
+                      </a:pPr>
+                      <a:r>
+                        <a:rPr lang="en-US" sz="1000" dirty="0">
+                          <a:solidFill>
+                            <a:srgbClr val="262626"/>
+                          </a:solidFill>
+                          <a:latin typeface="Malgun Gothic" pitchFamily="34" charset="0"/>
+                          <a:ea typeface="Malgun Gothic" pitchFamily="34" charset="-122"/>
+                          <a:cs typeface="Malgun Gothic" pitchFamily="34" charset="-120"/>
+                        </a:rPr>
+                        <a:t>+69%</a:t>
+                      </a:r>
+                      <a:endParaRPr lang="en-US" sz="1000" dirty="0">
+                        <a:latin typeface="Malgun Gothic" charset="0"/>
+                        <a:ea typeface="Malgun Gothic" charset="0"/>
+                        <a:cs typeface="Malgun Gothic" charset="0"/>
+                      </a:endParaRPr>
+                    </a:p>
+                  </a:txBody>
+                  <a:tcPr marL="91440" marR="91440" marT="45720" marB="45720" anchor="ctr">
+                    <a:lnL w="6350" cap="flat" cmpd="sng" algn="ctr">
+                      <a:solidFill>
+                        <a:srgbClr val="9CA3AF"/>
+                      </a:solidFill>
+                      <a:prstDash val="solid"/>
+                      <a:round/>
+                      <a:headEnd type="none" w="med" len="med"/>
+                      <a:tailEnd type="none" w="med" len="med"/>
+                    </a:lnL>
+                    <a:lnR w="6350" cap="flat" cmpd="sng" algn="ctr">
+                      <a:solidFill>
+                        <a:srgbClr val="9CA3AF"/>
+                      </a:solidFill>
+                      <a:prstDash val="solid"/>
+                      <a:round/>
+                      <a:headEnd type="none" w="med" len="med"/>
+                      <a:tailEnd type="none" w="med" len="med"/>
+                    </a:lnR>
+                    <a:lnT w="6350" cap="flat" cmpd="sng" algn="ctr">
+                      <a:solidFill>
+                        <a:srgbClr val="9CA3AF"/>
+                      </a:solidFill>
+                      <a:prstDash val="solid"/>
+                      <a:round/>
+                      <a:headEnd type="none" w="med" len="med"/>
+                      <a:tailEnd type="none" w="med" len="med"/>
+                    </a:lnT>
+                    <a:lnB w="6350" cap="flat" cmpd="sng" algn="ctr">
+                      <a:solidFill>
+                        <a:srgbClr val="9CA3AF"/>
+                      </a:solidFill>
+                      <a:prstDash val="solid"/>
+                      <a:round/>
+                      <a:headEnd type="none" w="med" len="med"/>
+                      <a:tailEnd type="none" w="med" len="med"/>
+                    </a:lnB>
+                  </a:tcPr>
+                </a:tc>
+              </a:tr>
+            </a:tbl>
+          </a:graphicData>
+        </a:graphic>
+      </p:graphicFrame>
       <p:sp>
         <p:nvSpPr>
-          <p:cNvPr id="7" name="Text 3"/>
+          <p:cNvPr id="8" name="Text 3"/>
           <p:cNvSpPr txBox="1"/>
           <p:nvPr/>
         </p:nvSpPr>
         <p:spPr>
           <a:xfrm>
-            <a:off x="548640" y="5120640"/>
-            <a:ext cx="5303520" cy="1280160"/>
+            <a:off x="6199632" y="2542032"/>
+            <a:ext cx="5504688" cy="1828800"/>
           </a:xfrm>
           <a:prstGeom prst="rect">
             <a:avLst/>
@@ -8886,7 +10742,7 @@
                 <a:ea typeface="Malgun Gothic" pitchFamily="34" charset="-122"/>
                 <a:cs typeface="Malgun Gothic" pitchFamily="34" charset="-120"/>
               </a:rPr>
-              <a:t>CSR 하중 체인을 원문대로 구현 — 동적 하중케이스 22개 전부, 하중조합계수·해수압·액체압 반영</a:t>
+              <a:t>판 17개 스트레이크 · 종보강재 16개 항목을 요소판(EPP) 단위로 전수 검토 — 존별 대표 부재 방식이 아님</a:t>
             </a:r>
             <a:endParaRPr lang="en-US" sz="1050" dirty="0"/>
           </a:p>
@@ -8907,7 +10763,7 @@
                 <a:ea typeface="Malgun Gothic" pitchFamily="34" charset="-122"/>
                 <a:cs typeface="Malgun Gothic" pitchFamily="34" charset="-120"/>
               </a:rPr>
-              <a:t>존별 대표 부재가 아닌 인접 종보강재 사이 모든 요소판(EPP) 단위로 전수 검토</a:t>
+              <a:t>순치수법으로 부식 여유 분리 — tn50 = tgross − 0.5tc (선체거더) / tnet = tgross − tc (국부·좌굴)</a:t>
             </a:r>
             <a:endParaRPr lang="en-US" sz="1050" dirty="0"/>
           </a:p>
@@ -8928,2072 +10784,714 @@
                 <a:ea typeface="Malgun Gothic" pitchFamily="34" charset="-122"/>
                 <a:cs typeface="Malgun Gothic" pitchFamily="34" charset="-120"/>
               </a:rPr>
-              <a:t>Net Scantling — tn50 = tgross − 0.5tc,  강종 3층 배치 (갑판 AH32 / 중앙 MS / 선저 AH32)</a:t>
+              <a:t>강종 3층 배치 — 갑판 AH32 · 중앙 MS · 선저 AH32, 고장력강 경계 z_hts 확인</a:t>
+            </a:r>
+            <a:endParaRPr lang="en-US" sz="1050" dirty="0"/>
+          </a:p>
+          <a:p>
+            <a:pPr marL="165100" indent="-165100">
+              <a:spcAft>
+                <a:spcPts val="700"/>
+              </a:spcAft>
+              <a:buSzPct val="100000"/>
+              <a:buChar char="▪"/>
+            </a:pPr>
+            <a:r>
+              <a:rPr lang="en-US" sz="1050" dirty="0">
+                <a:solidFill>
+                  <a:srgbClr val="262626"/>
+                </a:solidFill>
+                <a:latin typeface="Malgun Gothic" pitchFamily="34" charset="0"/>
+                <a:ea typeface="Malgun Gothic" pitchFamily="34" charset="-122"/>
+                <a:cs typeface="Malgun Gothic" pitchFamily="34" charset="-120"/>
+              </a:rPr>
+              <a:t>두께 – 관성모멘트 – 응력의 순환을 고정점까지 반복해 수렴 — 자체 계산 모듈로 전 부재를 재계산</a:t>
             </a:r>
             <a:endParaRPr lang="en-US" sz="1050" dirty="0"/>
           </a:p>
         </p:txBody>
       </p:sp>
-      <p:graphicFrame>
-        <p:nvGraphicFramePr>
-          <p:cNvPr id="14" name="Table 0"/>
-          <p:cNvGraphicFramePr>
-            <a:graphicFrameLocks noGrp="1"/>
-          </p:cNvGraphicFramePr>
-          <p:nvPr>
-            <p:extLst>
-              <p:ext uri="{D42A27DB-BD31-4B8C-83A1-F6EECF244321}">
-                <p14:modId xmlns:p14="http://schemas.microsoft.com/office/powerpoint/2010/main" val="1579011935"/>
-              </p:ext>
-            </p:extLst>
-          </p:nvPr>
-        </p:nvGraphicFramePr>
-        <p:xfrm>
-          <a:off x="5989320" y="1005840"/>
-          <a:ext cx="5742432" cy="914400"/>
-        </p:xfrm>
-        <a:graphic>
-          <a:graphicData uri="http://schemas.openxmlformats.org/drawingml/2006/table">
-            <a:tbl>
-              <a:tblPr/>
-              <a:tblGrid>
-                <a:gridCol w="2450592"/>
-                <a:gridCol w="1737360"/>
-                <a:gridCol w="1554480"/>
-              </a:tblGrid>
-              <a:tr h="384048">
-                <a:tc>
-                  <a:txBody>
-                    <a:bodyPr/>
-                    <a:lstStyle/>
-                    <a:p>
-                      <a:pPr algn="ctr" indent="0" marL="0">
-                        <a:buNone/>
-                      </a:pPr>
-                      <a:r>
-                        <a:rPr lang="en-US" sz="1050" b="1" dirty="0">
-                          <a:solidFill>
-                            <a:srgbClr val="262626"/>
-                          </a:solidFill>
-                          <a:latin typeface="Malgun Gothic" pitchFamily="34" charset="0"/>
-                          <a:ea typeface="Malgun Gothic" pitchFamily="34" charset="-122"/>
-                          <a:cs typeface="Malgun Gothic" pitchFamily="34" charset="-120"/>
-                        </a:rPr>
-                        <a:t>단면 성능 (net-n50)</a:t>
-                      </a:r>
-                      <a:endParaRPr lang="en-US" sz="1050" dirty="0">
-                        <a:latin typeface="Malgun Gothic" charset="0"/>
-                        <a:ea typeface="Malgun Gothic" charset="0"/>
-                        <a:cs typeface="Malgun Gothic" charset="0"/>
-                      </a:endParaRPr>
-                    </a:p>
-                  </a:txBody>
-                  <a:tcPr marL="91440" marR="91440" marT="45720" marB="45720" anchor="ctr">
-                    <a:lnL w="6350" cap="flat" cmpd="sng" algn="ctr">
-                      <a:solidFill>
-                        <a:srgbClr val="9CA3AF"/>
-                      </a:solidFill>
-                      <a:prstDash val="solid"/>
-                      <a:round/>
-                      <a:headEnd type="none" w="med" len="med"/>
-                      <a:tailEnd type="none" w="med" len="med"/>
-                    </a:lnL>
-                    <a:lnR w="6350" cap="flat" cmpd="sng" algn="ctr">
-                      <a:solidFill>
-                        <a:srgbClr val="9CA3AF"/>
-                      </a:solidFill>
-                      <a:prstDash val="solid"/>
-                      <a:round/>
-                      <a:headEnd type="none" w="med" len="med"/>
-                      <a:tailEnd type="none" w="med" len="med"/>
-                    </a:lnR>
-                    <a:lnT w="6350" cap="flat" cmpd="sng" algn="ctr">
-                      <a:solidFill>
-                        <a:srgbClr val="9CA3AF"/>
-                      </a:solidFill>
-                      <a:prstDash val="solid"/>
-                      <a:round/>
-                      <a:headEnd type="none" w="med" len="med"/>
-                      <a:tailEnd type="none" w="med" len="med"/>
-                    </a:lnT>
-                    <a:lnB w="6350" cap="flat" cmpd="sng" algn="ctr">
-                      <a:solidFill>
-                        <a:srgbClr val="9CA3AF"/>
-                      </a:solidFill>
-                      <a:prstDash val="solid"/>
-                      <a:round/>
-                      <a:headEnd type="none" w="med" len="med"/>
-                      <a:tailEnd type="none" w="med" len="med"/>
-                    </a:lnB>
-                    <a:solidFill>
-                      <a:srgbClr val="D9D9D9"/>
-                    </a:solidFill>
-                  </a:tcPr>
-                </a:tc>
-                <a:tc>
-                  <a:txBody>
-                    <a:bodyPr/>
-                    <a:lstStyle/>
-                    <a:p>
-                      <a:pPr algn="ctr" indent="0" marL="0">
-                        <a:buNone/>
-                      </a:pPr>
-                      <a:r>
-                        <a:rPr lang="en-US" sz="1050" b="1" dirty="0">
-                          <a:solidFill>
-                            <a:srgbClr val="262626"/>
-                          </a:solidFill>
-                          <a:latin typeface="Malgun Gothic" pitchFamily="34" charset="0"/>
-                          <a:ea typeface="Malgun Gothic" pitchFamily="34" charset="-122"/>
-                          <a:cs typeface="Malgun Gothic" pitchFamily="34" charset="-120"/>
-                        </a:rPr>
-                        <a:t>실제</a:t>
-                      </a:r>
-                      <a:endParaRPr lang="en-US" sz="1050" dirty="0">
-                        <a:latin typeface="Malgun Gothic" charset="0"/>
-                        <a:ea typeface="Malgun Gothic" charset="0"/>
-                        <a:cs typeface="Malgun Gothic" charset="0"/>
-                      </a:endParaRPr>
-                    </a:p>
-                  </a:txBody>
-                  <a:tcPr marL="91440" marR="91440" marT="45720" marB="45720" anchor="ctr">
-                    <a:lnL w="6350" cap="flat" cmpd="sng" algn="ctr">
-                      <a:solidFill>
-                        <a:srgbClr val="9CA3AF"/>
-                      </a:solidFill>
-                      <a:prstDash val="solid"/>
-                      <a:round/>
-                      <a:headEnd type="none" w="med" len="med"/>
-                      <a:tailEnd type="none" w="med" len="med"/>
-                    </a:lnL>
-                    <a:lnR w="6350" cap="flat" cmpd="sng" algn="ctr">
-                      <a:solidFill>
-                        <a:srgbClr val="9CA3AF"/>
-                      </a:solidFill>
-                      <a:prstDash val="solid"/>
-                      <a:round/>
-                      <a:headEnd type="none" w="med" len="med"/>
-                      <a:tailEnd type="none" w="med" len="med"/>
-                    </a:lnR>
-                    <a:lnT w="6350" cap="flat" cmpd="sng" algn="ctr">
-                      <a:solidFill>
-                        <a:srgbClr val="9CA3AF"/>
-                      </a:solidFill>
-                      <a:prstDash val="solid"/>
-                      <a:round/>
-                      <a:headEnd type="none" w="med" len="med"/>
-                      <a:tailEnd type="none" w="med" len="med"/>
-                    </a:lnT>
-                    <a:lnB w="6350" cap="flat" cmpd="sng" algn="ctr">
-                      <a:solidFill>
-                        <a:srgbClr val="9CA3AF"/>
-                      </a:solidFill>
-                      <a:prstDash val="solid"/>
-                      <a:round/>
-                      <a:headEnd type="none" w="med" len="med"/>
-                      <a:tailEnd type="none" w="med" len="med"/>
-                    </a:lnB>
-                    <a:solidFill>
-                      <a:srgbClr val="D9D9D9"/>
-                    </a:solidFill>
-                  </a:tcPr>
-                </a:tc>
-                <a:tc>
-                  <a:txBody>
-                    <a:bodyPr/>
-                    <a:lstStyle/>
-                    <a:p>
-                      <a:pPr algn="ctr" indent="0" marL="0">
-                        <a:buNone/>
-                      </a:pPr>
-                      <a:r>
-                        <a:rPr lang="en-US" sz="1050" b="1" dirty="0">
-                          <a:solidFill>
-                            <a:srgbClr val="262626"/>
-                          </a:solidFill>
-                          <a:latin typeface="Malgun Gothic" pitchFamily="34" charset="0"/>
-                          <a:ea typeface="Malgun Gothic" pitchFamily="34" charset="-122"/>
-                          <a:cs typeface="Malgun Gothic" pitchFamily="34" charset="-120"/>
-                        </a:rPr>
-                        <a:t>요구 대비 여유</a:t>
-                      </a:r>
-                      <a:endParaRPr lang="en-US" sz="1050" dirty="0">
-                        <a:latin typeface="Malgun Gothic" charset="0"/>
-                        <a:ea typeface="Malgun Gothic" charset="0"/>
-                        <a:cs typeface="Malgun Gothic" charset="0"/>
-                      </a:endParaRPr>
-                    </a:p>
-                  </a:txBody>
-                  <a:tcPr marL="91440" marR="91440" marT="45720" marB="45720" anchor="ctr">
-                    <a:lnL w="6350" cap="flat" cmpd="sng" algn="ctr">
-                      <a:solidFill>
-                        <a:srgbClr val="9CA3AF"/>
-                      </a:solidFill>
-                      <a:prstDash val="solid"/>
-                      <a:round/>
-                      <a:headEnd type="none" w="med" len="med"/>
-                      <a:tailEnd type="none" w="med" len="med"/>
-                    </a:lnL>
-                    <a:lnR w="6350" cap="flat" cmpd="sng" algn="ctr">
-                      <a:solidFill>
-                        <a:srgbClr val="9CA3AF"/>
-                      </a:solidFill>
-                      <a:prstDash val="solid"/>
-                      <a:round/>
-                      <a:headEnd type="none" w="med" len="med"/>
-                      <a:tailEnd type="none" w="med" len="med"/>
-                    </a:lnR>
-                    <a:lnT w="6350" cap="flat" cmpd="sng" algn="ctr">
-                      <a:solidFill>
-                        <a:srgbClr val="9CA3AF"/>
-                      </a:solidFill>
-                      <a:prstDash val="solid"/>
-                      <a:round/>
-                      <a:headEnd type="none" w="med" len="med"/>
-                      <a:tailEnd type="none" w="med" len="med"/>
-                    </a:lnT>
-                    <a:lnB w="6350" cap="flat" cmpd="sng" algn="ctr">
-                      <a:solidFill>
-                        <a:srgbClr val="9CA3AF"/>
-                      </a:solidFill>
-                      <a:prstDash val="solid"/>
-                      <a:round/>
-                      <a:headEnd type="none" w="med" len="med"/>
-                      <a:tailEnd type="none" w="med" len="med"/>
-                    </a:lnB>
-                    <a:solidFill>
-                      <a:srgbClr val="D9D9D9"/>
-                    </a:solidFill>
-                  </a:tcPr>
-                </a:tc>
-              </a:tr>
-              <a:tr h="384048">
-                <a:tc>
-                  <a:txBody>
-                    <a:bodyPr/>
-                    <a:lstStyle/>
-                    <a:p>
-                      <a:pPr algn="ctr" indent="0" marL="0">
-                        <a:buNone/>
-                      </a:pPr>
-                      <a:r>
-                        <a:rPr lang="en-US" sz="1050" dirty="0">
-                          <a:solidFill>
-                            <a:srgbClr val="262626"/>
-                          </a:solidFill>
-                          <a:latin typeface="Malgun Gothic" pitchFamily="34" charset="0"/>
-                          <a:ea typeface="Malgun Gothic" pitchFamily="34" charset="-122"/>
-                          <a:cs typeface="Malgun Gothic" pitchFamily="34" charset="-120"/>
-                        </a:rPr>
-                        <a:t>관성모멘트 Iy (m⁴)</a:t>
-                      </a:r>
-                      <a:endParaRPr lang="en-US" sz="1050" dirty="0">
-                        <a:latin typeface="Malgun Gothic" charset="0"/>
-                        <a:ea typeface="Malgun Gothic" charset="0"/>
-                        <a:cs typeface="Malgun Gothic" charset="0"/>
-                      </a:endParaRPr>
-                    </a:p>
-                  </a:txBody>
-                  <a:tcPr marL="91440" marR="91440" marT="45720" marB="45720" anchor="ctr">
-                    <a:lnL w="6350" cap="flat" cmpd="sng" algn="ctr">
-                      <a:solidFill>
-                        <a:srgbClr val="9CA3AF"/>
-                      </a:solidFill>
-                      <a:prstDash val="solid"/>
-                      <a:round/>
-                      <a:headEnd type="none" w="med" len="med"/>
-                      <a:tailEnd type="none" w="med" len="med"/>
-                    </a:lnL>
-                    <a:lnR w="6350" cap="flat" cmpd="sng" algn="ctr">
-                      <a:solidFill>
-                        <a:srgbClr val="9CA3AF"/>
-                      </a:solidFill>
-                      <a:prstDash val="solid"/>
-                      <a:round/>
-                      <a:headEnd type="none" w="med" len="med"/>
-                      <a:tailEnd type="none" w="med" len="med"/>
-                    </a:lnR>
-                    <a:lnT w="6350" cap="flat" cmpd="sng" algn="ctr">
-                      <a:solidFill>
-                        <a:srgbClr val="9CA3AF"/>
-                      </a:solidFill>
-                      <a:prstDash val="solid"/>
-                      <a:round/>
-                      <a:headEnd type="none" w="med" len="med"/>
-                      <a:tailEnd type="none" w="med" len="med"/>
-                    </a:lnT>
-                    <a:lnB w="6350" cap="flat" cmpd="sng" algn="ctr">
-                      <a:solidFill>
-                        <a:srgbClr val="9CA3AF"/>
-                      </a:solidFill>
-                      <a:prstDash val="solid"/>
-                      <a:round/>
-                      <a:headEnd type="none" w="med" len="med"/>
-                      <a:tailEnd type="none" w="med" len="med"/>
-                    </a:lnB>
-                  </a:tcPr>
-                </a:tc>
-                <a:tc>
-                  <a:txBody>
-                    <a:bodyPr/>
-                    <a:lstStyle/>
-                    <a:p>
-                      <a:pPr algn="ctr" indent="0" marL="0">
-                        <a:buNone/>
-                      </a:pPr>
-                      <a:r>
-                        <a:rPr lang="en-US" sz="1050" dirty="0">
-                          <a:solidFill>
-                            <a:srgbClr val="262626"/>
-                          </a:solidFill>
-                          <a:latin typeface="Malgun Gothic" pitchFamily="34" charset="0"/>
-                          <a:ea typeface="Malgun Gothic" pitchFamily="34" charset="-122"/>
-                          <a:cs typeface="Malgun Gothic" pitchFamily="34" charset="-120"/>
-                        </a:rPr>
-                        <a:t>262.07</a:t>
-                      </a:r>
-                      <a:endParaRPr lang="en-US" sz="1050" dirty="0">
-                        <a:latin typeface="Malgun Gothic" charset="0"/>
-                        <a:ea typeface="Malgun Gothic" charset="0"/>
-                        <a:cs typeface="Malgun Gothic" charset="0"/>
-                      </a:endParaRPr>
-                    </a:p>
-                  </a:txBody>
-                  <a:tcPr marL="91440" marR="91440" marT="45720" marB="45720" anchor="ctr">
-                    <a:lnL w="6350" cap="flat" cmpd="sng" algn="ctr">
-                      <a:solidFill>
-                        <a:srgbClr val="9CA3AF"/>
-                      </a:solidFill>
-                      <a:prstDash val="solid"/>
-                      <a:round/>
-                      <a:headEnd type="none" w="med" len="med"/>
-                      <a:tailEnd type="none" w="med" len="med"/>
-                    </a:lnL>
-                    <a:lnR w="6350" cap="flat" cmpd="sng" algn="ctr">
-                      <a:solidFill>
-                        <a:srgbClr val="9CA3AF"/>
-                      </a:solidFill>
-                      <a:prstDash val="solid"/>
-                      <a:round/>
-                      <a:headEnd type="none" w="med" len="med"/>
-                      <a:tailEnd type="none" w="med" len="med"/>
-                    </a:lnR>
-                    <a:lnT w="6350" cap="flat" cmpd="sng" algn="ctr">
-                      <a:solidFill>
-                        <a:srgbClr val="9CA3AF"/>
-                      </a:solidFill>
-                      <a:prstDash val="solid"/>
-                      <a:round/>
-                      <a:headEnd type="none" w="med" len="med"/>
-                      <a:tailEnd type="none" w="med" len="med"/>
-                    </a:lnT>
-                    <a:lnB w="6350" cap="flat" cmpd="sng" algn="ctr">
-                      <a:solidFill>
-                        <a:srgbClr val="9CA3AF"/>
-                      </a:solidFill>
-                      <a:prstDash val="solid"/>
-                      <a:round/>
-                      <a:headEnd type="none" w="med" len="med"/>
-                      <a:tailEnd type="none" w="med" len="med"/>
-                    </a:lnB>
-                  </a:tcPr>
-                </a:tc>
-                <a:tc>
-                  <a:txBody>
-                    <a:bodyPr/>
-                    <a:lstStyle/>
-                    <a:p>
-                      <a:pPr algn="ctr" indent="0" marL="0">
-                        <a:buNone/>
-                      </a:pPr>
-                      <a:r>
-                        <a:rPr lang="en-US" sz="1050" b="1" dirty="0">
-                          <a:solidFill>
-                            <a:srgbClr val="1F3864"/>
-                          </a:solidFill>
-                          <a:latin typeface="Malgun Gothic" pitchFamily="34" charset="0"/>
-                          <a:ea typeface="Malgun Gothic" pitchFamily="34" charset="-122"/>
-                          <a:cs typeface="Malgun Gothic" pitchFamily="34" charset="-120"/>
-                        </a:rPr>
-                        <a:t>+109%</a:t>
-                      </a:r>
-                      <a:endParaRPr lang="en-US" sz="1050" dirty="0">
-                        <a:latin typeface="Malgun Gothic" charset="0"/>
-                        <a:ea typeface="Malgun Gothic" charset="0"/>
-                        <a:cs typeface="Malgun Gothic" charset="0"/>
-                      </a:endParaRPr>
-                    </a:p>
-                  </a:txBody>
-                  <a:tcPr marL="91440" marR="91440" marT="45720" marB="45720" anchor="ctr">
-                    <a:lnL w="6350" cap="flat" cmpd="sng" algn="ctr">
-                      <a:solidFill>
-                        <a:srgbClr val="9CA3AF"/>
-                      </a:solidFill>
-                      <a:prstDash val="solid"/>
-                      <a:round/>
-                      <a:headEnd type="none" w="med" len="med"/>
-                      <a:tailEnd type="none" w="med" len="med"/>
-                    </a:lnL>
-                    <a:lnR w="6350" cap="flat" cmpd="sng" algn="ctr">
-                      <a:solidFill>
-                        <a:srgbClr val="9CA3AF"/>
-                      </a:solidFill>
-                      <a:prstDash val="solid"/>
-                      <a:round/>
-                      <a:headEnd type="none" w="med" len="med"/>
-                      <a:tailEnd type="none" w="med" len="med"/>
-                    </a:lnR>
-                    <a:lnT w="6350" cap="flat" cmpd="sng" algn="ctr">
-                      <a:solidFill>
-                        <a:srgbClr val="9CA3AF"/>
-                      </a:solidFill>
-                      <a:prstDash val="solid"/>
-                      <a:round/>
-                      <a:headEnd type="none" w="med" len="med"/>
-                      <a:tailEnd type="none" w="med" len="med"/>
-                    </a:lnT>
-                    <a:lnB w="6350" cap="flat" cmpd="sng" algn="ctr">
-                      <a:solidFill>
-                        <a:srgbClr val="9CA3AF"/>
-                      </a:solidFill>
-                      <a:prstDash val="solid"/>
-                      <a:round/>
-                      <a:headEnd type="none" w="med" len="med"/>
-                      <a:tailEnd type="none" w="med" len="med"/>
-                    </a:lnB>
-                  </a:tcPr>
-                </a:tc>
-              </a:tr>
-              <a:tr h="384048">
-                <a:tc>
-                  <a:txBody>
-                    <a:bodyPr/>
-                    <a:lstStyle/>
-                    <a:p>
-                      <a:pPr algn="ctr" indent="0" marL="0">
-                        <a:buNone/>
-                      </a:pPr>
-                      <a:r>
-                        <a:rPr lang="en-US" sz="1050" dirty="0">
-                          <a:solidFill>
-                            <a:srgbClr val="262626"/>
-                          </a:solidFill>
-                          <a:latin typeface="Malgun Gothic" pitchFamily="34" charset="0"/>
-                          <a:ea typeface="Malgun Gothic" pitchFamily="34" charset="-122"/>
-                          <a:cs typeface="Malgun Gothic" pitchFamily="34" charset="-120"/>
-                        </a:rPr>
-                        <a:t>갑판 단면계수 ZD (cm³)</a:t>
-                      </a:r>
-                      <a:endParaRPr lang="en-US" sz="1050" dirty="0">
-                        <a:latin typeface="Malgun Gothic" charset="0"/>
-                        <a:ea typeface="Malgun Gothic" charset="0"/>
-                        <a:cs typeface="Malgun Gothic" charset="0"/>
-                      </a:endParaRPr>
-                    </a:p>
-                  </a:txBody>
-                  <a:tcPr marL="91440" marR="91440" marT="45720" marB="45720" anchor="ctr">
-                    <a:lnL w="6350" cap="flat" cmpd="sng" algn="ctr">
-                      <a:solidFill>
-                        <a:srgbClr val="9CA3AF"/>
-                      </a:solidFill>
-                      <a:prstDash val="solid"/>
-                      <a:round/>
-                      <a:headEnd type="none" w="med" len="med"/>
-                      <a:tailEnd type="none" w="med" len="med"/>
-                    </a:lnL>
-                    <a:lnR w="6350" cap="flat" cmpd="sng" algn="ctr">
-                      <a:solidFill>
-                        <a:srgbClr val="9CA3AF"/>
-                      </a:solidFill>
-                      <a:prstDash val="solid"/>
-                      <a:round/>
-                      <a:headEnd type="none" w="med" len="med"/>
-                      <a:tailEnd type="none" w="med" len="med"/>
-                    </a:lnR>
-                    <a:lnT w="6350" cap="flat" cmpd="sng" algn="ctr">
-                      <a:solidFill>
-                        <a:srgbClr val="9CA3AF"/>
-                      </a:solidFill>
-                      <a:prstDash val="solid"/>
-                      <a:round/>
-                      <a:headEnd type="none" w="med" len="med"/>
-                      <a:tailEnd type="none" w="med" len="med"/>
-                    </a:lnT>
-                    <a:lnB w="6350" cap="flat" cmpd="sng" algn="ctr">
-                      <a:solidFill>
-                        <a:srgbClr val="9CA3AF"/>
-                      </a:solidFill>
-                      <a:prstDash val="solid"/>
-                      <a:round/>
-                      <a:headEnd type="none" w="med" len="med"/>
-                      <a:tailEnd type="none" w="med" len="med"/>
-                    </a:lnB>
-                  </a:tcPr>
-                </a:tc>
-                <a:tc>
-                  <a:txBody>
-                    <a:bodyPr/>
-                    <a:lstStyle/>
-                    <a:p>
-                      <a:pPr algn="ctr" indent="0" marL="0">
-                        <a:buNone/>
-                      </a:pPr>
-                      <a:r>
-                        <a:rPr lang="en-US" sz="1050" dirty="0">
-                          <a:solidFill>
-                            <a:srgbClr val="262626"/>
-                          </a:solidFill>
-                          <a:latin typeface="Malgun Gothic" pitchFamily="34" charset="0"/>
-                          <a:ea typeface="Malgun Gothic" pitchFamily="34" charset="-122"/>
-                          <a:cs typeface="Malgun Gothic" pitchFamily="34" charset="-120"/>
-                        </a:rPr>
-                        <a:t>23,051,380</a:t>
-                      </a:r>
-                      <a:endParaRPr lang="en-US" sz="1050" dirty="0">
-                        <a:latin typeface="Malgun Gothic" charset="0"/>
-                        <a:ea typeface="Malgun Gothic" charset="0"/>
-                        <a:cs typeface="Malgun Gothic" charset="0"/>
-                      </a:endParaRPr>
-                    </a:p>
-                  </a:txBody>
-                  <a:tcPr marL="91440" marR="91440" marT="45720" marB="45720" anchor="ctr">
-                    <a:lnL w="6350" cap="flat" cmpd="sng" algn="ctr">
-                      <a:solidFill>
-                        <a:srgbClr val="9CA3AF"/>
-                      </a:solidFill>
-                      <a:prstDash val="solid"/>
-                      <a:round/>
-                      <a:headEnd type="none" w="med" len="med"/>
-                      <a:tailEnd type="none" w="med" len="med"/>
-                    </a:lnL>
-                    <a:lnR w="6350" cap="flat" cmpd="sng" algn="ctr">
-                      <a:solidFill>
-                        <a:srgbClr val="9CA3AF"/>
-                      </a:solidFill>
-                      <a:prstDash val="solid"/>
-                      <a:round/>
-                      <a:headEnd type="none" w="med" len="med"/>
-                      <a:tailEnd type="none" w="med" len="med"/>
-                    </a:lnR>
-                    <a:lnT w="6350" cap="flat" cmpd="sng" algn="ctr">
-                      <a:solidFill>
-                        <a:srgbClr val="9CA3AF"/>
-                      </a:solidFill>
-                      <a:prstDash val="solid"/>
-                      <a:round/>
-                      <a:headEnd type="none" w="med" len="med"/>
-                      <a:tailEnd type="none" w="med" len="med"/>
-                    </a:lnT>
-                    <a:lnB w="6350" cap="flat" cmpd="sng" algn="ctr">
-                      <a:solidFill>
-                        <a:srgbClr val="9CA3AF"/>
-                      </a:solidFill>
-                      <a:prstDash val="solid"/>
-                      <a:round/>
-                      <a:headEnd type="none" w="med" len="med"/>
-                      <a:tailEnd type="none" w="med" len="med"/>
-                    </a:lnB>
-                  </a:tcPr>
-                </a:tc>
-                <a:tc>
-                  <a:txBody>
-                    <a:bodyPr/>
-                    <a:lstStyle/>
-                    <a:p>
-                      <a:pPr algn="ctr" indent="0" marL="0">
-                        <a:buNone/>
-                      </a:pPr>
-                      <a:r>
-                        <a:rPr lang="en-US" sz="1050" dirty="0">
-                          <a:solidFill>
-                            <a:srgbClr val="262626"/>
-                          </a:solidFill>
-                          <a:latin typeface="Malgun Gothic" pitchFamily="34" charset="0"/>
-                          <a:ea typeface="Malgun Gothic" pitchFamily="34" charset="-122"/>
-                          <a:cs typeface="Malgun Gothic" pitchFamily="34" charset="-120"/>
-                        </a:rPr>
-                        <a:t>+40.6%</a:t>
-                      </a:r>
-                      <a:endParaRPr lang="en-US" sz="1050" dirty="0">
-                        <a:latin typeface="Malgun Gothic" charset="0"/>
-                        <a:ea typeface="Malgun Gothic" charset="0"/>
-                        <a:cs typeface="Malgun Gothic" charset="0"/>
-                      </a:endParaRPr>
-                    </a:p>
-                  </a:txBody>
-                  <a:tcPr marL="91440" marR="91440" marT="45720" marB="45720" anchor="ctr">
-                    <a:lnL w="6350" cap="flat" cmpd="sng" algn="ctr">
-                      <a:solidFill>
-                        <a:srgbClr val="9CA3AF"/>
-                      </a:solidFill>
-                      <a:prstDash val="solid"/>
-                      <a:round/>
-                      <a:headEnd type="none" w="med" len="med"/>
-                      <a:tailEnd type="none" w="med" len="med"/>
-                    </a:lnL>
-                    <a:lnR w="6350" cap="flat" cmpd="sng" algn="ctr">
-                      <a:solidFill>
-                        <a:srgbClr val="9CA3AF"/>
-                      </a:solidFill>
-                      <a:prstDash val="solid"/>
-                      <a:round/>
-                      <a:headEnd type="none" w="med" len="med"/>
-                      <a:tailEnd type="none" w="med" len="med"/>
-                    </a:lnR>
-                    <a:lnT w="6350" cap="flat" cmpd="sng" algn="ctr">
-                      <a:solidFill>
-                        <a:srgbClr val="9CA3AF"/>
-                      </a:solidFill>
-                      <a:prstDash val="solid"/>
-                      <a:round/>
-                      <a:headEnd type="none" w="med" len="med"/>
-                      <a:tailEnd type="none" w="med" len="med"/>
-                    </a:lnT>
-                    <a:lnB w="6350" cap="flat" cmpd="sng" algn="ctr">
-                      <a:solidFill>
-                        <a:srgbClr val="9CA3AF"/>
-                      </a:solidFill>
-                      <a:prstDash val="solid"/>
-                      <a:round/>
-                      <a:headEnd type="none" w="med" len="med"/>
-                      <a:tailEnd type="none" w="med" len="med"/>
-                    </a:lnB>
-                  </a:tcPr>
-                </a:tc>
-              </a:tr>
-              <a:tr h="384048">
-                <a:tc>
-                  <a:txBody>
-                    <a:bodyPr/>
-                    <a:lstStyle/>
-                    <a:p>
-                      <a:pPr algn="ctr" indent="0" marL="0">
-                        <a:buNone/>
-                      </a:pPr>
-                      <a:r>
-                        <a:rPr lang="en-US" sz="1050" dirty="0">
-                          <a:solidFill>
-                            <a:srgbClr val="262626"/>
-                          </a:solidFill>
-                          <a:latin typeface="Malgun Gothic" pitchFamily="34" charset="0"/>
-                          <a:ea typeface="Malgun Gothic" pitchFamily="34" charset="-122"/>
-                          <a:cs typeface="Malgun Gothic" pitchFamily="34" charset="-120"/>
-                        </a:rPr>
-                        <a:t>선저 단면계수 ZB (cm³)</a:t>
-                      </a:r>
-                      <a:endParaRPr lang="en-US" sz="1050" dirty="0">
-                        <a:latin typeface="Malgun Gothic" charset="0"/>
-                        <a:ea typeface="Malgun Gothic" charset="0"/>
-                        <a:cs typeface="Malgun Gothic" charset="0"/>
-                      </a:endParaRPr>
-                    </a:p>
-                  </a:txBody>
-                  <a:tcPr marL="91440" marR="91440" marT="45720" marB="45720" anchor="ctr">
-                    <a:lnL w="6350" cap="flat" cmpd="sng" algn="ctr">
-                      <a:solidFill>
-                        <a:srgbClr val="9CA3AF"/>
-                      </a:solidFill>
-                      <a:prstDash val="solid"/>
-                      <a:round/>
-                      <a:headEnd type="none" w="med" len="med"/>
-                      <a:tailEnd type="none" w="med" len="med"/>
-                    </a:lnL>
-                    <a:lnR w="6350" cap="flat" cmpd="sng" algn="ctr">
-                      <a:solidFill>
-                        <a:srgbClr val="9CA3AF"/>
-                      </a:solidFill>
-                      <a:prstDash val="solid"/>
-                      <a:round/>
-                      <a:headEnd type="none" w="med" len="med"/>
-                      <a:tailEnd type="none" w="med" len="med"/>
-                    </a:lnR>
-                    <a:lnT w="6350" cap="flat" cmpd="sng" algn="ctr">
-                      <a:solidFill>
-                        <a:srgbClr val="9CA3AF"/>
-                      </a:solidFill>
-                      <a:prstDash val="solid"/>
-                      <a:round/>
-                      <a:headEnd type="none" w="med" len="med"/>
-                      <a:tailEnd type="none" w="med" len="med"/>
-                    </a:lnT>
-                    <a:lnB w="6350" cap="flat" cmpd="sng" algn="ctr">
-                      <a:solidFill>
-                        <a:srgbClr val="9CA3AF"/>
-                      </a:solidFill>
-                      <a:prstDash val="solid"/>
-                      <a:round/>
-                      <a:headEnd type="none" w="med" len="med"/>
-                      <a:tailEnd type="none" w="med" len="med"/>
-                    </a:lnB>
-                  </a:tcPr>
-                </a:tc>
-                <a:tc>
-                  <a:txBody>
-                    <a:bodyPr/>
-                    <a:lstStyle/>
-                    <a:p>
-                      <a:pPr algn="ctr" indent="0" marL="0">
-                        <a:buNone/>
-                      </a:pPr>
-                      <a:r>
-                        <a:rPr lang="en-US" sz="1050" dirty="0">
-                          <a:solidFill>
-                            <a:srgbClr val="262626"/>
-                          </a:solidFill>
-                          <a:latin typeface="Malgun Gothic" pitchFamily="34" charset="0"/>
-                          <a:ea typeface="Malgun Gothic" pitchFamily="34" charset="-122"/>
-                          <a:cs typeface="Malgun Gothic" pitchFamily="34" charset="-120"/>
-                        </a:rPr>
-                        <a:t>27,787,695</a:t>
-                      </a:r>
-                      <a:endParaRPr lang="en-US" sz="1050" dirty="0">
-                        <a:latin typeface="Malgun Gothic" charset="0"/>
-                        <a:ea typeface="Malgun Gothic" charset="0"/>
-                        <a:cs typeface="Malgun Gothic" charset="0"/>
-                      </a:endParaRPr>
-                    </a:p>
-                  </a:txBody>
-                  <a:tcPr marL="91440" marR="91440" marT="45720" marB="45720" anchor="ctr">
-                    <a:lnL w="6350" cap="flat" cmpd="sng" algn="ctr">
-                      <a:solidFill>
-                        <a:srgbClr val="9CA3AF"/>
-                      </a:solidFill>
-                      <a:prstDash val="solid"/>
-                      <a:round/>
-                      <a:headEnd type="none" w="med" len="med"/>
-                      <a:tailEnd type="none" w="med" len="med"/>
-                    </a:lnL>
-                    <a:lnR w="6350" cap="flat" cmpd="sng" algn="ctr">
-                      <a:solidFill>
-                        <a:srgbClr val="9CA3AF"/>
-                      </a:solidFill>
-                      <a:prstDash val="solid"/>
-                      <a:round/>
-                      <a:headEnd type="none" w="med" len="med"/>
-                      <a:tailEnd type="none" w="med" len="med"/>
-                    </a:lnR>
-                    <a:lnT w="6350" cap="flat" cmpd="sng" algn="ctr">
-                      <a:solidFill>
-                        <a:srgbClr val="9CA3AF"/>
-                      </a:solidFill>
-                      <a:prstDash val="solid"/>
-                      <a:round/>
-                      <a:headEnd type="none" w="med" len="med"/>
-                      <a:tailEnd type="none" w="med" len="med"/>
-                    </a:lnT>
-                    <a:lnB w="6350" cap="flat" cmpd="sng" algn="ctr">
-                      <a:solidFill>
-                        <a:srgbClr val="9CA3AF"/>
-                      </a:solidFill>
-                      <a:prstDash val="solid"/>
-                      <a:round/>
-                      <a:headEnd type="none" w="med" len="med"/>
-                      <a:tailEnd type="none" w="med" len="med"/>
-                    </a:lnB>
-                  </a:tcPr>
-                </a:tc>
-                <a:tc>
-                  <a:txBody>
-                    <a:bodyPr/>
-                    <a:lstStyle/>
-                    <a:p>
-                      <a:pPr algn="ctr" indent="0" marL="0">
-                        <a:buNone/>
-                      </a:pPr>
-                      <a:r>
-                        <a:rPr lang="en-US" sz="1050" dirty="0">
-                          <a:solidFill>
-                            <a:srgbClr val="262626"/>
-                          </a:solidFill>
-                          <a:latin typeface="Malgun Gothic" pitchFamily="34" charset="0"/>
-                          <a:ea typeface="Malgun Gothic" pitchFamily="34" charset="-122"/>
-                          <a:cs typeface="Malgun Gothic" pitchFamily="34" charset="-120"/>
-                        </a:rPr>
-                        <a:t>+69.0%</a:t>
-                      </a:r>
-                      <a:endParaRPr lang="en-US" sz="1050" dirty="0">
-                        <a:latin typeface="Malgun Gothic" charset="0"/>
-                        <a:ea typeface="Malgun Gothic" charset="0"/>
-                        <a:cs typeface="Malgun Gothic" charset="0"/>
-                      </a:endParaRPr>
-                    </a:p>
-                  </a:txBody>
-                  <a:tcPr marL="91440" marR="91440" marT="45720" marB="45720" anchor="ctr">
-                    <a:lnL w="6350" cap="flat" cmpd="sng" algn="ctr">
-                      <a:solidFill>
-                        <a:srgbClr val="9CA3AF"/>
-                      </a:solidFill>
-                      <a:prstDash val="solid"/>
-                      <a:round/>
-                      <a:headEnd type="none" w="med" len="med"/>
-                      <a:tailEnd type="none" w="med" len="med"/>
-                    </a:lnL>
-                    <a:lnR w="6350" cap="flat" cmpd="sng" algn="ctr">
-                      <a:solidFill>
-                        <a:srgbClr val="9CA3AF"/>
-                      </a:solidFill>
-                      <a:prstDash val="solid"/>
-                      <a:round/>
-                      <a:headEnd type="none" w="med" len="med"/>
-                      <a:tailEnd type="none" w="med" len="med"/>
-                    </a:lnR>
-                    <a:lnT w="6350" cap="flat" cmpd="sng" algn="ctr">
-                      <a:solidFill>
-                        <a:srgbClr val="9CA3AF"/>
-                      </a:solidFill>
-                      <a:prstDash val="solid"/>
-                      <a:round/>
-                      <a:headEnd type="none" w="med" len="med"/>
-                      <a:tailEnd type="none" w="med" len="med"/>
-                    </a:lnT>
-                    <a:lnB w="6350" cap="flat" cmpd="sng" algn="ctr">
-                      <a:solidFill>
-                        <a:srgbClr val="9CA3AF"/>
-                      </a:solidFill>
-                      <a:prstDash val="solid"/>
-                      <a:round/>
-                      <a:headEnd type="none" w="med" len="med"/>
-                      <a:tailEnd type="none" w="med" len="med"/>
-                    </a:lnB>
-                  </a:tcPr>
-                </a:tc>
-              </a:tr>
-            </a:tbl>
-          </a:graphicData>
-        </a:graphic>
-      </p:graphicFrame>
-      <p:graphicFrame>
-        <p:nvGraphicFramePr>
-          <p:cNvPr id="27" name="Table 1"/>
-          <p:cNvGraphicFramePr>
-            <a:graphicFrameLocks noGrp="1"/>
-          </p:cNvGraphicFramePr>
-          <p:nvPr>
-            <p:extLst>
-              <p:ext uri="{D42A27DB-BD31-4B8C-83A1-F6EECF244321}">
-                <p14:modId xmlns:p14="http://schemas.microsoft.com/office/powerpoint/2010/main" val="1579011935"/>
-              </p:ext>
-            </p:extLst>
-          </p:nvPr>
-        </p:nvGraphicFramePr>
-        <p:xfrm>
-          <a:off x="5989320" y="2926080"/>
-          <a:ext cx="5742432" cy="914400"/>
-        </p:xfrm>
-        <a:graphic>
-          <a:graphicData uri="http://schemas.openxmlformats.org/drawingml/2006/table">
-            <a:tbl>
-              <a:tblPr/>
-              <a:tblGrid>
-                <a:gridCol w="2633472"/>
-                <a:gridCol w="2011680"/>
-                <a:gridCol w="1097280"/>
-              </a:tblGrid>
-              <a:tr h="393192">
-                <a:tc>
-                  <a:txBody>
-                    <a:bodyPr/>
-                    <a:lstStyle/>
-                    <a:p>
-                      <a:pPr algn="ctr" indent="0" marL="0">
-                        <a:buNone/>
-                      </a:pPr>
-                      <a:r>
-                        <a:rPr lang="en-US" sz="1050" b="1" dirty="0">
-                          <a:solidFill>
-                            <a:srgbClr val="262626"/>
-                          </a:solidFill>
-                          <a:latin typeface="Malgun Gothic" pitchFamily="34" charset="0"/>
-                          <a:ea typeface="Malgun Gothic" pitchFamily="34" charset="-122"/>
-                          <a:cs typeface="Malgun Gothic" pitchFamily="34" charset="-120"/>
-                        </a:rPr>
-                        <a:t>강도 검증 항목</a:t>
-                      </a:r>
-                      <a:endParaRPr lang="en-US" sz="1050" dirty="0">
-                        <a:latin typeface="Malgun Gothic" charset="0"/>
-                        <a:ea typeface="Malgun Gothic" charset="0"/>
-                        <a:cs typeface="Malgun Gothic" charset="0"/>
-                      </a:endParaRPr>
-                    </a:p>
-                  </a:txBody>
-                  <a:tcPr marL="91440" marR="91440" marT="45720" marB="45720" anchor="ctr">
-                    <a:lnL w="6350" cap="flat" cmpd="sng" algn="ctr">
-                      <a:solidFill>
-                        <a:srgbClr val="9CA3AF"/>
-                      </a:solidFill>
-                      <a:prstDash val="solid"/>
-                      <a:round/>
-                      <a:headEnd type="none" w="med" len="med"/>
-                      <a:tailEnd type="none" w="med" len="med"/>
-                    </a:lnL>
-                    <a:lnR w="6350" cap="flat" cmpd="sng" algn="ctr">
-                      <a:solidFill>
-                        <a:srgbClr val="9CA3AF"/>
-                      </a:solidFill>
-                      <a:prstDash val="solid"/>
-                      <a:round/>
-                      <a:headEnd type="none" w="med" len="med"/>
-                      <a:tailEnd type="none" w="med" len="med"/>
-                    </a:lnR>
-                    <a:lnT w="6350" cap="flat" cmpd="sng" algn="ctr">
-                      <a:solidFill>
-                        <a:srgbClr val="9CA3AF"/>
-                      </a:solidFill>
-                      <a:prstDash val="solid"/>
-                      <a:round/>
-                      <a:headEnd type="none" w="med" len="med"/>
-                      <a:tailEnd type="none" w="med" len="med"/>
-                    </a:lnT>
-                    <a:lnB w="6350" cap="flat" cmpd="sng" algn="ctr">
-                      <a:solidFill>
-                        <a:srgbClr val="9CA3AF"/>
-                      </a:solidFill>
-                      <a:prstDash val="solid"/>
-                      <a:round/>
-                      <a:headEnd type="none" w="med" len="med"/>
-                      <a:tailEnd type="none" w="med" len="med"/>
-                    </a:lnB>
-                    <a:solidFill>
-                      <a:srgbClr val="D9D9D9"/>
-                    </a:solidFill>
-                  </a:tcPr>
-                </a:tc>
-                <a:tc>
-                  <a:txBody>
-                    <a:bodyPr/>
-                    <a:lstStyle/>
-                    <a:p>
-                      <a:pPr algn="ctr" indent="0" marL="0">
-                        <a:buNone/>
-                      </a:pPr>
-                      <a:r>
-                        <a:rPr lang="en-US" sz="1050" b="1" dirty="0">
-                          <a:solidFill>
-                            <a:srgbClr val="262626"/>
-                          </a:solidFill>
-                          <a:latin typeface="Malgun Gothic" pitchFamily="34" charset="0"/>
-                          <a:ea typeface="Malgun Gothic" pitchFamily="34" charset="-122"/>
-                          <a:cs typeface="Malgun Gothic" pitchFamily="34" charset="-120"/>
-                        </a:rPr>
-                        <a:t>결과</a:t>
-                      </a:r>
-                      <a:endParaRPr lang="en-US" sz="1050" dirty="0">
-                        <a:latin typeface="Malgun Gothic" charset="0"/>
-                        <a:ea typeface="Malgun Gothic" charset="0"/>
-                        <a:cs typeface="Malgun Gothic" charset="0"/>
-                      </a:endParaRPr>
-                    </a:p>
-                  </a:txBody>
-                  <a:tcPr marL="91440" marR="91440" marT="45720" marB="45720" anchor="ctr">
-                    <a:lnL w="6350" cap="flat" cmpd="sng" algn="ctr">
-                      <a:solidFill>
-                        <a:srgbClr val="9CA3AF"/>
-                      </a:solidFill>
-                      <a:prstDash val="solid"/>
-                      <a:round/>
-                      <a:headEnd type="none" w="med" len="med"/>
-                      <a:tailEnd type="none" w="med" len="med"/>
-                    </a:lnL>
-                    <a:lnR w="6350" cap="flat" cmpd="sng" algn="ctr">
-                      <a:solidFill>
-                        <a:srgbClr val="9CA3AF"/>
-                      </a:solidFill>
-                      <a:prstDash val="solid"/>
-                      <a:round/>
-                      <a:headEnd type="none" w="med" len="med"/>
-                      <a:tailEnd type="none" w="med" len="med"/>
-                    </a:lnR>
-                    <a:lnT w="6350" cap="flat" cmpd="sng" algn="ctr">
-                      <a:solidFill>
-                        <a:srgbClr val="9CA3AF"/>
-                      </a:solidFill>
-                      <a:prstDash val="solid"/>
-                      <a:round/>
-                      <a:headEnd type="none" w="med" len="med"/>
-                      <a:tailEnd type="none" w="med" len="med"/>
-                    </a:lnT>
-                    <a:lnB w="6350" cap="flat" cmpd="sng" algn="ctr">
-                      <a:solidFill>
-                        <a:srgbClr val="9CA3AF"/>
-                      </a:solidFill>
-                      <a:prstDash val="solid"/>
-                      <a:round/>
-                      <a:headEnd type="none" w="med" len="med"/>
-                      <a:tailEnd type="none" w="med" len="med"/>
-                    </a:lnB>
-                    <a:solidFill>
-                      <a:srgbClr val="D9D9D9"/>
-                    </a:solidFill>
-                  </a:tcPr>
-                </a:tc>
-                <a:tc>
-                  <a:txBody>
-                    <a:bodyPr/>
-                    <a:lstStyle/>
-                    <a:p>
-                      <a:pPr algn="ctr" indent="0" marL="0">
-                        <a:buNone/>
-                      </a:pPr>
-                      <a:r>
-                        <a:rPr lang="en-US" sz="1050" b="1" dirty="0">
-                          <a:solidFill>
-                            <a:srgbClr val="262626"/>
-                          </a:solidFill>
-                          <a:latin typeface="Malgun Gothic" pitchFamily="34" charset="0"/>
-                          <a:ea typeface="Malgun Gothic" pitchFamily="34" charset="-122"/>
-                          <a:cs typeface="Malgun Gothic" pitchFamily="34" charset="-120"/>
-                        </a:rPr>
-                        <a:t>판정</a:t>
-                      </a:r>
-                      <a:endParaRPr lang="en-US" sz="1050" dirty="0">
-                        <a:latin typeface="Malgun Gothic" charset="0"/>
-                        <a:ea typeface="Malgun Gothic" charset="0"/>
-                        <a:cs typeface="Malgun Gothic" charset="0"/>
-                      </a:endParaRPr>
-                    </a:p>
-                  </a:txBody>
-                  <a:tcPr marL="91440" marR="91440" marT="45720" marB="45720" anchor="ctr">
-                    <a:lnL w="6350" cap="flat" cmpd="sng" algn="ctr">
-                      <a:solidFill>
-                        <a:srgbClr val="9CA3AF"/>
-                      </a:solidFill>
-                      <a:prstDash val="solid"/>
-                      <a:round/>
-                      <a:headEnd type="none" w="med" len="med"/>
-                      <a:tailEnd type="none" w="med" len="med"/>
-                    </a:lnL>
-                    <a:lnR w="6350" cap="flat" cmpd="sng" algn="ctr">
-                      <a:solidFill>
-                        <a:srgbClr val="9CA3AF"/>
-                      </a:solidFill>
-                      <a:prstDash val="solid"/>
-                      <a:round/>
-                      <a:headEnd type="none" w="med" len="med"/>
-                      <a:tailEnd type="none" w="med" len="med"/>
-                    </a:lnR>
-                    <a:lnT w="6350" cap="flat" cmpd="sng" algn="ctr">
-                      <a:solidFill>
-                        <a:srgbClr val="9CA3AF"/>
-                      </a:solidFill>
-                      <a:prstDash val="solid"/>
-                      <a:round/>
-                      <a:headEnd type="none" w="med" len="med"/>
-                      <a:tailEnd type="none" w="med" len="med"/>
-                    </a:lnT>
-                    <a:lnB w="6350" cap="flat" cmpd="sng" algn="ctr">
-                      <a:solidFill>
-                        <a:srgbClr val="9CA3AF"/>
-                      </a:solidFill>
-                      <a:prstDash val="solid"/>
-                      <a:round/>
-                      <a:headEnd type="none" w="med" len="med"/>
-                      <a:tailEnd type="none" w="med" len="med"/>
-                    </a:lnB>
-                    <a:solidFill>
-                      <a:srgbClr val="D9D9D9"/>
-                    </a:solidFill>
-                  </a:tcPr>
-                </a:tc>
-              </a:tr>
-              <a:tr h="393192">
-                <a:tc>
-                  <a:txBody>
-                    <a:bodyPr/>
-                    <a:lstStyle/>
-                    <a:p>
-                      <a:pPr algn="ctr" indent="0" marL="0">
-                        <a:buNone/>
-                      </a:pPr>
-                      <a:r>
-                        <a:rPr lang="en-US" sz="1050" dirty="0">
-                          <a:solidFill>
-                            <a:srgbClr val="262626"/>
-                          </a:solidFill>
-                          <a:latin typeface="Malgun Gothic" pitchFamily="34" charset="0"/>
-                          <a:ea typeface="Malgun Gothic" pitchFamily="34" charset="-122"/>
-                          <a:cs typeface="Malgun Gothic" pitchFamily="34" charset="-120"/>
-                        </a:rPr>
-                        <a:t>극한강도 (Smith법, Ch5 Sec2)</a:t>
-                      </a:r>
-                      <a:endParaRPr lang="en-US" sz="1050" dirty="0">
-                        <a:latin typeface="Malgun Gothic" charset="0"/>
-                        <a:ea typeface="Malgun Gothic" charset="0"/>
-                        <a:cs typeface="Malgun Gothic" charset="0"/>
-                      </a:endParaRPr>
-                    </a:p>
-                  </a:txBody>
-                  <a:tcPr marL="91440" marR="91440" marT="45720" marB="45720" anchor="ctr">
-                    <a:lnL w="6350" cap="flat" cmpd="sng" algn="ctr">
-                      <a:solidFill>
-                        <a:srgbClr val="9CA3AF"/>
-                      </a:solidFill>
-                      <a:prstDash val="solid"/>
-                      <a:round/>
-                      <a:headEnd type="none" w="med" len="med"/>
-                      <a:tailEnd type="none" w="med" len="med"/>
-                    </a:lnL>
-                    <a:lnR w="6350" cap="flat" cmpd="sng" algn="ctr">
-                      <a:solidFill>
-                        <a:srgbClr val="9CA3AF"/>
-                      </a:solidFill>
-                      <a:prstDash val="solid"/>
-                      <a:round/>
-                      <a:headEnd type="none" w="med" len="med"/>
-                      <a:tailEnd type="none" w="med" len="med"/>
-                    </a:lnR>
-                    <a:lnT w="6350" cap="flat" cmpd="sng" algn="ctr">
-                      <a:solidFill>
-                        <a:srgbClr val="9CA3AF"/>
-                      </a:solidFill>
-                      <a:prstDash val="solid"/>
-                      <a:round/>
-                      <a:headEnd type="none" w="med" len="med"/>
-                      <a:tailEnd type="none" w="med" len="med"/>
-                    </a:lnT>
-                    <a:lnB w="6350" cap="flat" cmpd="sng" algn="ctr">
-                      <a:solidFill>
-                        <a:srgbClr val="9CA3AF"/>
-                      </a:solidFill>
-                      <a:prstDash val="solid"/>
-                      <a:round/>
-                      <a:headEnd type="none" w="med" len="med"/>
-                      <a:tailEnd type="none" w="med" len="med"/>
-                    </a:lnB>
-                  </a:tcPr>
-                </a:tc>
-                <a:tc>
-                  <a:txBody>
-                    <a:bodyPr/>
-                    <a:lstStyle/>
-                    <a:p>
-                      <a:pPr algn="ctr" indent="0" marL="0">
-                        <a:buNone/>
-                      </a:pPr>
-                      <a:r>
-                        <a:rPr lang="en-US" sz="1050" b="1" dirty="0">
-                          <a:solidFill>
-                            <a:srgbClr val="1F3864"/>
-                          </a:solidFill>
-                          <a:latin typeface="Malgun Gothic" pitchFamily="34" charset="0"/>
-                          <a:ea typeface="Malgun Gothic" pitchFamily="34" charset="-122"/>
-                          <a:cs typeface="Malgun Gothic" pitchFamily="34" charset="-120"/>
-                        </a:rPr>
-                        <a:t>이용률 최대 78.5%</a:t>
-                      </a:r>
-                      <a:endParaRPr lang="en-US" sz="1050" dirty="0">
-                        <a:latin typeface="Malgun Gothic" charset="0"/>
-                        <a:ea typeface="Malgun Gothic" charset="0"/>
-                        <a:cs typeface="Malgun Gothic" charset="0"/>
-                      </a:endParaRPr>
-                    </a:p>
-                  </a:txBody>
-                  <a:tcPr marL="91440" marR="91440" marT="45720" marB="45720" anchor="ctr">
-                    <a:lnL w="6350" cap="flat" cmpd="sng" algn="ctr">
-                      <a:solidFill>
-                        <a:srgbClr val="9CA3AF"/>
-                      </a:solidFill>
-                      <a:prstDash val="solid"/>
-                      <a:round/>
-                      <a:headEnd type="none" w="med" len="med"/>
-                      <a:tailEnd type="none" w="med" len="med"/>
-                    </a:lnL>
-                    <a:lnR w="6350" cap="flat" cmpd="sng" algn="ctr">
-                      <a:solidFill>
-                        <a:srgbClr val="9CA3AF"/>
-                      </a:solidFill>
-                      <a:prstDash val="solid"/>
-                      <a:round/>
-                      <a:headEnd type="none" w="med" len="med"/>
-                      <a:tailEnd type="none" w="med" len="med"/>
-                    </a:lnR>
-                    <a:lnT w="6350" cap="flat" cmpd="sng" algn="ctr">
-                      <a:solidFill>
-                        <a:srgbClr val="9CA3AF"/>
-                      </a:solidFill>
-                      <a:prstDash val="solid"/>
-                      <a:round/>
-                      <a:headEnd type="none" w="med" len="med"/>
-                      <a:tailEnd type="none" w="med" len="med"/>
-                    </a:lnT>
-                    <a:lnB w="6350" cap="flat" cmpd="sng" algn="ctr">
-                      <a:solidFill>
-                        <a:srgbClr val="9CA3AF"/>
-                      </a:solidFill>
-                      <a:prstDash val="solid"/>
-                      <a:round/>
-                      <a:headEnd type="none" w="med" len="med"/>
-                      <a:tailEnd type="none" w="med" len="med"/>
-                    </a:lnB>
-                  </a:tcPr>
-                </a:tc>
-                <a:tc>
-                  <a:txBody>
-                    <a:bodyPr/>
-                    <a:lstStyle/>
-                    <a:p>
-                      <a:pPr algn="ctr" indent="0" marL="0">
-                        <a:buNone/>
-                      </a:pPr>
-                      <a:r>
-                        <a:rPr lang="en-US" sz="1050" dirty="0">
-                          <a:solidFill>
-                            <a:srgbClr val="262626"/>
-                          </a:solidFill>
-                          <a:latin typeface="Malgun Gothic" pitchFamily="34" charset="0"/>
-                          <a:ea typeface="Malgun Gothic" pitchFamily="34" charset="-122"/>
-                          <a:cs typeface="Malgun Gothic" pitchFamily="34" charset="-120"/>
-                        </a:rPr>
-                        <a:t>OK</a:t>
-                      </a:r>
-                      <a:endParaRPr lang="en-US" sz="1050" dirty="0">
-                        <a:latin typeface="Malgun Gothic" charset="0"/>
-                        <a:ea typeface="Malgun Gothic" charset="0"/>
-                        <a:cs typeface="Malgun Gothic" charset="0"/>
-                      </a:endParaRPr>
-                    </a:p>
-                  </a:txBody>
-                  <a:tcPr marL="91440" marR="91440" marT="45720" marB="45720" anchor="ctr">
-                    <a:lnL w="6350" cap="flat" cmpd="sng" algn="ctr">
-                      <a:solidFill>
-                        <a:srgbClr val="9CA3AF"/>
-                      </a:solidFill>
-                      <a:prstDash val="solid"/>
-                      <a:round/>
-                      <a:headEnd type="none" w="med" len="med"/>
-                      <a:tailEnd type="none" w="med" len="med"/>
-                    </a:lnL>
-                    <a:lnR w="6350" cap="flat" cmpd="sng" algn="ctr">
-                      <a:solidFill>
-                        <a:srgbClr val="9CA3AF"/>
-                      </a:solidFill>
-                      <a:prstDash val="solid"/>
-                      <a:round/>
-                      <a:headEnd type="none" w="med" len="med"/>
-                      <a:tailEnd type="none" w="med" len="med"/>
-                    </a:lnR>
-                    <a:lnT w="6350" cap="flat" cmpd="sng" algn="ctr">
-                      <a:solidFill>
-                        <a:srgbClr val="9CA3AF"/>
-                      </a:solidFill>
-                      <a:prstDash val="solid"/>
-                      <a:round/>
-                      <a:headEnd type="none" w="med" len="med"/>
-                      <a:tailEnd type="none" w="med" len="med"/>
-                    </a:lnT>
-                    <a:lnB w="6350" cap="flat" cmpd="sng" algn="ctr">
-                      <a:solidFill>
-                        <a:srgbClr val="9CA3AF"/>
-                      </a:solidFill>
-                      <a:prstDash val="solid"/>
-                      <a:round/>
-                      <a:headEnd type="none" w="med" len="med"/>
-                      <a:tailEnd type="none" w="med" len="med"/>
-                    </a:lnB>
-                  </a:tcPr>
-                </a:tc>
-              </a:tr>
-              <a:tr h="393192">
-                <a:tc>
-                  <a:txBody>
-                    <a:bodyPr/>
-                    <a:lstStyle/>
-                    <a:p>
-                      <a:pPr algn="ctr" indent="0" marL="0">
-                        <a:buNone/>
-                      </a:pPr>
-                      <a:r>
-                        <a:rPr lang="en-US" sz="1050" dirty="0">
-                          <a:solidFill>
-                            <a:srgbClr val="262626"/>
-                          </a:solidFill>
-                          <a:latin typeface="Malgun Gothic" pitchFamily="34" charset="0"/>
-                          <a:ea typeface="Malgun Gothic" pitchFamily="34" charset="-122"/>
-                          <a:cs typeface="Malgun Gothic" pitchFamily="34" charset="-120"/>
-                        </a:rPr>
-                        <a:t>손상 후 잔존강도 (충돌·좌초)</a:t>
-                      </a:r>
-                      <a:endParaRPr lang="en-US" sz="1050" dirty="0">
-                        <a:latin typeface="Malgun Gothic" charset="0"/>
-                        <a:ea typeface="Malgun Gothic" charset="0"/>
-                        <a:cs typeface="Malgun Gothic" charset="0"/>
-                      </a:endParaRPr>
-                    </a:p>
-                  </a:txBody>
-                  <a:tcPr marL="91440" marR="91440" marT="45720" marB="45720" anchor="ctr">
-                    <a:lnL w="6350" cap="flat" cmpd="sng" algn="ctr">
-                      <a:solidFill>
-                        <a:srgbClr val="9CA3AF"/>
-                      </a:solidFill>
-                      <a:prstDash val="solid"/>
-                      <a:round/>
-                      <a:headEnd type="none" w="med" len="med"/>
-                      <a:tailEnd type="none" w="med" len="med"/>
-                    </a:lnL>
-                    <a:lnR w="6350" cap="flat" cmpd="sng" algn="ctr">
-                      <a:solidFill>
-                        <a:srgbClr val="9CA3AF"/>
-                      </a:solidFill>
-                      <a:prstDash val="solid"/>
-                      <a:round/>
-                      <a:headEnd type="none" w="med" len="med"/>
-                      <a:tailEnd type="none" w="med" len="med"/>
-                    </a:lnR>
-                    <a:lnT w="6350" cap="flat" cmpd="sng" algn="ctr">
-                      <a:solidFill>
-                        <a:srgbClr val="9CA3AF"/>
-                      </a:solidFill>
-                      <a:prstDash val="solid"/>
-                      <a:round/>
-                      <a:headEnd type="none" w="med" len="med"/>
-                      <a:tailEnd type="none" w="med" len="med"/>
-                    </a:lnT>
-                    <a:lnB w="6350" cap="flat" cmpd="sng" algn="ctr">
-                      <a:solidFill>
-                        <a:srgbClr val="9CA3AF"/>
-                      </a:solidFill>
-                      <a:prstDash val="solid"/>
-                      <a:round/>
-                      <a:headEnd type="none" w="med" len="med"/>
-                      <a:tailEnd type="none" w="med" len="med"/>
-                    </a:lnB>
-                  </a:tcPr>
-                </a:tc>
-                <a:tc>
-                  <a:txBody>
-                    <a:bodyPr/>
-                    <a:lstStyle/>
-                    <a:p>
-                      <a:pPr algn="ctr" indent="0" marL="0">
-                        <a:buNone/>
-                      </a:pPr>
-                      <a:r>
-                        <a:rPr lang="en-US" sz="1050" dirty="0">
-                          <a:solidFill>
-                            <a:srgbClr val="262626"/>
-                          </a:solidFill>
-                          <a:latin typeface="Malgun Gothic" pitchFamily="34" charset="0"/>
-                          <a:ea typeface="Malgun Gothic" pitchFamily="34" charset="-122"/>
-                          <a:cs typeface="Malgun Gothic" pitchFamily="34" charset="-120"/>
-                        </a:rPr>
-                        <a:t>이용률 최대 57.6%</a:t>
-                      </a:r>
-                      <a:endParaRPr lang="en-US" sz="1050" dirty="0">
-                        <a:latin typeface="Malgun Gothic" charset="0"/>
-                        <a:ea typeface="Malgun Gothic" charset="0"/>
-                        <a:cs typeface="Malgun Gothic" charset="0"/>
-                      </a:endParaRPr>
-                    </a:p>
-                  </a:txBody>
-                  <a:tcPr marL="91440" marR="91440" marT="45720" marB="45720" anchor="ctr">
-                    <a:lnL w="6350" cap="flat" cmpd="sng" algn="ctr">
-                      <a:solidFill>
-                        <a:srgbClr val="9CA3AF"/>
-                      </a:solidFill>
-                      <a:prstDash val="solid"/>
-                      <a:round/>
-                      <a:headEnd type="none" w="med" len="med"/>
-                      <a:tailEnd type="none" w="med" len="med"/>
-                    </a:lnL>
-                    <a:lnR w="6350" cap="flat" cmpd="sng" algn="ctr">
-                      <a:solidFill>
-                        <a:srgbClr val="9CA3AF"/>
-                      </a:solidFill>
-                      <a:prstDash val="solid"/>
-                      <a:round/>
-                      <a:headEnd type="none" w="med" len="med"/>
-                      <a:tailEnd type="none" w="med" len="med"/>
-                    </a:lnR>
-                    <a:lnT w="6350" cap="flat" cmpd="sng" algn="ctr">
-                      <a:solidFill>
-                        <a:srgbClr val="9CA3AF"/>
-                      </a:solidFill>
-                      <a:prstDash val="solid"/>
-                      <a:round/>
-                      <a:headEnd type="none" w="med" len="med"/>
-                      <a:tailEnd type="none" w="med" len="med"/>
-                    </a:lnT>
-                    <a:lnB w="6350" cap="flat" cmpd="sng" algn="ctr">
-                      <a:solidFill>
-                        <a:srgbClr val="9CA3AF"/>
-                      </a:solidFill>
-                      <a:prstDash val="solid"/>
-                      <a:round/>
-                      <a:headEnd type="none" w="med" len="med"/>
-                      <a:tailEnd type="none" w="med" len="med"/>
-                    </a:lnB>
-                  </a:tcPr>
-                </a:tc>
-                <a:tc>
-                  <a:txBody>
-                    <a:bodyPr/>
-                    <a:lstStyle/>
-                    <a:p>
-                      <a:pPr algn="ctr" indent="0" marL="0">
-                        <a:buNone/>
-                      </a:pPr>
-                      <a:r>
-                        <a:rPr lang="en-US" sz="1050" dirty="0">
-                          <a:solidFill>
-                            <a:srgbClr val="262626"/>
-                          </a:solidFill>
-                          <a:latin typeface="Malgun Gothic" pitchFamily="34" charset="0"/>
-                          <a:ea typeface="Malgun Gothic" pitchFamily="34" charset="-122"/>
-                          <a:cs typeface="Malgun Gothic" pitchFamily="34" charset="-120"/>
-                        </a:rPr>
-                        <a:t>OK</a:t>
-                      </a:r>
-                      <a:endParaRPr lang="en-US" sz="1050" dirty="0">
-                        <a:latin typeface="Malgun Gothic" charset="0"/>
-                        <a:ea typeface="Malgun Gothic" charset="0"/>
-                        <a:cs typeface="Malgun Gothic" charset="0"/>
-                      </a:endParaRPr>
-                    </a:p>
-                  </a:txBody>
-                  <a:tcPr marL="91440" marR="91440" marT="45720" marB="45720" anchor="ctr">
-                    <a:lnL w="6350" cap="flat" cmpd="sng" algn="ctr">
-                      <a:solidFill>
-                        <a:srgbClr val="9CA3AF"/>
-                      </a:solidFill>
-                      <a:prstDash val="solid"/>
-                      <a:round/>
-                      <a:headEnd type="none" w="med" len="med"/>
-                      <a:tailEnd type="none" w="med" len="med"/>
-                    </a:lnL>
-                    <a:lnR w="6350" cap="flat" cmpd="sng" algn="ctr">
-                      <a:solidFill>
-                        <a:srgbClr val="9CA3AF"/>
-                      </a:solidFill>
-                      <a:prstDash val="solid"/>
-                      <a:round/>
-                      <a:headEnd type="none" w="med" len="med"/>
-                      <a:tailEnd type="none" w="med" len="med"/>
-                    </a:lnR>
-                    <a:lnT w="6350" cap="flat" cmpd="sng" algn="ctr">
-                      <a:solidFill>
-                        <a:srgbClr val="9CA3AF"/>
-                      </a:solidFill>
-                      <a:prstDash val="solid"/>
-                      <a:round/>
-                      <a:headEnd type="none" w="med" len="med"/>
-                      <a:tailEnd type="none" w="med" len="med"/>
-                    </a:lnT>
-                    <a:lnB w="6350" cap="flat" cmpd="sng" algn="ctr">
-                      <a:solidFill>
-                        <a:srgbClr val="9CA3AF"/>
-                      </a:solidFill>
-                      <a:prstDash val="solid"/>
-                      <a:round/>
-                      <a:headEnd type="none" w="med" len="med"/>
-                      <a:tailEnd type="none" w="med" len="med"/>
-                    </a:lnB>
-                  </a:tcPr>
-                </a:tc>
-              </a:tr>
-              <a:tr h="393192">
-                <a:tc>
-                  <a:txBody>
-                    <a:bodyPr/>
-                    <a:lstStyle/>
-                    <a:p>
-                      <a:pPr algn="ctr" indent="0" marL="0">
-                        <a:buNone/>
-                      </a:pPr>
-                      <a:r>
-                        <a:rPr lang="en-US" sz="1050" dirty="0">
-                          <a:solidFill>
-                            <a:srgbClr val="262626"/>
-                          </a:solidFill>
-                          <a:latin typeface="Malgun Gothic" pitchFamily="34" charset="0"/>
-                          <a:ea typeface="Malgun Gothic" pitchFamily="34" charset="-122"/>
-                          <a:cs typeface="Malgun Gothic" pitchFamily="34" charset="-120"/>
-                        </a:rPr>
-                        <a:t>피로강도 (25년, S-N D곡선)</a:t>
-                      </a:r>
-                      <a:endParaRPr lang="en-US" sz="1050" dirty="0">
-                        <a:latin typeface="Malgun Gothic" charset="0"/>
-                        <a:ea typeface="Malgun Gothic" charset="0"/>
-                        <a:cs typeface="Malgun Gothic" charset="0"/>
-                      </a:endParaRPr>
-                    </a:p>
-                  </a:txBody>
-                  <a:tcPr marL="91440" marR="91440" marT="45720" marB="45720" anchor="ctr">
-                    <a:lnL w="6350" cap="flat" cmpd="sng" algn="ctr">
-                      <a:solidFill>
-                        <a:srgbClr val="9CA3AF"/>
-                      </a:solidFill>
-                      <a:prstDash val="solid"/>
-                      <a:round/>
-                      <a:headEnd type="none" w="med" len="med"/>
-                      <a:tailEnd type="none" w="med" len="med"/>
-                    </a:lnL>
-                    <a:lnR w="6350" cap="flat" cmpd="sng" algn="ctr">
-                      <a:solidFill>
-                        <a:srgbClr val="9CA3AF"/>
-                      </a:solidFill>
-                      <a:prstDash val="solid"/>
-                      <a:round/>
-                      <a:headEnd type="none" w="med" len="med"/>
-                      <a:tailEnd type="none" w="med" len="med"/>
-                    </a:lnR>
-                    <a:lnT w="6350" cap="flat" cmpd="sng" algn="ctr">
-                      <a:solidFill>
-                        <a:srgbClr val="9CA3AF"/>
-                      </a:solidFill>
-                      <a:prstDash val="solid"/>
-                      <a:round/>
-                      <a:headEnd type="none" w="med" len="med"/>
-                      <a:tailEnd type="none" w="med" len="med"/>
-                    </a:lnT>
-                    <a:lnB w="6350" cap="flat" cmpd="sng" algn="ctr">
-                      <a:solidFill>
-                        <a:srgbClr val="9CA3AF"/>
-                      </a:solidFill>
-                      <a:prstDash val="solid"/>
-                      <a:round/>
-                      <a:headEnd type="none" w="med" len="med"/>
-                      <a:tailEnd type="none" w="med" len="med"/>
-                    </a:lnB>
-                  </a:tcPr>
-                </a:tc>
-                <a:tc>
-                  <a:txBody>
-                    <a:bodyPr/>
-                    <a:lstStyle/>
-                    <a:p>
-                      <a:pPr algn="ctr" indent="0" marL="0">
-                        <a:buNone/>
-                      </a:pPr>
-                      <a:r>
-                        <a:rPr lang="en-US" sz="1050" dirty="0">
-                          <a:solidFill>
-                            <a:srgbClr val="262626"/>
-                          </a:solidFill>
-                          <a:latin typeface="Malgun Gothic" pitchFamily="34" charset="0"/>
-                          <a:ea typeface="Malgun Gothic" pitchFamily="34" charset="-122"/>
-                          <a:cs typeface="Malgun Gothic" pitchFamily="34" charset="-120"/>
-                        </a:rPr>
-                        <a:t>최소 수명 46.4년</a:t>
-                      </a:r>
-                      <a:endParaRPr lang="en-US" sz="1050" dirty="0">
-                        <a:latin typeface="Malgun Gothic" charset="0"/>
-                        <a:ea typeface="Malgun Gothic" charset="0"/>
-                        <a:cs typeface="Malgun Gothic" charset="0"/>
-                      </a:endParaRPr>
-                    </a:p>
-                  </a:txBody>
-                  <a:tcPr marL="91440" marR="91440" marT="45720" marB="45720" anchor="ctr">
-                    <a:lnL w="6350" cap="flat" cmpd="sng" algn="ctr">
-                      <a:solidFill>
-                        <a:srgbClr val="9CA3AF"/>
-                      </a:solidFill>
-                      <a:prstDash val="solid"/>
-                      <a:round/>
-                      <a:headEnd type="none" w="med" len="med"/>
-                      <a:tailEnd type="none" w="med" len="med"/>
-                    </a:lnL>
-                    <a:lnR w="6350" cap="flat" cmpd="sng" algn="ctr">
-                      <a:solidFill>
-                        <a:srgbClr val="9CA3AF"/>
-                      </a:solidFill>
-                      <a:prstDash val="solid"/>
-                      <a:round/>
-                      <a:headEnd type="none" w="med" len="med"/>
-                      <a:tailEnd type="none" w="med" len="med"/>
-                    </a:lnR>
-                    <a:lnT w="6350" cap="flat" cmpd="sng" algn="ctr">
-                      <a:solidFill>
-                        <a:srgbClr val="9CA3AF"/>
-                      </a:solidFill>
-                      <a:prstDash val="solid"/>
-                      <a:round/>
-                      <a:headEnd type="none" w="med" len="med"/>
-                      <a:tailEnd type="none" w="med" len="med"/>
-                    </a:lnT>
-                    <a:lnB w="6350" cap="flat" cmpd="sng" algn="ctr">
-                      <a:solidFill>
-                        <a:srgbClr val="9CA3AF"/>
-                      </a:solidFill>
-                      <a:prstDash val="solid"/>
-                      <a:round/>
-                      <a:headEnd type="none" w="med" len="med"/>
-                      <a:tailEnd type="none" w="med" len="med"/>
-                    </a:lnB>
-                  </a:tcPr>
-                </a:tc>
-                <a:tc>
-                  <a:txBody>
-                    <a:bodyPr/>
-                    <a:lstStyle/>
-                    <a:p>
-                      <a:pPr algn="ctr" indent="0" marL="0">
-                        <a:buNone/>
-                      </a:pPr>
-                      <a:r>
-                        <a:rPr lang="en-US" sz="1050" dirty="0">
-                          <a:solidFill>
-                            <a:srgbClr val="262626"/>
-                          </a:solidFill>
-                          <a:latin typeface="Malgun Gothic" pitchFamily="34" charset="0"/>
-                          <a:ea typeface="Malgun Gothic" pitchFamily="34" charset="-122"/>
-                          <a:cs typeface="Malgun Gothic" pitchFamily="34" charset="-120"/>
-                        </a:rPr>
-                        <a:t>OK</a:t>
-                      </a:r>
-                      <a:endParaRPr lang="en-US" sz="1050" dirty="0">
-                        <a:latin typeface="Malgun Gothic" charset="0"/>
-                        <a:ea typeface="Malgun Gothic" charset="0"/>
-                        <a:cs typeface="Malgun Gothic" charset="0"/>
-                      </a:endParaRPr>
-                    </a:p>
-                  </a:txBody>
-                  <a:tcPr marL="91440" marR="91440" marT="45720" marB="45720" anchor="ctr">
-                    <a:lnL w="6350" cap="flat" cmpd="sng" algn="ctr">
-                      <a:solidFill>
-                        <a:srgbClr val="9CA3AF"/>
-                      </a:solidFill>
-                      <a:prstDash val="solid"/>
-                      <a:round/>
-                      <a:headEnd type="none" w="med" len="med"/>
-                      <a:tailEnd type="none" w="med" len="med"/>
-                    </a:lnL>
-                    <a:lnR w="6350" cap="flat" cmpd="sng" algn="ctr">
-                      <a:solidFill>
-                        <a:srgbClr val="9CA3AF"/>
-                      </a:solidFill>
-                      <a:prstDash val="solid"/>
-                      <a:round/>
-                      <a:headEnd type="none" w="med" len="med"/>
-                      <a:tailEnd type="none" w="med" len="med"/>
-                    </a:lnR>
-                    <a:lnT w="6350" cap="flat" cmpd="sng" algn="ctr">
-                      <a:solidFill>
-                        <a:srgbClr val="9CA3AF"/>
-                      </a:solidFill>
-                      <a:prstDash val="solid"/>
-                      <a:round/>
-                      <a:headEnd type="none" w="med" len="med"/>
-                      <a:tailEnd type="none" w="med" len="med"/>
-                    </a:lnT>
-                    <a:lnB w="6350" cap="flat" cmpd="sng" algn="ctr">
-                      <a:solidFill>
-                        <a:srgbClr val="9CA3AF"/>
-                      </a:solidFill>
-                      <a:prstDash val="solid"/>
-                      <a:round/>
-                      <a:headEnd type="none" w="med" len="med"/>
-                      <a:tailEnd type="none" w="med" len="med"/>
-                    </a:lnB>
-                  </a:tcPr>
-                </a:tc>
-              </a:tr>
-              <a:tr h="393192">
-                <a:tc>
-                  <a:txBody>
-                    <a:bodyPr/>
-                    <a:lstStyle/>
-                    <a:p>
-                      <a:pPr algn="ctr" indent="0" marL="0">
-                        <a:buNone/>
-                      </a:pPr>
-                      <a:r>
-                        <a:rPr lang="en-US" sz="1050" dirty="0">
-                          <a:solidFill>
-                            <a:srgbClr val="262626"/>
-                          </a:solidFill>
-                          <a:latin typeface="Malgun Gothic" pitchFamily="34" charset="0"/>
-                          <a:ea typeface="Malgun Gothic" pitchFamily="34" charset="-122"/>
-                          <a:cs typeface="Malgun Gothic" pitchFamily="34" charset="-120"/>
-                        </a:rPr>
-                        <a:t>슬로싱 (Ch4 Sec6)</a:t>
-                      </a:r>
-                      <a:endParaRPr lang="en-US" sz="1050" dirty="0">
-                        <a:latin typeface="Malgun Gothic" charset="0"/>
-                        <a:ea typeface="Malgun Gothic" charset="0"/>
-                        <a:cs typeface="Malgun Gothic" charset="0"/>
-                      </a:endParaRPr>
-                    </a:p>
-                  </a:txBody>
-                  <a:tcPr marL="91440" marR="91440" marT="45720" marB="45720" anchor="ctr">
-                    <a:lnL w="6350" cap="flat" cmpd="sng" algn="ctr">
-                      <a:solidFill>
-                        <a:srgbClr val="9CA3AF"/>
-                      </a:solidFill>
-                      <a:prstDash val="solid"/>
-                      <a:round/>
-                      <a:headEnd type="none" w="med" len="med"/>
-                      <a:tailEnd type="none" w="med" len="med"/>
-                    </a:lnL>
-                    <a:lnR w="6350" cap="flat" cmpd="sng" algn="ctr">
-                      <a:solidFill>
-                        <a:srgbClr val="9CA3AF"/>
-                      </a:solidFill>
-                      <a:prstDash val="solid"/>
-                      <a:round/>
-                      <a:headEnd type="none" w="med" len="med"/>
-                      <a:tailEnd type="none" w="med" len="med"/>
-                    </a:lnR>
-                    <a:lnT w="6350" cap="flat" cmpd="sng" algn="ctr">
-                      <a:solidFill>
-                        <a:srgbClr val="9CA3AF"/>
-                      </a:solidFill>
-                      <a:prstDash val="solid"/>
-                      <a:round/>
-                      <a:headEnd type="none" w="med" len="med"/>
-                      <a:tailEnd type="none" w="med" len="med"/>
-                    </a:lnT>
-                    <a:lnB w="6350" cap="flat" cmpd="sng" algn="ctr">
-                      <a:solidFill>
-                        <a:srgbClr val="9CA3AF"/>
-                      </a:solidFill>
-                      <a:prstDash val="solid"/>
-                      <a:round/>
-                      <a:headEnd type="none" w="med" len="med"/>
-                      <a:tailEnd type="none" w="med" len="med"/>
-                    </a:lnB>
-                  </a:tcPr>
-                </a:tc>
-                <a:tc>
-                  <a:txBody>
-                    <a:bodyPr/>
-                    <a:lstStyle/>
-                    <a:p>
-                      <a:pPr algn="ctr" indent="0" marL="0">
-                        <a:buNone/>
-                      </a:pPr>
-                      <a:r>
-                        <a:rPr lang="en-US" sz="1050" dirty="0">
-                          <a:solidFill>
-                            <a:srgbClr val="262626"/>
-                          </a:solidFill>
-                          <a:latin typeface="Malgun Gothic" pitchFamily="34" charset="0"/>
-                          <a:ea typeface="Malgun Gothic" pitchFamily="34" charset="-122"/>
-                          <a:cs typeface="Malgun Gothic" pitchFamily="34" charset="-120"/>
-                        </a:rPr>
-                        <a:t>지배 부재 없음</a:t>
-                      </a:r>
-                      <a:endParaRPr lang="en-US" sz="1050" dirty="0">
-                        <a:latin typeface="Malgun Gothic" charset="0"/>
-                        <a:ea typeface="Malgun Gothic" charset="0"/>
-                        <a:cs typeface="Malgun Gothic" charset="0"/>
-                      </a:endParaRPr>
-                    </a:p>
-                  </a:txBody>
-                  <a:tcPr marL="91440" marR="91440" marT="45720" marB="45720" anchor="ctr">
-                    <a:lnL w="6350" cap="flat" cmpd="sng" algn="ctr">
-                      <a:solidFill>
-                        <a:srgbClr val="9CA3AF"/>
-                      </a:solidFill>
-                      <a:prstDash val="solid"/>
-                      <a:round/>
-                      <a:headEnd type="none" w="med" len="med"/>
-                      <a:tailEnd type="none" w="med" len="med"/>
-                    </a:lnL>
-                    <a:lnR w="6350" cap="flat" cmpd="sng" algn="ctr">
-                      <a:solidFill>
-                        <a:srgbClr val="9CA3AF"/>
-                      </a:solidFill>
-                      <a:prstDash val="solid"/>
-                      <a:round/>
-                      <a:headEnd type="none" w="med" len="med"/>
-                      <a:tailEnd type="none" w="med" len="med"/>
-                    </a:lnR>
-                    <a:lnT w="6350" cap="flat" cmpd="sng" algn="ctr">
-                      <a:solidFill>
-                        <a:srgbClr val="9CA3AF"/>
-                      </a:solidFill>
-                      <a:prstDash val="solid"/>
-                      <a:round/>
-                      <a:headEnd type="none" w="med" len="med"/>
-                      <a:tailEnd type="none" w="med" len="med"/>
-                    </a:lnT>
-                    <a:lnB w="6350" cap="flat" cmpd="sng" algn="ctr">
-                      <a:solidFill>
-                        <a:srgbClr val="9CA3AF"/>
-                      </a:solidFill>
-                      <a:prstDash val="solid"/>
-                      <a:round/>
-                      <a:headEnd type="none" w="med" len="med"/>
-                      <a:tailEnd type="none" w="med" len="med"/>
-                    </a:lnB>
-                  </a:tcPr>
-                </a:tc>
-                <a:tc>
-                  <a:txBody>
-                    <a:bodyPr/>
-                    <a:lstStyle/>
-                    <a:p>
-                      <a:pPr algn="ctr" indent="0" marL="0">
-                        <a:buNone/>
-                      </a:pPr>
-                      <a:r>
-                        <a:rPr lang="en-US" sz="1050" dirty="0">
-                          <a:solidFill>
-                            <a:srgbClr val="262626"/>
-                          </a:solidFill>
-                          <a:latin typeface="Malgun Gothic" pitchFamily="34" charset="0"/>
-                          <a:ea typeface="Malgun Gothic" pitchFamily="34" charset="-122"/>
-                          <a:cs typeface="Malgun Gothic" pitchFamily="34" charset="-120"/>
-                        </a:rPr>
-                        <a:t>OK</a:t>
-                      </a:r>
-                      <a:endParaRPr lang="en-US" sz="1050" dirty="0">
-                        <a:latin typeface="Malgun Gothic" charset="0"/>
-                        <a:ea typeface="Malgun Gothic" charset="0"/>
-                        <a:cs typeface="Malgun Gothic" charset="0"/>
-                      </a:endParaRPr>
-                    </a:p>
-                  </a:txBody>
-                  <a:tcPr marL="91440" marR="91440" marT="45720" marB="45720" anchor="ctr">
-                    <a:lnL w="6350" cap="flat" cmpd="sng" algn="ctr">
-                      <a:solidFill>
-                        <a:srgbClr val="9CA3AF"/>
-                      </a:solidFill>
-                      <a:prstDash val="solid"/>
-                      <a:round/>
-                      <a:headEnd type="none" w="med" len="med"/>
-                      <a:tailEnd type="none" w="med" len="med"/>
-                    </a:lnL>
-                    <a:lnR w="6350" cap="flat" cmpd="sng" algn="ctr">
-                      <a:solidFill>
-                        <a:srgbClr val="9CA3AF"/>
-                      </a:solidFill>
-                      <a:prstDash val="solid"/>
-                      <a:round/>
-                      <a:headEnd type="none" w="med" len="med"/>
-                      <a:tailEnd type="none" w="med" len="med"/>
-                    </a:lnR>
-                    <a:lnT w="6350" cap="flat" cmpd="sng" algn="ctr">
-                      <a:solidFill>
-                        <a:srgbClr val="9CA3AF"/>
-                      </a:solidFill>
-                      <a:prstDash val="solid"/>
-                      <a:round/>
-                      <a:headEnd type="none" w="med" len="med"/>
-                      <a:tailEnd type="none" w="med" len="med"/>
-                    </a:lnT>
-                    <a:lnB w="6350" cap="flat" cmpd="sng" algn="ctr">
-                      <a:solidFill>
-                        <a:srgbClr val="9CA3AF"/>
-                      </a:solidFill>
-                      <a:prstDash val="solid"/>
-                      <a:round/>
-                      <a:headEnd type="none" w="med" len="med"/>
-                      <a:tailEnd type="none" w="med" len="med"/>
-                    </a:lnB>
-                  </a:tcPr>
-                </a:tc>
-              </a:tr>
-              <a:tr h="393192">
-                <a:tc>
-                  <a:txBody>
-                    <a:bodyPr/>
-                    <a:lstStyle/>
-                    <a:p>
-                      <a:pPr algn="ctr" indent="0" marL="0">
-                        <a:buNone/>
-                      </a:pPr>
-                      <a:r>
-                        <a:rPr lang="en-US" sz="1050" dirty="0">
-                          <a:solidFill>
-                            <a:srgbClr val="262626"/>
-                          </a:solidFill>
-                          <a:latin typeface="Malgun Gothic" pitchFamily="34" charset="0"/>
-                          <a:ea typeface="Malgun Gothic" pitchFamily="34" charset="-122"/>
-                          <a:cs typeface="Malgun Gothic" pitchFamily="34" charset="-120"/>
-                        </a:rPr>
-                        <a:t>3-화물창 FE (Nastran, 45 LC)</a:t>
-                      </a:r>
-                      <a:endParaRPr lang="en-US" sz="1050" dirty="0">
-                        <a:latin typeface="Malgun Gothic" charset="0"/>
-                        <a:ea typeface="Malgun Gothic" charset="0"/>
-                        <a:cs typeface="Malgun Gothic" charset="0"/>
-                      </a:endParaRPr>
-                    </a:p>
-                  </a:txBody>
-                  <a:tcPr marL="91440" marR="91440" marT="45720" marB="45720" anchor="ctr">
-                    <a:lnL w="6350" cap="flat" cmpd="sng" algn="ctr">
-                      <a:solidFill>
-                        <a:srgbClr val="9CA3AF"/>
-                      </a:solidFill>
-                      <a:prstDash val="solid"/>
-                      <a:round/>
-                      <a:headEnd type="none" w="med" len="med"/>
-                      <a:tailEnd type="none" w="med" len="med"/>
-                    </a:lnL>
-                    <a:lnR w="6350" cap="flat" cmpd="sng" algn="ctr">
-                      <a:solidFill>
-                        <a:srgbClr val="9CA3AF"/>
-                      </a:solidFill>
-                      <a:prstDash val="solid"/>
-                      <a:round/>
-                      <a:headEnd type="none" w="med" len="med"/>
-                      <a:tailEnd type="none" w="med" len="med"/>
-                    </a:lnR>
-                    <a:lnT w="6350" cap="flat" cmpd="sng" algn="ctr">
-                      <a:solidFill>
-                        <a:srgbClr val="9CA3AF"/>
-                      </a:solidFill>
-                      <a:prstDash val="solid"/>
-                      <a:round/>
-                      <a:headEnd type="none" w="med" len="med"/>
-                      <a:tailEnd type="none" w="med" len="med"/>
-                    </a:lnT>
-                    <a:lnB w="6350" cap="flat" cmpd="sng" algn="ctr">
-                      <a:solidFill>
-                        <a:srgbClr val="9CA3AF"/>
-                      </a:solidFill>
-                      <a:prstDash val="solid"/>
-                      <a:round/>
-                      <a:headEnd type="none" w="med" len="med"/>
-                      <a:tailEnd type="none" w="med" len="med"/>
-                    </a:lnB>
-                  </a:tcPr>
-                </a:tc>
-                <a:tc>
-                  <a:txBody>
-                    <a:bodyPr/>
-                    <a:lstStyle/>
-                    <a:p>
-                      <a:pPr algn="ctr" indent="0" marL="0">
-                        <a:buNone/>
-                      </a:pPr>
-                      <a:r>
-                        <a:rPr lang="en-US" sz="1050" dirty="0">
-                          <a:solidFill>
-                            <a:srgbClr val="262626"/>
-                          </a:solidFill>
-                          <a:latin typeface="Malgun Gothic" pitchFamily="34" charset="0"/>
-                          <a:ea typeface="Malgun Gothic" pitchFamily="34" charset="-122"/>
-                          <a:cs typeface="Malgun Gothic" pitchFamily="34" charset="-120"/>
-                        </a:rPr>
-                        <a:t>초과 요소 0.99%</a:t>
-                      </a:r>
-                      <a:endParaRPr lang="en-US" sz="1050" dirty="0">
-                        <a:latin typeface="Malgun Gothic" charset="0"/>
-                        <a:ea typeface="Malgun Gothic" charset="0"/>
-                        <a:cs typeface="Malgun Gothic" charset="0"/>
-                      </a:endParaRPr>
-                    </a:p>
-                  </a:txBody>
-                  <a:tcPr marL="91440" marR="91440" marT="45720" marB="45720" anchor="ctr">
-                    <a:lnL w="6350" cap="flat" cmpd="sng" algn="ctr">
-                      <a:solidFill>
-                        <a:srgbClr val="9CA3AF"/>
-                      </a:solidFill>
-                      <a:prstDash val="solid"/>
-                      <a:round/>
-                      <a:headEnd type="none" w="med" len="med"/>
-                      <a:tailEnd type="none" w="med" len="med"/>
-                    </a:lnL>
-                    <a:lnR w="6350" cap="flat" cmpd="sng" algn="ctr">
-                      <a:solidFill>
-                        <a:srgbClr val="9CA3AF"/>
-                      </a:solidFill>
-                      <a:prstDash val="solid"/>
-                      <a:round/>
-                      <a:headEnd type="none" w="med" len="med"/>
-                      <a:tailEnd type="none" w="med" len="med"/>
-                    </a:lnR>
-                    <a:lnT w="6350" cap="flat" cmpd="sng" algn="ctr">
-                      <a:solidFill>
-                        <a:srgbClr val="9CA3AF"/>
-                      </a:solidFill>
-                      <a:prstDash val="solid"/>
-                      <a:round/>
-                      <a:headEnd type="none" w="med" len="med"/>
-                      <a:tailEnd type="none" w="med" len="med"/>
-                    </a:lnT>
-                    <a:lnB w="6350" cap="flat" cmpd="sng" algn="ctr">
-                      <a:solidFill>
-                        <a:srgbClr val="9CA3AF"/>
-                      </a:solidFill>
-                      <a:prstDash val="solid"/>
-                      <a:round/>
-                      <a:headEnd type="none" w="med" len="med"/>
-                      <a:tailEnd type="none" w="med" len="med"/>
-                    </a:lnB>
-                  </a:tcPr>
-                </a:tc>
-                <a:tc>
-                  <a:txBody>
-                    <a:bodyPr/>
-                    <a:lstStyle/>
-                    <a:p>
-                      <a:pPr algn="ctr" indent="0" marL="0">
-                        <a:buNone/>
-                      </a:pPr>
-                      <a:r>
-                        <a:rPr lang="en-US" sz="1050" dirty="0">
-                          <a:solidFill>
-                            <a:srgbClr val="262626"/>
-                          </a:solidFill>
-                          <a:latin typeface="Malgun Gothic" pitchFamily="34" charset="0"/>
-                          <a:ea typeface="Malgun Gothic" pitchFamily="34" charset="-122"/>
-                          <a:cs typeface="Malgun Gothic" pitchFamily="34" charset="-120"/>
-                        </a:rPr>
-                        <a:t>OK</a:t>
-                      </a:r>
-                      <a:endParaRPr lang="en-US" sz="1050" dirty="0">
-                        <a:latin typeface="Malgun Gothic" charset="0"/>
-                        <a:ea typeface="Malgun Gothic" charset="0"/>
-                        <a:cs typeface="Malgun Gothic" charset="0"/>
-                      </a:endParaRPr>
-                    </a:p>
-                  </a:txBody>
-                  <a:tcPr marL="91440" marR="91440" marT="45720" marB="45720" anchor="ctr">
-                    <a:lnL w="6350" cap="flat" cmpd="sng" algn="ctr">
-                      <a:solidFill>
-                        <a:srgbClr val="9CA3AF"/>
-                      </a:solidFill>
-                      <a:prstDash val="solid"/>
-                      <a:round/>
-                      <a:headEnd type="none" w="med" len="med"/>
-                      <a:tailEnd type="none" w="med" len="med"/>
-                    </a:lnL>
-                    <a:lnR w="6350" cap="flat" cmpd="sng" algn="ctr">
-                      <a:solidFill>
-                        <a:srgbClr val="9CA3AF"/>
-                      </a:solidFill>
-                      <a:prstDash val="solid"/>
-                      <a:round/>
-                      <a:headEnd type="none" w="med" len="med"/>
-                      <a:tailEnd type="none" w="med" len="med"/>
-                    </a:lnR>
-                    <a:lnT w="6350" cap="flat" cmpd="sng" algn="ctr">
-                      <a:solidFill>
-                        <a:srgbClr val="9CA3AF"/>
-                      </a:solidFill>
-                      <a:prstDash val="solid"/>
-                      <a:round/>
-                      <a:headEnd type="none" w="med" len="med"/>
-                      <a:tailEnd type="none" w="med" len="med"/>
-                    </a:lnT>
-                    <a:lnB w="6350" cap="flat" cmpd="sng" algn="ctr">
-                      <a:solidFill>
-                        <a:srgbClr val="9CA3AF"/>
-                      </a:solidFill>
-                      <a:prstDash val="solid"/>
-                      <a:round/>
-                      <a:headEnd type="none" w="med" len="med"/>
-                      <a:tailEnd type="none" w="med" len="med"/>
-                    </a:lnB>
-                  </a:tcPr>
-                </a:tc>
-              </a:tr>
-            </a:tbl>
-          </a:graphicData>
-        </a:graphic>
-      </p:graphicFrame>
       <p:sp>
         <p:nvSpPr>
-          <p:cNvPr id="10" name="Text 4"/>
+          <p:cNvPr id="9" name="Shape 4"/>
+          <p:cNvSpPr/>
+          <p:nvPr/>
+        </p:nvSpPr>
+        <p:spPr>
+          <a:xfrm>
+            <a:off x="457200" y="4681728"/>
+            <a:ext cx="2035454" cy="676656"/>
+          </a:xfrm>
+          <a:prstGeom prst="rect">
+            <a:avLst/>
+          </a:prstGeom>
+          <a:solidFill>
+            <a:srgbClr val="F2F5FA"/>
+          </a:solidFill>
+          <a:ln w="12700">
+            <a:solidFill>
+              <a:srgbClr val="1F3864"/>
+            </a:solidFill>
+            <a:prstDash val="solid"/>
+          </a:ln>
+        </p:spPr>
+      </p:sp>
+      <p:sp>
+        <p:nvSpPr>
+          <p:cNvPr id="10" name="Text 5"/>
           <p:cNvSpPr txBox="1"/>
           <p:nvPr/>
         </p:nvSpPr>
         <p:spPr>
           <a:xfrm>
-            <a:off x="5989320" y="5577840"/>
-            <a:ext cx="5806440" cy="365760"/>
+            <a:off x="457200" y="4754880"/>
+            <a:ext cx="2035454" cy="292608"/>
+          </a:xfrm>
+          <a:prstGeom prst="rect">
+            <a:avLst/>
+          </a:prstGeom>
+          <a:noFill/>
+          <a:ln/>
+        </p:spPr>
+        <p:txBody>
+          <a:bodyPr wrap="square" lIns="0" tIns="0" rIns="0" bIns="0" rtlCol="0" anchor="ctr"/>
+          <a:lstStyle/>
+          <a:p>
+            <a:pPr algn="ctr" indent="0" marL="0">
+              <a:buNone/>
+            </a:pPr>
+            <a:r>
+              <a:rPr lang="en-US" sz="1000" dirty="0">
+                <a:solidFill>
+                  <a:srgbClr val="262626"/>
+                </a:solidFill>
+                <a:latin typeface="Malgun Gothic" pitchFamily="34" charset="0"/>
+                <a:ea typeface="Malgun Gothic" pitchFamily="34" charset="-122"/>
+                <a:cs typeface="Malgun Gothic" pitchFamily="34" charset="-120"/>
+              </a:rPr>
+              <a:t>Ch 4</a:t>
+            </a:r>
+            <a:endParaRPr lang="en-US" sz="1000" dirty="0"/>
+          </a:p>
+        </p:txBody>
+      </p:sp>
+      <p:sp>
+        <p:nvSpPr>
+          <p:cNvPr id="11" name="Text 6"/>
+          <p:cNvSpPr txBox="1"/>
+          <p:nvPr/>
+        </p:nvSpPr>
+        <p:spPr>
+          <a:xfrm>
+            <a:off x="457200" y="5047488"/>
+            <a:ext cx="2035454" cy="256032"/>
+          </a:xfrm>
+          <a:prstGeom prst="rect">
+            <a:avLst/>
+          </a:prstGeom>
+          <a:noFill/>
+          <a:ln/>
+        </p:spPr>
+        <p:txBody>
+          <a:bodyPr wrap="square" lIns="0" tIns="0" rIns="0" bIns="0" rtlCol="0" anchor="ctr"/>
+          <a:lstStyle/>
+          <a:p>
+            <a:pPr algn="ctr" indent="0" marL="0">
+              <a:buNone/>
+            </a:pPr>
+            <a:r>
+              <a:rPr lang="en-US" sz="1500" b="1" dirty="0">
+                <a:solidFill>
+                  <a:srgbClr val="1F3864"/>
+                </a:solidFill>
+                <a:latin typeface="Malgun Gothic" pitchFamily="34" charset="0"/>
+                <a:ea typeface="Malgun Gothic" pitchFamily="34" charset="-122"/>
+                <a:cs typeface="Malgun Gothic" pitchFamily="34" charset="-120"/>
+              </a:rPr>
+              <a:t>하중</a:t>
+            </a:r>
+            <a:endParaRPr lang="en-US" sz="1500" dirty="0"/>
+          </a:p>
+        </p:txBody>
+      </p:sp>
+      <p:sp>
+        <p:nvSpPr>
+          <p:cNvPr id="12" name="Text 7"/>
+          <p:cNvSpPr txBox="1"/>
+          <p:nvPr/>
+        </p:nvSpPr>
+        <p:spPr>
+          <a:xfrm>
+            <a:off x="2492654" y="4681728"/>
+            <a:ext cx="274320" cy="676656"/>
+          </a:xfrm>
+          <a:prstGeom prst="rect">
+            <a:avLst/>
+          </a:prstGeom>
+          <a:noFill/>
+          <a:ln/>
+        </p:spPr>
+        <p:txBody>
+          <a:bodyPr wrap="square" lIns="0" tIns="0" rIns="0" bIns="0" rtlCol="0" anchor="ctr"/>
+          <a:lstStyle/>
+          <a:p>
+            <a:pPr algn="ctr" indent="0" marL="0">
+              <a:buNone/>
+            </a:pPr>
+            <a:r>
+              <a:rPr lang="en-US" sz="1000" dirty="0">
+                <a:solidFill>
+                  <a:srgbClr val="1F3864"/>
+                </a:solidFill>
+                <a:latin typeface="Malgun Gothic" pitchFamily="34" charset="0"/>
+                <a:ea typeface="Malgun Gothic" pitchFamily="34" charset="-122"/>
+                <a:cs typeface="Malgun Gothic" pitchFamily="34" charset="-120"/>
+              </a:rPr>
+              <a:t>▶</a:t>
+            </a:r>
+            <a:endParaRPr lang="en-US" sz="1000" dirty="0"/>
+          </a:p>
+        </p:txBody>
+      </p:sp>
+      <p:sp>
+        <p:nvSpPr>
+          <p:cNvPr id="13" name="Shape 8"/>
+          <p:cNvSpPr/>
+          <p:nvPr/>
+        </p:nvSpPr>
+        <p:spPr>
+          <a:xfrm>
+            <a:off x="2766974" y="4681728"/>
+            <a:ext cx="2035454" cy="676656"/>
+          </a:xfrm>
+          <a:prstGeom prst="rect">
+            <a:avLst/>
+          </a:prstGeom>
+          <a:solidFill>
+            <a:srgbClr val="F2F5FA"/>
+          </a:solidFill>
+          <a:ln w="12700">
+            <a:solidFill>
+              <a:srgbClr val="1F3864"/>
+            </a:solidFill>
+            <a:prstDash val="solid"/>
+          </a:ln>
+        </p:spPr>
+      </p:sp>
+      <p:sp>
+        <p:nvSpPr>
+          <p:cNvPr id="14" name="Text 9"/>
+          <p:cNvSpPr txBox="1"/>
+          <p:nvPr/>
+        </p:nvSpPr>
+        <p:spPr>
+          <a:xfrm>
+            <a:off x="2766974" y="4754880"/>
+            <a:ext cx="2035454" cy="292608"/>
+          </a:xfrm>
+          <a:prstGeom prst="rect">
+            <a:avLst/>
+          </a:prstGeom>
+          <a:noFill/>
+          <a:ln/>
+        </p:spPr>
+        <p:txBody>
+          <a:bodyPr wrap="square" lIns="0" tIns="0" rIns="0" bIns="0" rtlCol="0" anchor="ctr"/>
+          <a:lstStyle/>
+          <a:p>
+            <a:pPr algn="ctr" indent="0" marL="0">
+              <a:buNone/>
+            </a:pPr>
+            <a:r>
+              <a:rPr lang="en-US" sz="1000" dirty="0">
+                <a:solidFill>
+                  <a:srgbClr val="262626"/>
+                </a:solidFill>
+                <a:latin typeface="Malgun Gothic" pitchFamily="34" charset="0"/>
+                <a:ea typeface="Malgun Gothic" pitchFamily="34" charset="-122"/>
+                <a:cs typeface="Malgun Gothic" pitchFamily="34" charset="-120"/>
+              </a:rPr>
+              <a:t>Ch 5</a:t>
+            </a:r>
+            <a:endParaRPr lang="en-US" sz="1000" dirty="0"/>
+          </a:p>
+        </p:txBody>
+      </p:sp>
+      <p:sp>
+        <p:nvSpPr>
+          <p:cNvPr id="15" name="Text 10"/>
+          <p:cNvSpPr txBox="1"/>
+          <p:nvPr/>
+        </p:nvSpPr>
+        <p:spPr>
+          <a:xfrm>
+            <a:off x="2766974" y="5047488"/>
+            <a:ext cx="2035454" cy="256032"/>
+          </a:xfrm>
+          <a:prstGeom prst="rect">
+            <a:avLst/>
+          </a:prstGeom>
+          <a:noFill/>
+          <a:ln/>
+        </p:spPr>
+        <p:txBody>
+          <a:bodyPr wrap="square" lIns="0" tIns="0" rIns="0" bIns="0" rtlCol="0" anchor="ctr"/>
+          <a:lstStyle/>
+          <a:p>
+            <a:pPr algn="ctr" indent="0" marL="0">
+              <a:buNone/>
+            </a:pPr>
+            <a:r>
+              <a:rPr lang="en-US" sz="1500" b="1" dirty="0">
+                <a:solidFill>
+                  <a:srgbClr val="1F3864"/>
+                </a:solidFill>
+                <a:latin typeface="Malgun Gothic" pitchFamily="34" charset="0"/>
+                <a:ea typeface="Malgun Gothic" pitchFamily="34" charset="-122"/>
+                <a:cs typeface="Malgun Gothic" pitchFamily="34" charset="-120"/>
+              </a:rPr>
+              <a:t>선체거더</a:t>
+            </a:r>
+            <a:endParaRPr lang="en-US" sz="1500" dirty="0"/>
+          </a:p>
+        </p:txBody>
+      </p:sp>
+      <p:sp>
+        <p:nvSpPr>
+          <p:cNvPr id="16" name="Text 11"/>
+          <p:cNvSpPr txBox="1"/>
+          <p:nvPr/>
+        </p:nvSpPr>
+        <p:spPr>
+          <a:xfrm>
+            <a:off x="4802429" y="4681728"/>
+            <a:ext cx="274320" cy="676656"/>
+          </a:xfrm>
+          <a:prstGeom prst="rect">
+            <a:avLst/>
+          </a:prstGeom>
+          <a:noFill/>
+          <a:ln/>
+        </p:spPr>
+        <p:txBody>
+          <a:bodyPr wrap="square" lIns="0" tIns="0" rIns="0" bIns="0" rtlCol="0" anchor="ctr"/>
+          <a:lstStyle/>
+          <a:p>
+            <a:pPr algn="ctr" indent="0" marL="0">
+              <a:buNone/>
+            </a:pPr>
+            <a:r>
+              <a:rPr lang="en-US" sz="1000" dirty="0">
+                <a:solidFill>
+                  <a:srgbClr val="1F3864"/>
+                </a:solidFill>
+                <a:latin typeface="Malgun Gothic" pitchFamily="34" charset="0"/>
+                <a:ea typeface="Malgun Gothic" pitchFamily="34" charset="-122"/>
+                <a:cs typeface="Malgun Gothic" pitchFamily="34" charset="-120"/>
+              </a:rPr>
+              <a:t>▶</a:t>
+            </a:r>
+            <a:endParaRPr lang="en-US" sz="1000" dirty="0"/>
+          </a:p>
+        </p:txBody>
+      </p:sp>
+      <p:sp>
+        <p:nvSpPr>
+          <p:cNvPr id="17" name="Shape 12"/>
+          <p:cNvSpPr/>
+          <p:nvPr/>
+        </p:nvSpPr>
+        <p:spPr>
+          <a:xfrm>
+            <a:off x="5076749" y="4681728"/>
+            <a:ext cx="2035454" cy="676656"/>
+          </a:xfrm>
+          <a:prstGeom prst="rect">
+            <a:avLst/>
+          </a:prstGeom>
+          <a:solidFill>
+            <a:srgbClr val="F2F5FA"/>
+          </a:solidFill>
+          <a:ln w="12700">
+            <a:solidFill>
+              <a:srgbClr val="1F3864"/>
+            </a:solidFill>
+            <a:prstDash val="solid"/>
+          </a:ln>
+        </p:spPr>
+      </p:sp>
+      <p:sp>
+        <p:nvSpPr>
+          <p:cNvPr id="18" name="Text 13"/>
+          <p:cNvSpPr txBox="1"/>
+          <p:nvPr/>
+        </p:nvSpPr>
+        <p:spPr>
+          <a:xfrm>
+            <a:off x="5076749" y="4754880"/>
+            <a:ext cx="2035454" cy="292608"/>
+          </a:xfrm>
+          <a:prstGeom prst="rect">
+            <a:avLst/>
+          </a:prstGeom>
+          <a:noFill/>
+          <a:ln/>
+        </p:spPr>
+        <p:txBody>
+          <a:bodyPr wrap="square" lIns="0" tIns="0" rIns="0" bIns="0" rtlCol="0" anchor="ctr"/>
+          <a:lstStyle/>
+          <a:p>
+            <a:pPr algn="ctr" indent="0" marL="0">
+              <a:buNone/>
+            </a:pPr>
+            <a:r>
+              <a:rPr lang="en-US" sz="1000" dirty="0">
+                <a:solidFill>
+                  <a:srgbClr val="262626"/>
+                </a:solidFill>
+                <a:latin typeface="Malgun Gothic" pitchFamily="34" charset="0"/>
+                <a:ea typeface="Malgun Gothic" pitchFamily="34" charset="-122"/>
+                <a:cs typeface="Malgun Gothic" pitchFamily="34" charset="-120"/>
+              </a:rPr>
+              <a:t>Ch 6</a:t>
+            </a:r>
+            <a:endParaRPr lang="en-US" sz="1000" dirty="0"/>
+          </a:p>
+        </p:txBody>
+      </p:sp>
+      <p:sp>
+        <p:nvSpPr>
+          <p:cNvPr id="19" name="Text 14"/>
+          <p:cNvSpPr txBox="1"/>
+          <p:nvPr/>
+        </p:nvSpPr>
+        <p:spPr>
+          <a:xfrm>
+            <a:off x="5076749" y="5047488"/>
+            <a:ext cx="2035454" cy="256032"/>
+          </a:xfrm>
+          <a:prstGeom prst="rect">
+            <a:avLst/>
+          </a:prstGeom>
+          <a:noFill/>
+          <a:ln/>
+        </p:spPr>
+        <p:txBody>
+          <a:bodyPr wrap="square" lIns="0" tIns="0" rIns="0" bIns="0" rtlCol="0" anchor="ctr"/>
+          <a:lstStyle/>
+          <a:p>
+            <a:pPr algn="ctr" indent="0" marL="0">
+              <a:buNone/>
+            </a:pPr>
+            <a:r>
+              <a:rPr lang="en-US" sz="1500" b="1" dirty="0">
+                <a:solidFill>
+                  <a:srgbClr val="1F3864"/>
+                </a:solidFill>
+                <a:latin typeface="Malgun Gothic" pitchFamily="34" charset="0"/>
+                <a:ea typeface="Malgun Gothic" pitchFamily="34" charset="-122"/>
+                <a:cs typeface="Malgun Gothic" pitchFamily="34" charset="-120"/>
+              </a:rPr>
+              <a:t>국부 치수</a:t>
+            </a:r>
+            <a:endParaRPr lang="en-US" sz="1500" dirty="0"/>
+          </a:p>
+        </p:txBody>
+      </p:sp>
+      <p:sp>
+        <p:nvSpPr>
+          <p:cNvPr id="20" name="Text 15"/>
+          <p:cNvSpPr txBox="1"/>
+          <p:nvPr/>
+        </p:nvSpPr>
+        <p:spPr>
+          <a:xfrm>
+            <a:off x="7112203" y="4681728"/>
+            <a:ext cx="274320" cy="676656"/>
+          </a:xfrm>
+          <a:prstGeom prst="rect">
+            <a:avLst/>
+          </a:prstGeom>
+          <a:noFill/>
+          <a:ln/>
+        </p:spPr>
+        <p:txBody>
+          <a:bodyPr wrap="square" lIns="0" tIns="0" rIns="0" bIns="0" rtlCol="0" anchor="ctr"/>
+          <a:lstStyle/>
+          <a:p>
+            <a:pPr algn="ctr" indent="0" marL="0">
+              <a:buNone/>
+            </a:pPr>
+            <a:r>
+              <a:rPr lang="en-US" sz="1000" dirty="0">
+                <a:solidFill>
+                  <a:srgbClr val="1F3864"/>
+                </a:solidFill>
+                <a:latin typeface="Malgun Gothic" pitchFamily="34" charset="0"/>
+                <a:ea typeface="Malgun Gothic" pitchFamily="34" charset="-122"/>
+                <a:cs typeface="Malgun Gothic" pitchFamily="34" charset="-120"/>
+              </a:rPr>
+              <a:t>▶</a:t>
+            </a:r>
+            <a:endParaRPr lang="en-US" sz="1000" dirty="0"/>
+          </a:p>
+        </p:txBody>
+      </p:sp>
+      <p:sp>
+        <p:nvSpPr>
+          <p:cNvPr id="21" name="Shape 16"/>
+          <p:cNvSpPr/>
+          <p:nvPr/>
+        </p:nvSpPr>
+        <p:spPr>
+          <a:xfrm>
+            <a:off x="7386523" y="4681728"/>
+            <a:ext cx="2035454" cy="676656"/>
+          </a:xfrm>
+          <a:prstGeom prst="rect">
+            <a:avLst/>
+          </a:prstGeom>
+          <a:solidFill>
+            <a:srgbClr val="F2F5FA"/>
+          </a:solidFill>
+          <a:ln w="12700">
+            <a:solidFill>
+              <a:srgbClr val="1F3864"/>
+            </a:solidFill>
+            <a:prstDash val="solid"/>
+          </a:ln>
+        </p:spPr>
+      </p:sp>
+      <p:sp>
+        <p:nvSpPr>
+          <p:cNvPr id="22" name="Text 17"/>
+          <p:cNvSpPr txBox="1"/>
+          <p:nvPr/>
+        </p:nvSpPr>
+        <p:spPr>
+          <a:xfrm>
+            <a:off x="7386523" y="4754880"/>
+            <a:ext cx="2035454" cy="292608"/>
+          </a:xfrm>
+          <a:prstGeom prst="rect">
+            <a:avLst/>
+          </a:prstGeom>
+          <a:noFill/>
+          <a:ln/>
+        </p:spPr>
+        <p:txBody>
+          <a:bodyPr wrap="square" lIns="0" tIns="0" rIns="0" bIns="0" rtlCol="0" anchor="ctr"/>
+          <a:lstStyle/>
+          <a:p>
+            <a:pPr algn="ctr" indent="0" marL="0">
+              <a:buNone/>
+            </a:pPr>
+            <a:r>
+              <a:rPr lang="en-US" sz="1000" dirty="0">
+                <a:solidFill>
+                  <a:srgbClr val="262626"/>
+                </a:solidFill>
+                <a:latin typeface="Malgun Gothic" pitchFamily="34" charset="0"/>
+                <a:ea typeface="Malgun Gothic" pitchFamily="34" charset="-122"/>
+                <a:cs typeface="Malgun Gothic" pitchFamily="34" charset="-120"/>
+              </a:rPr>
+              <a:t>Ch 8</a:t>
+            </a:r>
+            <a:endParaRPr lang="en-US" sz="1000" dirty="0"/>
+          </a:p>
+        </p:txBody>
+      </p:sp>
+      <p:sp>
+        <p:nvSpPr>
+          <p:cNvPr id="23" name="Text 18"/>
+          <p:cNvSpPr txBox="1"/>
+          <p:nvPr/>
+        </p:nvSpPr>
+        <p:spPr>
+          <a:xfrm>
+            <a:off x="7386523" y="5047488"/>
+            <a:ext cx="2035454" cy="256032"/>
+          </a:xfrm>
+          <a:prstGeom prst="rect">
+            <a:avLst/>
+          </a:prstGeom>
+          <a:noFill/>
+          <a:ln/>
+        </p:spPr>
+        <p:txBody>
+          <a:bodyPr wrap="square" lIns="0" tIns="0" rIns="0" bIns="0" rtlCol="0" anchor="ctr"/>
+          <a:lstStyle/>
+          <a:p>
+            <a:pPr algn="ctr" indent="0" marL="0">
+              <a:buNone/>
+            </a:pPr>
+            <a:r>
+              <a:rPr lang="en-US" sz="1500" b="1" dirty="0">
+                <a:solidFill>
+                  <a:srgbClr val="1F3864"/>
+                </a:solidFill>
+                <a:latin typeface="Malgun Gothic" pitchFamily="34" charset="0"/>
+                <a:ea typeface="Malgun Gothic" pitchFamily="34" charset="-122"/>
+                <a:cs typeface="Malgun Gothic" pitchFamily="34" charset="-120"/>
+              </a:rPr>
+              <a:t>좌굴</a:t>
+            </a:r>
+            <a:endParaRPr lang="en-US" sz="1500" dirty="0"/>
+          </a:p>
+        </p:txBody>
+      </p:sp>
+      <p:sp>
+        <p:nvSpPr>
+          <p:cNvPr id="24" name="Text 19"/>
+          <p:cNvSpPr txBox="1"/>
+          <p:nvPr/>
+        </p:nvSpPr>
+        <p:spPr>
+          <a:xfrm>
+            <a:off x="9421978" y="4681728"/>
+            <a:ext cx="274320" cy="676656"/>
+          </a:xfrm>
+          <a:prstGeom prst="rect">
+            <a:avLst/>
+          </a:prstGeom>
+          <a:noFill/>
+          <a:ln/>
+        </p:spPr>
+        <p:txBody>
+          <a:bodyPr wrap="square" lIns="0" tIns="0" rIns="0" bIns="0" rtlCol="0" anchor="ctr"/>
+          <a:lstStyle/>
+          <a:p>
+            <a:pPr algn="ctr" indent="0" marL="0">
+              <a:buNone/>
+            </a:pPr>
+            <a:r>
+              <a:rPr lang="en-US" sz="1000" dirty="0">
+                <a:solidFill>
+                  <a:srgbClr val="1F3864"/>
+                </a:solidFill>
+                <a:latin typeface="Malgun Gothic" pitchFamily="34" charset="0"/>
+                <a:ea typeface="Malgun Gothic" pitchFamily="34" charset="-122"/>
+                <a:cs typeface="Malgun Gothic" pitchFamily="34" charset="-120"/>
+              </a:rPr>
+              <a:t>▶</a:t>
+            </a:r>
+            <a:endParaRPr lang="en-US" sz="1000" dirty="0"/>
+          </a:p>
+        </p:txBody>
+      </p:sp>
+      <p:sp>
+        <p:nvSpPr>
+          <p:cNvPr id="25" name="Shape 20"/>
+          <p:cNvSpPr/>
+          <p:nvPr/>
+        </p:nvSpPr>
+        <p:spPr>
+          <a:xfrm>
+            <a:off x="9696298" y="4681728"/>
+            <a:ext cx="2035454" cy="676656"/>
+          </a:xfrm>
+          <a:prstGeom prst="rect">
+            <a:avLst/>
+          </a:prstGeom>
+          <a:solidFill>
+            <a:srgbClr val="F2F5FA"/>
+          </a:solidFill>
+          <a:ln w="12700">
+            <a:solidFill>
+              <a:srgbClr val="1F3864"/>
+            </a:solidFill>
+            <a:prstDash val="solid"/>
+          </a:ln>
+        </p:spPr>
+      </p:sp>
+      <p:sp>
+        <p:nvSpPr>
+          <p:cNvPr id="26" name="Text 21"/>
+          <p:cNvSpPr txBox="1"/>
+          <p:nvPr/>
+        </p:nvSpPr>
+        <p:spPr>
+          <a:xfrm>
+            <a:off x="9696298" y="4754880"/>
+            <a:ext cx="2035454" cy="292608"/>
+          </a:xfrm>
+          <a:prstGeom prst="rect">
+            <a:avLst/>
+          </a:prstGeom>
+          <a:noFill/>
+          <a:ln/>
+        </p:spPr>
+        <p:txBody>
+          <a:bodyPr wrap="square" lIns="0" tIns="0" rIns="0" bIns="0" rtlCol="0" anchor="ctr"/>
+          <a:lstStyle/>
+          <a:p>
+            <a:pPr algn="ctr" indent="0" marL="0">
+              <a:buNone/>
+            </a:pPr>
+            <a:r>
+              <a:rPr lang="en-US" sz="1000" dirty="0">
+                <a:solidFill>
+                  <a:srgbClr val="262626"/>
+                </a:solidFill>
+                <a:latin typeface="Malgun Gothic" pitchFamily="34" charset="0"/>
+                <a:ea typeface="Malgun Gothic" pitchFamily="34" charset="-122"/>
+                <a:cs typeface="Malgun Gothic" pitchFamily="34" charset="-120"/>
+              </a:rPr>
+              <a:t>Pt 2 Ch 2</a:t>
+            </a:r>
+            <a:endParaRPr lang="en-US" sz="1000" dirty="0"/>
+          </a:p>
+        </p:txBody>
+      </p:sp>
+      <p:sp>
+        <p:nvSpPr>
+          <p:cNvPr id="27" name="Text 22"/>
+          <p:cNvSpPr txBox="1"/>
+          <p:nvPr/>
+        </p:nvSpPr>
+        <p:spPr>
+          <a:xfrm>
+            <a:off x="9696298" y="5047488"/>
+            <a:ext cx="2035454" cy="256032"/>
+          </a:xfrm>
+          <a:prstGeom prst="rect">
+            <a:avLst/>
+          </a:prstGeom>
+          <a:noFill/>
+          <a:ln/>
+        </p:spPr>
+        <p:txBody>
+          <a:bodyPr wrap="square" lIns="0" tIns="0" rIns="0" bIns="0" rtlCol="0" anchor="ctr"/>
+          <a:lstStyle/>
+          <a:p>
+            <a:pPr algn="ctr" indent="0" marL="0">
+              <a:buNone/>
+            </a:pPr>
+            <a:r>
+              <a:rPr lang="en-US" sz="1500" b="1" dirty="0">
+                <a:solidFill>
+                  <a:srgbClr val="1F3864"/>
+                </a:solidFill>
+                <a:latin typeface="Malgun Gothic" pitchFamily="34" charset="0"/>
+                <a:ea typeface="Malgun Gothic" pitchFamily="34" charset="-122"/>
+                <a:cs typeface="Malgun Gothic" pitchFamily="34" charset="-120"/>
+              </a:rPr>
+              <a:t>1차 부재 · 횡격벽</a:t>
+            </a:r>
+            <a:endParaRPr lang="en-US" sz="1500" dirty="0"/>
+          </a:p>
+        </p:txBody>
+      </p:sp>
+      <p:sp>
+        <p:nvSpPr>
+          <p:cNvPr id="28" name="Text 23"/>
+          <p:cNvSpPr txBox="1"/>
+          <p:nvPr/>
+        </p:nvSpPr>
+        <p:spPr>
+          <a:xfrm>
+            <a:off x="457200" y="5669280"/>
+            <a:ext cx="11274552" cy="365760"/>
           </a:xfrm>
           <a:prstGeom prst="rect">
             <a:avLst/>
@@ -11009,7 +11507,7 @@
               <a:buNone/>
             </a:pPr>
             <a:r>
-              <a:rPr lang="en-US" sz="1250" b="1" dirty="0">
+              <a:rPr lang="en-US" sz="1300" b="1" dirty="0">
                 <a:solidFill>
                   <a:srgbClr val="C00000"/>
                 </a:solidFill>
@@ -11017,15 +11515,15 @@
                 <a:ea typeface="Malgun Gothic" pitchFamily="34" charset="-122"/>
                 <a:cs typeface="Malgun Gothic" pitchFamily="34" charset="-120"/>
               </a:rPr>
-              <a:t>→  선급 프로그램 SeaTrust-HullScan(KR)과 교차검증 — 굽힘모멘트 차이 0.003%</a:t>
+              <a:t>→  IACS 공통구조규칙(CSR) 조문을 단순화 없이 구현 — 동적 하중케이스 22개 전부를 하중 계산점마다 산출</a:t>
             </a:r>
-            <a:endParaRPr lang="en-US" sz="1250" dirty="0"/>
+            <a:endParaRPr lang="en-US" sz="1300" dirty="0"/>
           </a:p>
         </p:txBody>
       </p:sp>
       <p:sp>
         <p:nvSpPr>
-          <p:cNvPr id="11" name="Text 5"/>
+          <p:cNvPr id="29" name="Text 24"/>
           <p:cNvSpPr txBox="1"/>
           <p:nvPr/>
         </p:nvSpPr>
@@ -11064,7 +11562,7 @@
       </p:sp>
       <p:sp>
         <p:nvSpPr>
-          <p:cNvPr id="12" name="Text 6"/>
+          <p:cNvPr id="30" name="Text 25"/>
           <p:cNvSpPr txBox="1"/>
           <p:nvPr/>
         </p:nvSpPr>
@@ -11112,6 +11610,1479 @@
 <file path=ppt/slides/slide14.xml><?xml version="1.0" encoding="utf-8"?>
 <p:sld xmlns:a="http://schemas.openxmlformats.org/drawingml/2006/main" xmlns:r="http://schemas.openxmlformats.org/officeDocument/2006/relationships" xmlns:p="http://schemas.openxmlformats.org/presentationml/2006/main">
   <p:cSld name="Slide 14">
+    <p:spTree>
+      <p:nvGrpSpPr>
+        <p:cNvPr id="1" name=""/>
+        <p:cNvGrpSpPr/>
+        <p:nvPr/>
+      </p:nvGrpSpPr>
+      <p:grpSpPr>
+        <a:xfrm>
+          <a:off x="0" y="0"/>
+          <a:ext cx="0" cy="0"/>
+          <a:chOff x="0" y="0"/>
+          <a:chExt cx="0" cy="0"/>
+        </a:xfrm>
+      </p:grpSpPr>
+      <p:sp>
+        <p:nvSpPr>
+          <p:cNvPr id="3" name="Text 0"/>
+          <p:cNvSpPr txBox="1"/>
+          <p:nvPr/>
+        </p:nvSpPr>
+        <p:spPr>
+          <a:xfrm>
+            <a:off x="457200" y="237744"/>
+            <a:ext cx="11274552" cy="502920"/>
+          </a:xfrm>
+          <a:prstGeom prst="rect">
+            <a:avLst/>
+          </a:prstGeom>
+          <a:noFill/>
+          <a:ln/>
+        </p:spPr>
+        <p:txBody>
+          <a:bodyPr wrap="square" lIns="0" tIns="0" rIns="0" bIns="0" rtlCol="0" anchor="ctr"/>
+          <a:lstStyle/>
+          <a:p>
+            <a:pPr indent="0" marL="0">
+              <a:buNone/>
+            </a:pPr>
+            <a:r>
+              <a:rPr lang="en-US" sz="2200" b="1" dirty="0">
+                <a:solidFill>
+                  <a:srgbClr val="1F3864"/>
+                </a:solidFill>
+                <a:latin typeface="Malgun Gothic" pitchFamily="34" charset="0"/>
+                <a:ea typeface="Malgun Gothic" pitchFamily="34" charset="-122"/>
+                <a:cs typeface="Malgun Gothic" pitchFamily="34" charset="-120"/>
+              </a:rPr>
+              <a:t>06 | </a:t>
+            </a:r>
+            <a:pPr indent="0" marL="0">
+              <a:buNone/>
+            </a:pPr>
+            <a:r>
+              <a:rPr lang="en-US" sz="2200" b="1" dirty="0">
+                <a:solidFill>
+                  <a:srgbClr val="1F3864"/>
+                </a:solidFill>
+                <a:latin typeface="Malgun Gothic" pitchFamily="34" charset="0"/>
+                <a:ea typeface="Malgun Gothic" pitchFamily="34" charset="-122"/>
+                <a:cs typeface="Malgun Gothic" pitchFamily="34" charset="-120"/>
+              </a:rPr>
+              <a:t>구조 설계</a:t>
+            </a:r>
+            <a:pPr indent="0" marL="0">
+              <a:buNone/>
+            </a:pPr>
+            <a:r>
+              <a:rPr lang="en-US" sz="1600" dirty="0">
+                <a:solidFill>
+                  <a:srgbClr val="1F3864"/>
+                </a:solidFill>
+                <a:latin typeface="Malgun Gothic" pitchFamily="34" charset="0"/>
+                <a:ea typeface="Malgun Gothic" pitchFamily="34" charset="-122"/>
+                <a:cs typeface="Malgun Gothic" pitchFamily="34" charset="-120"/>
+              </a:rPr>
+              <a:t>  –  좌굴 · 강도 검증 및 선급 프로그램 교차검증</a:t>
+            </a:r>
+            <a:endParaRPr lang="en-US" sz="2200" dirty="0"/>
+          </a:p>
+        </p:txBody>
+      </p:sp>
+      <p:sp>
+        <p:nvSpPr>
+          <p:cNvPr id="4" name="Shape 1"/>
+          <p:cNvSpPr/>
+          <p:nvPr/>
+        </p:nvSpPr>
+        <p:spPr>
+          <a:xfrm>
+            <a:off x="457200" y="822960"/>
+            <a:ext cx="11274552" cy="0"/>
+          </a:xfrm>
+          <a:prstGeom prst="line">
+            <a:avLst/>
+          </a:prstGeom>
+          <a:noFill/>
+          <a:ln w="19050">
+            <a:solidFill>
+              <a:srgbClr val="1F3864"/>
+            </a:solidFill>
+            <a:prstDash val="solid"/>
+          </a:ln>
+        </p:spPr>
+      </p:sp>
+      <p:graphicFrame>
+        <p:nvGraphicFramePr>
+          <p:cNvPr id="5" name="Chart 0" descr=""/>
+          <p:cNvGraphicFramePr/>
+          <p:nvPr/>
+        </p:nvGraphicFramePr>
+        <p:xfrm>
+          <a:off x="384048" y="896112"/>
+          <a:ext cx="5440680" cy="2304288"/>
+        </p:xfrm>
+        <a:graphic xmlns:a="http://schemas.openxmlformats.org/drawingml/2006/main">
+          <a:graphicData uri="http://schemas.openxmlformats.org/drawingml/2006/chart">
+            <c:chart xmlns:c="http://schemas.openxmlformats.org/drawingml/2006/chart" r:id="rId1"/>
+          </a:graphicData>
+        </a:graphic>
+      </p:graphicFrame>
+      <p:sp>
+        <p:nvSpPr>
+          <p:cNvPr id="6" name="Text 2"/>
+          <p:cNvSpPr txBox="1"/>
+          <p:nvPr/>
+        </p:nvSpPr>
+        <p:spPr>
+          <a:xfrm>
+            <a:off x="384048" y="3200400"/>
+            <a:ext cx="5440680" cy="237744"/>
+          </a:xfrm>
+          <a:prstGeom prst="rect">
+            <a:avLst/>
+          </a:prstGeom>
+          <a:noFill/>
+          <a:ln/>
+        </p:spPr>
+        <p:txBody>
+          <a:bodyPr wrap="square" lIns="0" tIns="0" rIns="0" bIns="0" rtlCol="0" anchor="ctr"/>
+          <a:lstStyle/>
+          <a:p>
+            <a:pPr algn="ctr" indent="0" marL="0">
+              <a:buNone/>
+            </a:pPr>
+            <a:r>
+              <a:rPr lang="en-US" sz="1000" dirty="0">
+                <a:solidFill>
+                  <a:srgbClr val="595959"/>
+                </a:solidFill>
+                <a:latin typeface="Malgun Gothic" pitchFamily="34" charset="0"/>
+                <a:ea typeface="Malgun Gothic" pitchFamily="34" charset="-122"/>
+                <a:cs typeface="Malgun Gothic" pitchFamily="34" charset="-120"/>
+              </a:rPr>
+              <a:t>판 좌굴 이용률 η — 부재별, 한계 1.00 (손계산)</a:t>
+            </a:r>
+            <a:endParaRPr lang="en-US" sz="1000" dirty="0"/>
+          </a:p>
+        </p:txBody>
+      </p:sp>
+      <p:graphicFrame>
+        <p:nvGraphicFramePr>
+          <p:cNvPr id="7" name="Chart 1" descr=""/>
+          <p:cNvGraphicFramePr/>
+          <p:nvPr/>
+        </p:nvGraphicFramePr>
+        <p:xfrm>
+          <a:off x="384048" y="3529584"/>
+          <a:ext cx="5440680" cy="1920240"/>
+        </p:xfrm>
+        <a:graphic xmlns:a="http://schemas.openxmlformats.org/drawingml/2006/main">
+          <a:graphicData uri="http://schemas.openxmlformats.org/drawingml/2006/chart">
+            <c:chart xmlns:c="http://schemas.openxmlformats.org/drawingml/2006/chart" r:id="rId2"/>
+          </a:graphicData>
+        </a:graphic>
+      </p:graphicFrame>
+      <p:sp>
+        <p:nvSpPr>
+          <p:cNvPr id="8" name="Text 3"/>
+          <p:cNvSpPr txBox="1"/>
+          <p:nvPr/>
+        </p:nvSpPr>
+        <p:spPr>
+          <a:xfrm>
+            <a:off x="384048" y="5468112"/>
+            <a:ext cx="5440680" cy="237744"/>
+          </a:xfrm>
+          <a:prstGeom prst="rect">
+            <a:avLst/>
+          </a:prstGeom>
+          <a:noFill/>
+          <a:ln/>
+        </p:spPr>
+        <p:txBody>
+          <a:bodyPr wrap="square" lIns="0" tIns="0" rIns="0" bIns="0" rtlCol="0" anchor="ctr"/>
+          <a:lstStyle/>
+          <a:p>
+            <a:pPr algn="ctr" indent="0" marL="0">
+              <a:buNone/>
+            </a:pPr>
+            <a:r>
+              <a:rPr lang="en-US" sz="1000" dirty="0">
+                <a:solidFill>
+                  <a:srgbClr val="595959"/>
+                </a:solidFill>
+                <a:latin typeface="Malgun Gothic" pitchFamily="34" charset="0"/>
+                <a:ea typeface="Malgun Gothic" pitchFamily="34" charset="-122"/>
+                <a:cs typeface="Malgun Gothic" pitchFamily="34" charset="-120"/>
+              </a:rPr>
+              <a:t>정수중 굽힘모멘트 Msw — 채택값 대비 허용 상한, 여유 2.06× / 3.54× (×10⁶ kN·m)</a:t>
+            </a:r>
+            <a:endParaRPr lang="en-US" sz="1000" dirty="0"/>
+          </a:p>
+        </p:txBody>
+      </p:sp>
+      <p:graphicFrame>
+        <p:nvGraphicFramePr>
+          <p:cNvPr id="15" name="Table 0"/>
+          <p:cNvGraphicFramePr>
+            <a:graphicFrameLocks noGrp="1"/>
+          </p:cNvGraphicFramePr>
+          <p:nvPr>
+            <p:extLst>
+              <p:ext uri="{D42A27DB-BD31-4B8C-83A1-F6EECF244321}">
+                <p14:modId xmlns:p14="http://schemas.microsoft.com/office/powerpoint/2010/main" val="1579011935"/>
+              </p:ext>
+            </p:extLst>
+          </p:nvPr>
+        </p:nvGraphicFramePr>
+        <p:xfrm>
+          <a:off x="6144768" y="914400"/>
+          <a:ext cx="5586984" cy="914400"/>
+        </p:xfrm>
+        <a:graphic>
+          <a:graphicData uri="http://schemas.openxmlformats.org/drawingml/2006/table">
+            <a:tbl>
+              <a:tblPr/>
+              <a:tblGrid>
+                <a:gridCol w="2432304"/>
+                <a:gridCol w="2240280"/>
+                <a:gridCol w="914400"/>
+              </a:tblGrid>
+              <a:tr h="384048">
+                <a:tc>
+                  <a:txBody>
+                    <a:bodyPr/>
+                    <a:lstStyle/>
+                    <a:p>
+                      <a:pPr algn="ctr" indent="0" marL="0">
+                        <a:buNone/>
+                      </a:pPr>
+                      <a:r>
+                        <a:rPr lang="en-US" sz="1000" b="1" dirty="0">
+                          <a:solidFill>
+                            <a:srgbClr val="262626"/>
+                          </a:solidFill>
+                          <a:latin typeface="Malgun Gothic" pitchFamily="34" charset="0"/>
+                          <a:ea typeface="Malgun Gothic" pitchFamily="34" charset="-122"/>
+                          <a:cs typeface="Malgun Gothic" pitchFamily="34" charset="-120"/>
+                        </a:rPr>
+                        <a:t>강도 검증 항목</a:t>
+                      </a:r>
+                      <a:endParaRPr lang="en-US" sz="1000" dirty="0">
+                        <a:latin typeface="Malgun Gothic" charset="0"/>
+                        <a:ea typeface="Malgun Gothic" charset="0"/>
+                        <a:cs typeface="Malgun Gothic" charset="0"/>
+                      </a:endParaRPr>
+                    </a:p>
+                  </a:txBody>
+                  <a:tcPr marL="91440" marR="91440" marT="45720" marB="45720" anchor="ctr">
+                    <a:lnL w="6350" cap="flat" cmpd="sng" algn="ctr">
+                      <a:solidFill>
+                        <a:srgbClr val="9CA3AF"/>
+                      </a:solidFill>
+                      <a:prstDash val="solid"/>
+                      <a:round/>
+                      <a:headEnd type="none" w="med" len="med"/>
+                      <a:tailEnd type="none" w="med" len="med"/>
+                    </a:lnL>
+                    <a:lnR w="6350" cap="flat" cmpd="sng" algn="ctr">
+                      <a:solidFill>
+                        <a:srgbClr val="9CA3AF"/>
+                      </a:solidFill>
+                      <a:prstDash val="solid"/>
+                      <a:round/>
+                      <a:headEnd type="none" w="med" len="med"/>
+                      <a:tailEnd type="none" w="med" len="med"/>
+                    </a:lnR>
+                    <a:lnT w="6350" cap="flat" cmpd="sng" algn="ctr">
+                      <a:solidFill>
+                        <a:srgbClr val="9CA3AF"/>
+                      </a:solidFill>
+                      <a:prstDash val="solid"/>
+                      <a:round/>
+                      <a:headEnd type="none" w="med" len="med"/>
+                      <a:tailEnd type="none" w="med" len="med"/>
+                    </a:lnT>
+                    <a:lnB w="6350" cap="flat" cmpd="sng" algn="ctr">
+                      <a:solidFill>
+                        <a:srgbClr val="9CA3AF"/>
+                      </a:solidFill>
+                      <a:prstDash val="solid"/>
+                      <a:round/>
+                      <a:headEnd type="none" w="med" len="med"/>
+                      <a:tailEnd type="none" w="med" len="med"/>
+                    </a:lnB>
+                    <a:solidFill>
+                      <a:srgbClr val="D9D9D9"/>
+                    </a:solidFill>
+                  </a:tcPr>
+                </a:tc>
+                <a:tc>
+                  <a:txBody>
+                    <a:bodyPr/>
+                    <a:lstStyle/>
+                    <a:p>
+                      <a:pPr algn="ctr" indent="0" marL="0">
+                        <a:buNone/>
+                      </a:pPr>
+                      <a:r>
+                        <a:rPr lang="en-US" sz="1000" b="1" dirty="0">
+                          <a:solidFill>
+                            <a:srgbClr val="262626"/>
+                          </a:solidFill>
+                          <a:latin typeface="Malgun Gothic" pitchFamily="34" charset="0"/>
+                          <a:ea typeface="Malgun Gothic" pitchFamily="34" charset="-122"/>
+                          <a:cs typeface="Malgun Gothic" pitchFamily="34" charset="-120"/>
+                        </a:rPr>
+                        <a:t>결과</a:t>
+                      </a:r>
+                      <a:endParaRPr lang="en-US" sz="1000" dirty="0">
+                        <a:latin typeface="Malgun Gothic" charset="0"/>
+                        <a:ea typeface="Malgun Gothic" charset="0"/>
+                        <a:cs typeface="Malgun Gothic" charset="0"/>
+                      </a:endParaRPr>
+                    </a:p>
+                  </a:txBody>
+                  <a:tcPr marL="91440" marR="91440" marT="45720" marB="45720" anchor="ctr">
+                    <a:lnL w="6350" cap="flat" cmpd="sng" algn="ctr">
+                      <a:solidFill>
+                        <a:srgbClr val="9CA3AF"/>
+                      </a:solidFill>
+                      <a:prstDash val="solid"/>
+                      <a:round/>
+                      <a:headEnd type="none" w="med" len="med"/>
+                      <a:tailEnd type="none" w="med" len="med"/>
+                    </a:lnL>
+                    <a:lnR w="6350" cap="flat" cmpd="sng" algn="ctr">
+                      <a:solidFill>
+                        <a:srgbClr val="9CA3AF"/>
+                      </a:solidFill>
+                      <a:prstDash val="solid"/>
+                      <a:round/>
+                      <a:headEnd type="none" w="med" len="med"/>
+                      <a:tailEnd type="none" w="med" len="med"/>
+                    </a:lnR>
+                    <a:lnT w="6350" cap="flat" cmpd="sng" algn="ctr">
+                      <a:solidFill>
+                        <a:srgbClr val="9CA3AF"/>
+                      </a:solidFill>
+                      <a:prstDash val="solid"/>
+                      <a:round/>
+                      <a:headEnd type="none" w="med" len="med"/>
+                      <a:tailEnd type="none" w="med" len="med"/>
+                    </a:lnT>
+                    <a:lnB w="6350" cap="flat" cmpd="sng" algn="ctr">
+                      <a:solidFill>
+                        <a:srgbClr val="9CA3AF"/>
+                      </a:solidFill>
+                      <a:prstDash val="solid"/>
+                      <a:round/>
+                      <a:headEnd type="none" w="med" len="med"/>
+                      <a:tailEnd type="none" w="med" len="med"/>
+                    </a:lnB>
+                    <a:solidFill>
+                      <a:srgbClr val="D9D9D9"/>
+                    </a:solidFill>
+                  </a:tcPr>
+                </a:tc>
+                <a:tc>
+                  <a:txBody>
+                    <a:bodyPr/>
+                    <a:lstStyle/>
+                    <a:p>
+                      <a:pPr algn="ctr" indent="0" marL="0">
+                        <a:buNone/>
+                      </a:pPr>
+                      <a:r>
+                        <a:rPr lang="en-US" sz="1000" b="1" dirty="0">
+                          <a:solidFill>
+                            <a:srgbClr val="262626"/>
+                          </a:solidFill>
+                          <a:latin typeface="Malgun Gothic" pitchFamily="34" charset="0"/>
+                          <a:ea typeface="Malgun Gothic" pitchFamily="34" charset="-122"/>
+                          <a:cs typeface="Malgun Gothic" pitchFamily="34" charset="-120"/>
+                        </a:rPr>
+                        <a:t>판정</a:t>
+                      </a:r>
+                      <a:endParaRPr lang="en-US" sz="1000" dirty="0">
+                        <a:latin typeface="Malgun Gothic" charset="0"/>
+                        <a:ea typeface="Malgun Gothic" charset="0"/>
+                        <a:cs typeface="Malgun Gothic" charset="0"/>
+                      </a:endParaRPr>
+                    </a:p>
+                  </a:txBody>
+                  <a:tcPr marL="91440" marR="91440" marT="45720" marB="45720" anchor="ctr">
+                    <a:lnL w="6350" cap="flat" cmpd="sng" algn="ctr">
+                      <a:solidFill>
+                        <a:srgbClr val="9CA3AF"/>
+                      </a:solidFill>
+                      <a:prstDash val="solid"/>
+                      <a:round/>
+                      <a:headEnd type="none" w="med" len="med"/>
+                      <a:tailEnd type="none" w="med" len="med"/>
+                    </a:lnL>
+                    <a:lnR w="6350" cap="flat" cmpd="sng" algn="ctr">
+                      <a:solidFill>
+                        <a:srgbClr val="9CA3AF"/>
+                      </a:solidFill>
+                      <a:prstDash val="solid"/>
+                      <a:round/>
+                      <a:headEnd type="none" w="med" len="med"/>
+                      <a:tailEnd type="none" w="med" len="med"/>
+                    </a:lnR>
+                    <a:lnT w="6350" cap="flat" cmpd="sng" algn="ctr">
+                      <a:solidFill>
+                        <a:srgbClr val="9CA3AF"/>
+                      </a:solidFill>
+                      <a:prstDash val="solid"/>
+                      <a:round/>
+                      <a:headEnd type="none" w="med" len="med"/>
+                      <a:tailEnd type="none" w="med" len="med"/>
+                    </a:lnT>
+                    <a:lnB w="6350" cap="flat" cmpd="sng" algn="ctr">
+                      <a:solidFill>
+                        <a:srgbClr val="9CA3AF"/>
+                      </a:solidFill>
+                      <a:prstDash val="solid"/>
+                      <a:round/>
+                      <a:headEnd type="none" w="med" len="med"/>
+                      <a:tailEnd type="none" w="med" len="med"/>
+                    </a:lnB>
+                    <a:solidFill>
+                      <a:srgbClr val="D9D9D9"/>
+                    </a:solidFill>
+                  </a:tcPr>
+                </a:tc>
+              </a:tr>
+              <a:tr h="384048">
+                <a:tc>
+                  <a:txBody>
+                    <a:bodyPr/>
+                    <a:lstStyle/>
+                    <a:p>
+                      <a:pPr algn="ctr" indent="0" marL="0">
+                        <a:buNone/>
+                      </a:pPr>
+                      <a:r>
+                        <a:rPr lang="en-US" sz="1000" dirty="0">
+                          <a:solidFill>
+                            <a:srgbClr val="262626"/>
+                          </a:solidFill>
+                          <a:latin typeface="Malgun Gothic" pitchFamily="34" charset="0"/>
+                          <a:ea typeface="Malgun Gothic" pitchFamily="34" charset="-122"/>
+                          <a:cs typeface="Malgun Gothic" pitchFamily="34" charset="-120"/>
+                        </a:rPr>
+                        <a:t>극한강도 (Smith법, Ch5 Sec2)</a:t>
+                      </a:r>
+                      <a:endParaRPr lang="en-US" sz="1000" dirty="0">
+                        <a:latin typeface="Malgun Gothic" charset="0"/>
+                        <a:ea typeface="Malgun Gothic" charset="0"/>
+                        <a:cs typeface="Malgun Gothic" charset="0"/>
+                      </a:endParaRPr>
+                    </a:p>
+                  </a:txBody>
+                  <a:tcPr marL="91440" marR="91440" marT="45720" marB="45720" anchor="ctr">
+                    <a:lnL w="6350" cap="flat" cmpd="sng" algn="ctr">
+                      <a:solidFill>
+                        <a:srgbClr val="9CA3AF"/>
+                      </a:solidFill>
+                      <a:prstDash val="solid"/>
+                      <a:round/>
+                      <a:headEnd type="none" w="med" len="med"/>
+                      <a:tailEnd type="none" w="med" len="med"/>
+                    </a:lnL>
+                    <a:lnR w="6350" cap="flat" cmpd="sng" algn="ctr">
+                      <a:solidFill>
+                        <a:srgbClr val="9CA3AF"/>
+                      </a:solidFill>
+                      <a:prstDash val="solid"/>
+                      <a:round/>
+                      <a:headEnd type="none" w="med" len="med"/>
+                      <a:tailEnd type="none" w="med" len="med"/>
+                    </a:lnR>
+                    <a:lnT w="6350" cap="flat" cmpd="sng" algn="ctr">
+                      <a:solidFill>
+                        <a:srgbClr val="9CA3AF"/>
+                      </a:solidFill>
+                      <a:prstDash val="solid"/>
+                      <a:round/>
+                      <a:headEnd type="none" w="med" len="med"/>
+                      <a:tailEnd type="none" w="med" len="med"/>
+                    </a:lnT>
+                    <a:lnB w="6350" cap="flat" cmpd="sng" algn="ctr">
+                      <a:solidFill>
+                        <a:srgbClr val="9CA3AF"/>
+                      </a:solidFill>
+                      <a:prstDash val="solid"/>
+                      <a:round/>
+                      <a:headEnd type="none" w="med" len="med"/>
+                      <a:tailEnd type="none" w="med" len="med"/>
+                    </a:lnB>
+                  </a:tcPr>
+                </a:tc>
+                <a:tc>
+                  <a:txBody>
+                    <a:bodyPr/>
+                    <a:lstStyle/>
+                    <a:p>
+                      <a:pPr algn="ctr" indent="0" marL="0">
+                        <a:buNone/>
+                      </a:pPr>
+                      <a:r>
+                        <a:rPr lang="en-US" sz="1000" b="1" dirty="0">
+                          <a:solidFill>
+                            <a:srgbClr val="1F3864"/>
+                          </a:solidFill>
+                          <a:latin typeface="Malgun Gothic" pitchFamily="34" charset="0"/>
+                          <a:ea typeface="Malgun Gothic" pitchFamily="34" charset="-122"/>
+                          <a:cs typeface="Malgun Gothic" pitchFamily="34" charset="-120"/>
+                        </a:rPr>
+                        <a:t>항해 호깅 67.4 / 새깅 78.5%</a:t>
+                      </a:r>
+                      <a:endParaRPr lang="en-US" sz="1000" dirty="0">
+                        <a:latin typeface="Malgun Gothic" charset="0"/>
+                        <a:ea typeface="Malgun Gothic" charset="0"/>
+                        <a:cs typeface="Malgun Gothic" charset="0"/>
+                      </a:endParaRPr>
+                    </a:p>
+                  </a:txBody>
+                  <a:tcPr marL="91440" marR="91440" marT="45720" marB="45720" anchor="ctr">
+                    <a:lnL w="6350" cap="flat" cmpd="sng" algn="ctr">
+                      <a:solidFill>
+                        <a:srgbClr val="9CA3AF"/>
+                      </a:solidFill>
+                      <a:prstDash val="solid"/>
+                      <a:round/>
+                      <a:headEnd type="none" w="med" len="med"/>
+                      <a:tailEnd type="none" w="med" len="med"/>
+                    </a:lnL>
+                    <a:lnR w="6350" cap="flat" cmpd="sng" algn="ctr">
+                      <a:solidFill>
+                        <a:srgbClr val="9CA3AF"/>
+                      </a:solidFill>
+                      <a:prstDash val="solid"/>
+                      <a:round/>
+                      <a:headEnd type="none" w="med" len="med"/>
+                      <a:tailEnd type="none" w="med" len="med"/>
+                    </a:lnR>
+                    <a:lnT w="6350" cap="flat" cmpd="sng" algn="ctr">
+                      <a:solidFill>
+                        <a:srgbClr val="9CA3AF"/>
+                      </a:solidFill>
+                      <a:prstDash val="solid"/>
+                      <a:round/>
+                      <a:headEnd type="none" w="med" len="med"/>
+                      <a:tailEnd type="none" w="med" len="med"/>
+                    </a:lnT>
+                    <a:lnB w="6350" cap="flat" cmpd="sng" algn="ctr">
+                      <a:solidFill>
+                        <a:srgbClr val="9CA3AF"/>
+                      </a:solidFill>
+                      <a:prstDash val="solid"/>
+                      <a:round/>
+                      <a:headEnd type="none" w="med" len="med"/>
+                      <a:tailEnd type="none" w="med" len="med"/>
+                    </a:lnB>
+                  </a:tcPr>
+                </a:tc>
+                <a:tc>
+                  <a:txBody>
+                    <a:bodyPr/>
+                    <a:lstStyle/>
+                    <a:p>
+                      <a:pPr algn="ctr" indent="0" marL="0">
+                        <a:buNone/>
+                      </a:pPr>
+                      <a:r>
+                        <a:rPr lang="en-US" sz="1000" dirty="0">
+                          <a:solidFill>
+                            <a:srgbClr val="262626"/>
+                          </a:solidFill>
+                          <a:latin typeface="Malgun Gothic" pitchFamily="34" charset="0"/>
+                          <a:ea typeface="Malgun Gothic" pitchFamily="34" charset="-122"/>
+                          <a:cs typeface="Malgun Gothic" pitchFamily="34" charset="-120"/>
+                        </a:rPr>
+                        <a:t>OK</a:t>
+                      </a:r>
+                      <a:endParaRPr lang="en-US" sz="1000" dirty="0">
+                        <a:latin typeface="Malgun Gothic" charset="0"/>
+                        <a:ea typeface="Malgun Gothic" charset="0"/>
+                        <a:cs typeface="Malgun Gothic" charset="0"/>
+                      </a:endParaRPr>
+                    </a:p>
+                  </a:txBody>
+                  <a:tcPr marL="91440" marR="91440" marT="45720" marB="45720" anchor="ctr">
+                    <a:lnL w="6350" cap="flat" cmpd="sng" algn="ctr">
+                      <a:solidFill>
+                        <a:srgbClr val="9CA3AF"/>
+                      </a:solidFill>
+                      <a:prstDash val="solid"/>
+                      <a:round/>
+                      <a:headEnd type="none" w="med" len="med"/>
+                      <a:tailEnd type="none" w="med" len="med"/>
+                    </a:lnL>
+                    <a:lnR w="6350" cap="flat" cmpd="sng" algn="ctr">
+                      <a:solidFill>
+                        <a:srgbClr val="9CA3AF"/>
+                      </a:solidFill>
+                      <a:prstDash val="solid"/>
+                      <a:round/>
+                      <a:headEnd type="none" w="med" len="med"/>
+                      <a:tailEnd type="none" w="med" len="med"/>
+                    </a:lnR>
+                    <a:lnT w="6350" cap="flat" cmpd="sng" algn="ctr">
+                      <a:solidFill>
+                        <a:srgbClr val="9CA3AF"/>
+                      </a:solidFill>
+                      <a:prstDash val="solid"/>
+                      <a:round/>
+                      <a:headEnd type="none" w="med" len="med"/>
+                      <a:tailEnd type="none" w="med" len="med"/>
+                    </a:lnT>
+                    <a:lnB w="6350" cap="flat" cmpd="sng" algn="ctr">
+                      <a:solidFill>
+                        <a:srgbClr val="9CA3AF"/>
+                      </a:solidFill>
+                      <a:prstDash val="solid"/>
+                      <a:round/>
+                      <a:headEnd type="none" w="med" len="med"/>
+                      <a:tailEnd type="none" w="med" len="med"/>
+                    </a:lnB>
+                  </a:tcPr>
+                </a:tc>
+              </a:tr>
+              <a:tr h="384048">
+                <a:tc>
+                  <a:txBody>
+                    <a:bodyPr/>
+                    <a:lstStyle/>
+                    <a:p>
+                      <a:pPr algn="ctr" indent="0" marL="0">
+                        <a:buNone/>
+                      </a:pPr>
+                      <a:r>
+                        <a:rPr lang="en-US" sz="1000" dirty="0">
+                          <a:solidFill>
+                            <a:srgbClr val="262626"/>
+                          </a:solidFill>
+                          <a:latin typeface="Malgun Gothic" pitchFamily="34" charset="0"/>
+                          <a:ea typeface="Malgun Gothic" pitchFamily="34" charset="-122"/>
+                          <a:cs typeface="Malgun Gothic" pitchFamily="34" charset="-120"/>
+                        </a:rPr>
+                        <a:t>손상 후 잔존강도 (충돌·좌초)</a:t>
+                      </a:r>
+                      <a:endParaRPr lang="en-US" sz="1000" dirty="0">
+                        <a:latin typeface="Malgun Gothic" charset="0"/>
+                        <a:ea typeface="Malgun Gothic" charset="0"/>
+                        <a:cs typeface="Malgun Gothic" charset="0"/>
+                      </a:endParaRPr>
+                    </a:p>
+                  </a:txBody>
+                  <a:tcPr marL="91440" marR="91440" marT="45720" marB="45720" anchor="ctr">
+                    <a:lnL w="6350" cap="flat" cmpd="sng" algn="ctr">
+                      <a:solidFill>
+                        <a:srgbClr val="9CA3AF"/>
+                      </a:solidFill>
+                      <a:prstDash val="solid"/>
+                      <a:round/>
+                      <a:headEnd type="none" w="med" len="med"/>
+                      <a:tailEnd type="none" w="med" len="med"/>
+                    </a:lnL>
+                    <a:lnR w="6350" cap="flat" cmpd="sng" algn="ctr">
+                      <a:solidFill>
+                        <a:srgbClr val="9CA3AF"/>
+                      </a:solidFill>
+                      <a:prstDash val="solid"/>
+                      <a:round/>
+                      <a:headEnd type="none" w="med" len="med"/>
+                      <a:tailEnd type="none" w="med" len="med"/>
+                    </a:lnR>
+                    <a:lnT w="6350" cap="flat" cmpd="sng" algn="ctr">
+                      <a:solidFill>
+                        <a:srgbClr val="9CA3AF"/>
+                      </a:solidFill>
+                      <a:prstDash val="solid"/>
+                      <a:round/>
+                      <a:headEnd type="none" w="med" len="med"/>
+                      <a:tailEnd type="none" w="med" len="med"/>
+                    </a:lnT>
+                    <a:lnB w="6350" cap="flat" cmpd="sng" algn="ctr">
+                      <a:solidFill>
+                        <a:srgbClr val="9CA3AF"/>
+                      </a:solidFill>
+                      <a:prstDash val="solid"/>
+                      <a:round/>
+                      <a:headEnd type="none" w="med" len="med"/>
+                      <a:tailEnd type="none" w="med" len="med"/>
+                    </a:lnB>
+                  </a:tcPr>
+                </a:tc>
+                <a:tc>
+                  <a:txBody>
+                    <a:bodyPr/>
+                    <a:lstStyle/>
+                    <a:p>
+                      <a:pPr algn="ctr" indent="0" marL="0">
+                        <a:buNone/>
+                      </a:pPr>
+                      <a:r>
+                        <a:rPr lang="en-US" sz="1000" dirty="0">
+                          <a:solidFill>
+                            <a:srgbClr val="262626"/>
+                          </a:solidFill>
+                          <a:latin typeface="Malgun Gothic" pitchFamily="34" charset="0"/>
+                          <a:ea typeface="Malgun Gothic" pitchFamily="34" charset="-122"/>
+                          <a:cs typeface="Malgun Gothic" pitchFamily="34" charset="-120"/>
+                        </a:rPr>
+                        <a:t>이용률 최대 57.6%</a:t>
+                      </a:r>
+                      <a:endParaRPr lang="en-US" sz="1000" dirty="0">
+                        <a:latin typeface="Malgun Gothic" charset="0"/>
+                        <a:ea typeface="Malgun Gothic" charset="0"/>
+                        <a:cs typeface="Malgun Gothic" charset="0"/>
+                      </a:endParaRPr>
+                    </a:p>
+                  </a:txBody>
+                  <a:tcPr marL="91440" marR="91440" marT="45720" marB="45720" anchor="ctr">
+                    <a:lnL w="6350" cap="flat" cmpd="sng" algn="ctr">
+                      <a:solidFill>
+                        <a:srgbClr val="9CA3AF"/>
+                      </a:solidFill>
+                      <a:prstDash val="solid"/>
+                      <a:round/>
+                      <a:headEnd type="none" w="med" len="med"/>
+                      <a:tailEnd type="none" w="med" len="med"/>
+                    </a:lnL>
+                    <a:lnR w="6350" cap="flat" cmpd="sng" algn="ctr">
+                      <a:solidFill>
+                        <a:srgbClr val="9CA3AF"/>
+                      </a:solidFill>
+                      <a:prstDash val="solid"/>
+                      <a:round/>
+                      <a:headEnd type="none" w="med" len="med"/>
+                      <a:tailEnd type="none" w="med" len="med"/>
+                    </a:lnR>
+                    <a:lnT w="6350" cap="flat" cmpd="sng" algn="ctr">
+                      <a:solidFill>
+                        <a:srgbClr val="9CA3AF"/>
+                      </a:solidFill>
+                      <a:prstDash val="solid"/>
+                      <a:round/>
+                      <a:headEnd type="none" w="med" len="med"/>
+                      <a:tailEnd type="none" w="med" len="med"/>
+                    </a:lnT>
+                    <a:lnB w="6350" cap="flat" cmpd="sng" algn="ctr">
+                      <a:solidFill>
+                        <a:srgbClr val="9CA3AF"/>
+                      </a:solidFill>
+                      <a:prstDash val="solid"/>
+                      <a:round/>
+                      <a:headEnd type="none" w="med" len="med"/>
+                      <a:tailEnd type="none" w="med" len="med"/>
+                    </a:lnB>
+                  </a:tcPr>
+                </a:tc>
+                <a:tc>
+                  <a:txBody>
+                    <a:bodyPr/>
+                    <a:lstStyle/>
+                    <a:p>
+                      <a:pPr algn="ctr" indent="0" marL="0">
+                        <a:buNone/>
+                      </a:pPr>
+                      <a:r>
+                        <a:rPr lang="en-US" sz="1000" dirty="0">
+                          <a:solidFill>
+                            <a:srgbClr val="262626"/>
+                          </a:solidFill>
+                          <a:latin typeface="Malgun Gothic" pitchFamily="34" charset="0"/>
+                          <a:ea typeface="Malgun Gothic" pitchFamily="34" charset="-122"/>
+                          <a:cs typeface="Malgun Gothic" pitchFamily="34" charset="-120"/>
+                        </a:rPr>
+                        <a:t>OK</a:t>
+                      </a:r>
+                      <a:endParaRPr lang="en-US" sz="1000" dirty="0">
+                        <a:latin typeface="Malgun Gothic" charset="0"/>
+                        <a:ea typeface="Malgun Gothic" charset="0"/>
+                        <a:cs typeface="Malgun Gothic" charset="0"/>
+                      </a:endParaRPr>
+                    </a:p>
+                  </a:txBody>
+                  <a:tcPr marL="91440" marR="91440" marT="45720" marB="45720" anchor="ctr">
+                    <a:lnL w="6350" cap="flat" cmpd="sng" algn="ctr">
+                      <a:solidFill>
+                        <a:srgbClr val="9CA3AF"/>
+                      </a:solidFill>
+                      <a:prstDash val="solid"/>
+                      <a:round/>
+                      <a:headEnd type="none" w="med" len="med"/>
+                      <a:tailEnd type="none" w="med" len="med"/>
+                    </a:lnL>
+                    <a:lnR w="6350" cap="flat" cmpd="sng" algn="ctr">
+                      <a:solidFill>
+                        <a:srgbClr val="9CA3AF"/>
+                      </a:solidFill>
+                      <a:prstDash val="solid"/>
+                      <a:round/>
+                      <a:headEnd type="none" w="med" len="med"/>
+                      <a:tailEnd type="none" w="med" len="med"/>
+                    </a:lnR>
+                    <a:lnT w="6350" cap="flat" cmpd="sng" algn="ctr">
+                      <a:solidFill>
+                        <a:srgbClr val="9CA3AF"/>
+                      </a:solidFill>
+                      <a:prstDash val="solid"/>
+                      <a:round/>
+                      <a:headEnd type="none" w="med" len="med"/>
+                      <a:tailEnd type="none" w="med" len="med"/>
+                    </a:lnT>
+                    <a:lnB w="6350" cap="flat" cmpd="sng" algn="ctr">
+                      <a:solidFill>
+                        <a:srgbClr val="9CA3AF"/>
+                      </a:solidFill>
+                      <a:prstDash val="solid"/>
+                      <a:round/>
+                      <a:headEnd type="none" w="med" len="med"/>
+                      <a:tailEnd type="none" w="med" len="med"/>
+                    </a:lnB>
+                  </a:tcPr>
+                </a:tc>
+              </a:tr>
+              <a:tr h="384048">
+                <a:tc>
+                  <a:txBody>
+                    <a:bodyPr/>
+                    <a:lstStyle/>
+                    <a:p>
+                      <a:pPr algn="ctr" indent="0" marL="0">
+                        <a:buNone/>
+                      </a:pPr>
+                      <a:r>
+                        <a:rPr lang="en-US" sz="1000" dirty="0">
+                          <a:solidFill>
+                            <a:srgbClr val="262626"/>
+                          </a:solidFill>
+                          <a:latin typeface="Malgun Gothic" pitchFamily="34" charset="0"/>
+                          <a:ea typeface="Malgun Gothic" pitchFamily="34" charset="-122"/>
+                          <a:cs typeface="Malgun Gothic" pitchFamily="34" charset="-120"/>
+                        </a:rPr>
+                        <a:t>피로강도 (25년, S-N D곡선)</a:t>
+                      </a:r>
+                      <a:endParaRPr lang="en-US" sz="1000" dirty="0">
+                        <a:latin typeface="Malgun Gothic" charset="0"/>
+                        <a:ea typeface="Malgun Gothic" charset="0"/>
+                        <a:cs typeface="Malgun Gothic" charset="0"/>
+                      </a:endParaRPr>
+                    </a:p>
+                  </a:txBody>
+                  <a:tcPr marL="91440" marR="91440" marT="45720" marB="45720" anchor="ctr">
+                    <a:lnL w="6350" cap="flat" cmpd="sng" algn="ctr">
+                      <a:solidFill>
+                        <a:srgbClr val="9CA3AF"/>
+                      </a:solidFill>
+                      <a:prstDash val="solid"/>
+                      <a:round/>
+                      <a:headEnd type="none" w="med" len="med"/>
+                      <a:tailEnd type="none" w="med" len="med"/>
+                    </a:lnL>
+                    <a:lnR w="6350" cap="flat" cmpd="sng" algn="ctr">
+                      <a:solidFill>
+                        <a:srgbClr val="9CA3AF"/>
+                      </a:solidFill>
+                      <a:prstDash val="solid"/>
+                      <a:round/>
+                      <a:headEnd type="none" w="med" len="med"/>
+                      <a:tailEnd type="none" w="med" len="med"/>
+                    </a:lnR>
+                    <a:lnT w="6350" cap="flat" cmpd="sng" algn="ctr">
+                      <a:solidFill>
+                        <a:srgbClr val="9CA3AF"/>
+                      </a:solidFill>
+                      <a:prstDash val="solid"/>
+                      <a:round/>
+                      <a:headEnd type="none" w="med" len="med"/>
+                      <a:tailEnd type="none" w="med" len="med"/>
+                    </a:lnT>
+                    <a:lnB w="6350" cap="flat" cmpd="sng" algn="ctr">
+                      <a:solidFill>
+                        <a:srgbClr val="9CA3AF"/>
+                      </a:solidFill>
+                      <a:prstDash val="solid"/>
+                      <a:round/>
+                      <a:headEnd type="none" w="med" len="med"/>
+                      <a:tailEnd type="none" w="med" len="med"/>
+                    </a:lnB>
+                  </a:tcPr>
+                </a:tc>
+                <a:tc>
+                  <a:txBody>
+                    <a:bodyPr/>
+                    <a:lstStyle/>
+                    <a:p>
+                      <a:pPr algn="ctr" indent="0" marL="0">
+                        <a:buNone/>
+                      </a:pPr>
+                      <a:r>
+                        <a:rPr lang="en-US" sz="1000" dirty="0">
+                          <a:solidFill>
+                            <a:srgbClr val="262626"/>
+                          </a:solidFill>
+                          <a:latin typeface="Malgun Gothic" pitchFamily="34" charset="0"/>
+                          <a:ea typeface="Malgun Gothic" pitchFamily="34" charset="-122"/>
+                          <a:cs typeface="Malgun Gothic" pitchFamily="34" charset="-120"/>
+                        </a:rPr>
+                        <a:t>156개 부재 통과 · 최소 46.4년</a:t>
+                      </a:r>
+                      <a:endParaRPr lang="en-US" sz="1000" dirty="0">
+                        <a:latin typeface="Malgun Gothic" charset="0"/>
+                        <a:ea typeface="Malgun Gothic" charset="0"/>
+                        <a:cs typeface="Malgun Gothic" charset="0"/>
+                      </a:endParaRPr>
+                    </a:p>
+                  </a:txBody>
+                  <a:tcPr marL="91440" marR="91440" marT="45720" marB="45720" anchor="ctr">
+                    <a:lnL w="6350" cap="flat" cmpd="sng" algn="ctr">
+                      <a:solidFill>
+                        <a:srgbClr val="9CA3AF"/>
+                      </a:solidFill>
+                      <a:prstDash val="solid"/>
+                      <a:round/>
+                      <a:headEnd type="none" w="med" len="med"/>
+                      <a:tailEnd type="none" w="med" len="med"/>
+                    </a:lnL>
+                    <a:lnR w="6350" cap="flat" cmpd="sng" algn="ctr">
+                      <a:solidFill>
+                        <a:srgbClr val="9CA3AF"/>
+                      </a:solidFill>
+                      <a:prstDash val="solid"/>
+                      <a:round/>
+                      <a:headEnd type="none" w="med" len="med"/>
+                      <a:tailEnd type="none" w="med" len="med"/>
+                    </a:lnR>
+                    <a:lnT w="6350" cap="flat" cmpd="sng" algn="ctr">
+                      <a:solidFill>
+                        <a:srgbClr val="9CA3AF"/>
+                      </a:solidFill>
+                      <a:prstDash val="solid"/>
+                      <a:round/>
+                      <a:headEnd type="none" w="med" len="med"/>
+                      <a:tailEnd type="none" w="med" len="med"/>
+                    </a:lnT>
+                    <a:lnB w="6350" cap="flat" cmpd="sng" algn="ctr">
+                      <a:solidFill>
+                        <a:srgbClr val="9CA3AF"/>
+                      </a:solidFill>
+                      <a:prstDash val="solid"/>
+                      <a:round/>
+                      <a:headEnd type="none" w="med" len="med"/>
+                      <a:tailEnd type="none" w="med" len="med"/>
+                    </a:lnB>
+                  </a:tcPr>
+                </a:tc>
+                <a:tc>
+                  <a:txBody>
+                    <a:bodyPr/>
+                    <a:lstStyle/>
+                    <a:p>
+                      <a:pPr algn="ctr" indent="0" marL="0">
+                        <a:buNone/>
+                      </a:pPr>
+                      <a:r>
+                        <a:rPr lang="en-US" sz="1000" dirty="0">
+                          <a:solidFill>
+                            <a:srgbClr val="262626"/>
+                          </a:solidFill>
+                          <a:latin typeface="Malgun Gothic" pitchFamily="34" charset="0"/>
+                          <a:ea typeface="Malgun Gothic" pitchFamily="34" charset="-122"/>
+                          <a:cs typeface="Malgun Gothic" pitchFamily="34" charset="-120"/>
+                        </a:rPr>
+                        <a:t>OK</a:t>
+                      </a:r>
+                      <a:endParaRPr lang="en-US" sz="1000" dirty="0">
+                        <a:latin typeface="Malgun Gothic" charset="0"/>
+                        <a:ea typeface="Malgun Gothic" charset="0"/>
+                        <a:cs typeface="Malgun Gothic" charset="0"/>
+                      </a:endParaRPr>
+                    </a:p>
+                  </a:txBody>
+                  <a:tcPr marL="91440" marR="91440" marT="45720" marB="45720" anchor="ctr">
+                    <a:lnL w="6350" cap="flat" cmpd="sng" algn="ctr">
+                      <a:solidFill>
+                        <a:srgbClr val="9CA3AF"/>
+                      </a:solidFill>
+                      <a:prstDash val="solid"/>
+                      <a:round/>
+                      <a:headEnd type="none" w="med" len="med"/>
+                      <a:tailEnd type="none" w="med" len="med"/>
+                    </a:lnL>
+                    <a:lnR w="6350" cap="flat" cmpd="sng" algn="ctr">
+                      <a:solidFill>
+                        <a:srgbClr val="9CA3AF"/>
+                      </a:solidFill>
+                      <a:prstDash val="solid"/>
+                      <a:round/>
+                      <a:headEnd type="none" w="med" len="med"/>
+                      <a:tailEnd type="none" w="med" len="med"/>
+                    </a:lnR>
+                    <a:lnT w="6350" cap="flat" cmpd="sng" algn="ctr">
+                      <a:solidFill>
+                        <a:srgbClr val="9CA3AF"/>
+                      </a:solidFill>
+                      <a:prstDash val="solid"/>
+                      <a:round/>
+                      <a:headEnd type="none" w="med" len="med"/>
+                      <a:tailEnd type="none" w="med" len="med"/>
+                    </a:lnT>
+                    <a:lnB w="6350" cap="flat" cmpd="sng" algn="ctr">
+                      <a:solidFill>
+                        <a:srgbClr val="9CA3AF"/>
+                      </a:solidFill>
+                      <a:prstDash val="solid"/>
+                      <a:round/>
+                      <a:headEnd type="none" w="med" len="med"/>
+                      <a:tailEnd type="none" w="med" len="med"/>
+                    </a:lnB>
+                  </a:tcPr>
+                </a:tc>
+              </a:tr>
+              <a:tr h="384048">
+                <a:tc>
+                  <a:txBody>
+                    <a:bodyPr/>
+                    <a:lstStyle/>
+                    <a:p>
+                      <a:pPr algn="ctr" indent="0" marL="0">
+                        <a:buNone/>
+                      </a:pPr>
+                      <a:r>
+                        <a:rPr lang="en-US" sz="1000" dirty="0">
+                          <a:solidFill>
+                            <a:srgbClr val="262626"/>
+                          </a:solidFill>
+                          <a:latin typeface="Malgun Gothic" pitchFamily="34" charset="0"/>
+                          <a:ea typeface="Malgun Gothic" pitchFamily="34" charset="-122"/>
+                          <a:cs typeface="Malgun Gothic" pitchFamily="34" charset="-120"/>
+                        </a:rPr>
+                        <a:t>좌굴 (판·보강재·전체 패널)</a:t>
+                      </a:r>
+                      <a:endParaRPr lang="en-US" sz="1000" dirty="0">
+                        <a:latin typeface="Malgun Gothic" charset="0"/>
+                        <a:ea typeface="Malgun Gothic" charset="0"/>
+                        <a:cs typeface="Malgun Gothic" charset="0"/>
+                      </a:endParaRPr>
+                    </a:p>
+                  </a:txBody>
+                  <a:tcPr marL="91440" marR="91440" marT="45720" marB="45720" anchor="ctr">
+                    <a:lnL w="6350" cap="flat" cmpd="sng" algn="ctr">
+                      <a:solidFill>
+                        <a:srgbClr val="9CA3AF"/>
+                      </a:solidFill>
+                      <a:prstDash val="solid"/>
+                      <a:round/>
+                      <a:headEnd type="none" w="med" len="med"/>
+                      <a:tailEnd type="none" w="med" len="med"/>
+                    </a:lnL>
+                    <a:lnR w="6350" cap="flat" cmpd="sng" algn="ctr">
+                      <a:solidFill>
+                        <a:srgbClr val="9CA3AF"/>
+                      </a:solidFill>
+                      <a:prstDash val="solid"/>
+                      <a:round/>
+                      <a:headEnd type="none" w="med" len="med"/>
+                      <a:tailEnd type="none" w="med" len="med"/>
+                    </a:lnR>
+                    <a:lnT w="6350" cap="flat" cmpd="sng" algn="ctr">
+                      <a:solidFill>
+                        <a:srgbClr val="9CA3AF"/>
+                      </a:solidFill>
+                      <a:prstDash val="solid"/>
+                      <a:round/>
+                      <a:headEnd type="none" w="med" len="med"/>
+                      <a:tailEnd type="none" w="med" len="med"/>
+                    </a:lnT>
+                    <a:lnB w="6350" cap="flat" cmpd="sng" algn="ctr">
+                      <a:solidFill>
+                        <a:srgbClr val="9CA3AF"/>
+                      </a:solidFill>
+                      <a:prstDash val="solid"/>
+                      <a:round/>
+                      <a:headEnd type="none" w="med" len="med"/>
+                      <a:tailEnd type="none" w="med" len="med"/>
+                    </a:lnB>
+                  </a:tcPr>
+                </a:tc>
+                <a:tc>
+                  <a:txBody>
+                    <a:bodyPr/>
+                    <a:lstStyle/>
+                    <a:p>
+                      <a:pPr algn="ctr" indent="0" marL="0">
+                        <a:buNone/>
+                      </a:pPr>
+                      <a:r>
+                        <a:rPr lang="en-US" sz="1000" dirty="0">
+                          <a:solidFill>
+                            <a:srgbClr val="262626"/>
+                          </a:solidFill>
+                          <a:latin typeface="Malgun Gothic" pitchFamily="34" charset="0"/>
+                          <a:ea typeface="Malgun Gothic" pitchFamily="34" charset="-122"/>
+                          <a:cs typeface="Malgun Gothic" pitchFamily="34" charset="-120"/>
+                        </a:rPr>
+                        <a:t>최대 η 0.970 (C.L. 격벽 최상부)</a:t>
+                      </a:r>
+                      <a:endParaRPr lang="en-US" sz="1000" dirty="0">
+                        <a:latin typeface="Malgun Gothic" charset="0"/>
+                        <a:ea typeface="Malgun Gothic" charset="0"/>
+                        <a:cs typeface="Malgun Gothic" charset="0"/>
+                      </a:endParaRPr>
+                    </a:p>
+                  </a:txBody>
+                  <a:tcPr marL="91440" marR="91440" marT="45720" marB="45720" anchor="ctr">
+                    <a:lnL w="6350" cap="flat" cmpd="sng" algn="ctr">
+                      <a:solidFill>
+                        <a:srgbClr val="9CA3AF"/>
+                      </a:solidFill>
+                      <a:prstDash val="solid"/>
+                      <a:round/>
+                      <a:headEnd type="none" w="med" len="med"/>
+                      <a:tailEnd type="none" w="med" len="med"/>
+                    </a:lnL>
+                    <a:lnR w="6350" cap="flat" cmpd="sng" algn="ctr">
+                      <a:solidFill>
+                        <a:srgbClr val="9CA3AF"/>
+                      </a:solidFill>
+                      <a:prstDash val="solid"/>
+                      <a:round/>
+                      <a:headEnd type="none" w="med" len="med"/>
+                      <a:tailEnd type="none" w="med" len="med"/>
+                    </a:lnR>
+                    <a:lnT w="6350" cap="flat" cmpd="sng" algn="ctr">
+                      <a:solidFill>
+                        <a:srgbClr val="9CA3AF"/>
+                      </a:solidFill>
+                      <a:prstDash val="solid"/>
+                      <a:round/>
+                      <a:headEnd type="none" w="med" len="med"/>
+                      <a:tailEnd type="none" w="med" len="med"/>
+                    </a:lnT>
+                    <a:lnB w="6350" cap="flat" cmpd="sng" algn="ctr">
+                      <a:solidFill>
+                        <a:srgbClr val="9CA3AF"/>
+                      </a:solidFill>
+                      <a:prstDash val="solid"/>
+                      <a:round/>
+                      <a:headEnd type="none" w="med" len="med"/>
+                      <a:tailEnd type="none" w="med" len="med"/>
+                    </a:lnB>
+                  </a:tcPr>
+                </a:tc>
+                <a:tc>
+                  <a:txBody>
+                    <a:bodyPr/>
+                    <a:lstStyle/>
+                    <a:p>
+                      <a:pPr algn="ctr" indent="0" marL="0">
+                        <a:buNone/>
+                      </a:pPr>
+                      <a:r>
+                        <a:rPr lang="en-US" sz="1000" dirty="0">
+                          <a:solidFill>
+                            <a:srgbClr val="262626"/>
+                          </a:solidFill>
+                          <a:latin typeface="Malgun Gothic" pitchFamily="34" charset="0"/>
+                          <a:ea typeface="Malgun Gothic" pitchFamily="34" charset="-122"/>
+                          <a:cs typeface="Malgun Gothic" pitchFamily="34" charset="-120"/>
+                        </a:rPr>
+                        <a:t>OK</a:t>
+                      </a:r>
+                      <a:endParaRPr lang="en-US" sz="1000" dirty="0">
+                        <a:latin typeface="Malgun Gothic" charset="0"/>
+                        <a:ea typeface="Malgun Gothic" charset="0"/>
+                        <a:cs typeface="Malgun Gothic" charset="0"/>
+                      </a:endParaRPr>
+                    </a:p>
+                  </a:txBody>
+                  <a:tcPr marL="91440" marR="91440" marT="45720" marB="45720" anchor="ctr">
+                    <a:lnL w="6350" cap="flat" cmpd="sng" algn="ctr">
+                      <a:solidFill>
+                        <a:srgbClr val="9CA3AF"/>
+                      </a:solidFill>
+                      <a:prstDash val="solid"/>
+                      <a:round/>
+                      <a:headEnd type="none" w="med" len="med"/>
+                      <a:tailEnd type="none" w="med" len="med"/>
+                    </a:lnL>
+                    <a:lnR w="6350" cap="flat" cmpd="sng" algn="ctr">
+                      <a:solidFill>
+                        <a:srgbClr val="9CA3AF"/>
+                      </a:solidFill>
+                      <a:prstDash val="solid"/>
+                      <a:round/>
+                      <a:headEnd type="none" w="med" len="med"/>
+                      <a:tailEnd type="none" w="med" len="med"/>
+                    </a:lnR>
+                    <a:lnT w="6350" cap="flat" cmpd="sng" algn="ctr">
+                      <a:solidFill>
+                        <a:srgbClr val="9CA3AF"/>
+                      </a:solidFill>
+                      <a:prstDash val="solid"/>
+                      <a:round/>
+                      <a:headEnd type="none" w="med" len="med"/>
+                      <a:tailEnd type="none" w="med" len="med"/>
+                    </a:lnT>
+                    <a:lnB w="6350" cap="flat" cmpd="sng" algn="ctr">
+                      <a:solidFill>
+                        <a:srgbClr val="9CA3AF"/>
+                      </a:solidFill>
+                      <a:prstDash val="solid"/>
+                      <a:round/>
+                      <a:headEnd type="none" w="med" len="med"/>
+                      <a:tailEnd type="none" w="med" len="med"/>
+                    </a:lnB>
+                  </a:tcPr>
+                </a:tc>
+              </a:tr>
+            </a:tbl>
+          </a:graphicData>
+        </a:graphic>
+      </p:graphicFrame>
+      <p:sp>
+        <p:nvSpPr>
+          <p:cNvPr id="10" name="Text 4"/>
+          <p:cNvSpPr txBox="1"/>
+          <p:nvPr/>
+        </p:nvSpPr>
+        <p:spPr>
+          <a:xfrm>
+            <a:off x="6172200" y="3063240"/>
+            <a:ext cx="5532120" cy="2286000"/>
+          </a:xfrm>
+          <a:prstGeom prst="rect">
+            <a:avLst/>
+          </a:prstGeom>
+          <a:noFill/>
+          <a:ln/>
+        </p:spPr>
+        <p:txBody>
+          <a:bodyPr wrap="square" lIns="0" tIns="0" rIns="0" bIns="0" rtlCol="0" anchor="t"/>
+          <a:lstStyle/>
+          <a:p>
+            <a:pPr marL="165100" indent="-165100">
+              <a:spcAft>
+                <a:spcPts val="700"/>
+              </a:spcAft>
+              <a:buSzPct val="100000"/>
+              <a:buChar char="▪"/>
+            </a:pPr>
+            <a:r>
+              <a:rPr lang="en-US" sz="1050" dirty="0">
+                <a:solidFill>
+                  <a:srgbClr val="262626"/>
+                </a:solidFill>
+                <a:latin typeface="Malgun Gothic" pitchFamily="34" charset="0"/>
+                <a:ea typeface="Malgun Gothic" pitchFamily="34" charset="-122"/>
+                <a:cs typeface="Malgun Gothic" pitchFamily="34" charset="-120"/>
+              </a:rPr>
+              <a:t>적하지침서가 없어 정수중 굽힘모멘트는 CSR Ch 4 Sec 4 규칙 최소값을 채택 — 이 값이 하한임을 인정하고 초과 여유를 역산</a:t>
+            </a:r>
+            <a:endParaRPr lang="en-US" sz="1050" dirty="0"/>
+          </a:p>
+          <a:p>
+            <a:pPr marL="165100" indent="-165100">
+              <a:spcAft>
+                <a:spcPts val="700"/>
+              </a:spcAft>
+              <a:buSzPct val="100000"/>
+              <a:buChar char="▪"/>
+            </a:pPr>
+            <a:r>
+              <a:rPr lang="en-US" sz="1050" dirty="0">
+                <a:solidFill>
+                  <a:srgbClr val="262626"/>
+                </a:solidFill>
+                <a:latin typeface="Malgun Gothic" pitchFamily="34" charset="0"/>
+                <a:ea typeface="Malgun Gothic" pitchFamily="34" charset="-122"/>
+                <a:cs typeface="Malgun Gothic" pitchFamily="34" charset="-120"/>
+              </a:rPr>
+              <a:t>실제 Msw가 규칙 최소의 2.06배(호깅) · 3.54배(새깅), 전단은 1.90배까지 커져도 단면이 성립</a:t>
+            </a:r>
+            <a:endParaRPr lang="en-US" sz="1050" dirty="0"/>
+          </a:p>
+          <a:p>
+            <a:pPr marL="165100" indent="-165100">
+              <a:spcAft>
+                <a:spcPts val="700"/>
+              </a:spcAft>
+              <a:buSzPct val="100000"/>
+              <a:buChar char="▪"/>
+            </a:pPr>
+            <a:r>
+              <a:rPr lang="en-US" sz="1050" dirty="0">
+                <a:solidFill>
+                  <a:srgbClr val="262626"/>
+                </a:solidFill>
+                <a:latin typeface="Malgun Gothic" pitchFamily="34" charset="0"/>
+                <a:ea typeface="Malgun Gothic" pitchFamily="34" charset="-122"/>
+                <a:cs typeface="Malgun Gothic" pitchFamily="34" charset="-120"/>
+              </a:rPr>
+              <a:t>갑판과 C.L. 격벽 최상부는 압력이 아니라 좌굴이 두께를 지배 — 판재 17종 중 이 3장뿐</a:t>
+            </a:r>
+            <a:endParaRPr lang="en-US" sz="1050" dirty="0"/>
+          </a:p>
+          <a:p>
+            <a:pPr marL="165100" indent="-165100">
+              <a:spcAft>
+                <a:spcPts val="700"/>
+              </a:spcAft>
+              <a:buSzPct val="100000"/>
+              <a:buChar char="▪"/>
+            </a:pPr>
+            <a:r>
+              <a:rPr lang="en-US" sz="1050" dirty="0">
+                <a:solidFill>
+                  <a:srgbClr val="262626"/>
+                </a:solidFill>
+                <a:latin typeface="Malgun Gothic" pitchFamily="34" charset="0"/>
+                <a:ea typeface="Malgun Gothic" pitchFamily="34" charset="-122"/>
+                <a:cs typeface="Malgun Gothic" pitchFamily="34" charset="-120"/>
+              </a:rPr>
+              <a:t>Ch 7 3-화물창 FE(절점 41,935 · 요소 88,057 · 45 LC)는 예비 검토 — 치수는 전부 규정 계산으로 결정</a:t>
+            </a:r>
+            <a:endParaRPr lang="en-US" sz="1050" dirty="0"/>
+          </a:p>
+        </p:txBody>
+      </p:sp>
+      <p:sp>
+        <p:nvSpPr>
+          <p:cNvPr id="11" name="Text 5"/>
+          <p:cNvSpPr txBox="1"/>
+          <p:nvPr/>
+        </p:nvSpPr>
+        <p:spPr>
+          <a:xfrm>
+            <a:off x="457200" y="5870448"/>
+            <a:ext cx="11274552" cy="365760"/>
+          </a:xfrm>
+          <a:prstGeom prst="rect">
+            <a:avLst/>
+          </a:prstGeom>
+          <a:noFill/>
+          <a:ln/>
+        </p:spPr>
+        <p:txBody>
+          <a:bodyPr wrap="square" lIns="0" tIns="0" rIns="0" bIns="0" rtlCol="0" anchor="ctr"/>
+          <a:lstStyle/>
+          <a:p>
+            <a:pPr indent="0" marL="0">
+              <a:buNone/>
+            </a:pPr>
+            <a:r>
+              <a:rPr lang="en-US" sz="1300" b="1" dirty="0">
+                <a:solidFill>
+                  <a:srgbClr val="C00000"/>
+                </a:solidFill>
+                <a:latin typeface="Malgun Gothic" pitchFamily="34" charset="0"/>
+                <a:ea typeface="Malgun Gothic" pitchFamily="34" charset="-122"/>
+                <a:cs typeface="Malgun Gothic" pitchFamily="34" charset="-120"/>
+              </a:rPr>
+              <a:t>→  선급 프로그램 SeaTrust-HullScan(KR)과 교차검증 — 극한강도 판정 굽힘모멘트 차이 0.003%</a:t>
+            </a:r>
+            <a:endParaRPr lang="en-US" sz="1300" dirty="0"/>
+          </a:p>
+        </p:txBody>
+      </p:sp>
+      <p:sp>
+        <p:nvSpPr>
+          <p:cNvPr id="12" name="Text 6"/>
+          <p:cNvSpPr txBox="1"/>
+          <p:nvPr/>
+        </p:nvSpPr>
+        <p:spPr>
+          <a:xfrm>
+            <a:off x="457200" y="6455664"/>
+            <a:ext cx="5486400" cy="292608"/>
+          </a:xfrm>
+          <a:prstGeom prst="rect">
+            <a:avLst/>
+          </a:prstGeom>
+          <a:noFill/>
+          <a:ln/>
+        </p:spPr>
+        <p:txBody>
+          <a:bodyPr wrap="square" lIns="0" tIns="0" rIns="0" bIns="0" rtlCol="0" anchor="ctr"/>
+          <a:lstStyle/>
+          <a:p>
+            <a:pPr indent="0" marL="0">
+              <a:buNone/>
+            </a:pPr>
+            <a:r>
+              <a:rPr lang="en-US" sz="900" dirty="0">
+                <a:solidFill>
+                  <a:srgbClr val="1F3864"/>
+                </a:solidFill>
+                <a:latin typeface="Malgun Gothic" pitchFamily="34" charset="0"/>
+                <a:ea typeface="Malgun Gothic" pitchFamily="34" charset="-122"/>
+                <a:cs typeface="Malgun Gothic" pitchFamily="34" charset="-120"/>
+              </a:rPr>
+              <a:t>제 35 회 학생 선박설계 콘테스트 [지정과제]</a:t>
+            </a:r>
+            <a:endParaRPr lang="en-US" sz="900" dirty="0"/>
+          </a:p>
+        </p:txBody>
+      </p:sp>
+      <p:sp>
+        <p:nvSpPr>
+          <p:cNvPr id="13" name="Text 7"/>
+          <p:cNvSpPr txBox="1"/>
+          <p:nvPr/>
+        </p:nvSpPr>
+        <p:spPr>
+          <a:xfrm>
+            <a:off x="11384280" y="6455664"/>
+            <a:ext cx="457200" cy="292608"/>
+          </a:xfrm>
+          <a:prstGeom prst="rect">
+            <a:avLst/>
+          </a:prstGeom>
+          <a:noFill/>
+          <a:ln/>
+        </p:spPr>
+        <p:txBody>
+          <a:bodyPr wrap="square" lIns="0" tIns="0" rIns="0" bIns="0" rtlCol="0" anchor="ctr"/>
+          <a:lstStyle/>
+          <a:p>
+            <a:pPr algn="r" indent="0" marL="0">
+              <a:buNone/>
+            </a:pPr>
+            <a:r>
+              <a:rPr lang="en-US" sz="1000" dirty="0">
+                <a:solidFill>
+                  <a:srgbClr val="1F3864"/>
+                </a:solidFill>
+                <a:latin typeface="Malgun Gothic" pitchFamily="34" charset="0"/>
+                <a:ea typeface="Malgun Gothic" pitchFamily="34" charset="-122"/>
+                <a:cs typeface="Malgun Gothic" pitchFamily="34" charset="-120"/>
+              </a:rPr>
+              <a:t>14</a:t>
+            </a:r>
+            <a:endParaRPr lang="en-US" sz="1000" dirty="0"/>
+          </a:p>
+        </p:txBody>
+      </p:sp>
+    </p:spTree>
+  </p:cSld>
+  <p:clrMapOvr>
+    <a:masterClrMapping/>
+  </p:clrMapOvr>
+</p:sld>
+</file>
+
+<file path=ppt/slides/slide15.xml><?xml version="1.0" encoding="utf-8"?>
+<p:sld xmlns:a="http://schemas.openxmlformats.org/drawingml/2006/main" xmlns:r="http://schemas.openxmlformats.org/officeDocument/2006/relationships" xmlns:p="http://schemas.openxmlformats.org/presentationml/2006/main">
+  <p:cSld name="Slide 15">
     <p:spTree>
       <p:nvGrpSpPr>
         <p:cNvPr id="1" name=""/>
@@ -11344,7 +13315,7 @@
       </p:sp>
       <p:graphicFrame>
         <p:nvGraphicFramePr>
-          <p:cNvPr id="15" name="Table 0"/>
+          <p:cNvPr id="16" name="Table 0"/>
           <p:cNvGraphicFramePr>
             <a:graphicFrameLocks noGrp="1"/>
           </p:cNvGraphicFramePr>
@@ -12621,7 +14592,7 @@
                 <a:ea typeface="Malgun Gothic" pitchFamily="34" charset="-122"/>
                 <a:cs typeface="Malgun Gothic" pitchFamily="34" charset="-120"/>
               </a:rPr>
-              <a:t>14</a:t>
+              <a:t>15</a:t>
             </a:r>
             <a:endParaRPr lang="en-US" sz="1000" dirty="0"/>
           </a:p>
@@ -12635,9 +14606,9 @@
 </p:sld>
 </file>
 
-<file path=ppt/slides/slide15.xml><?xml version="1.0" encoding="utf-8"?>
+<file path=ppt/slides/slide16.xml><?xml version="1.0" encoding="utf-8"?>
 <p:sld xmlns:a="http://schemas.openxmlformats.org/drawingml/2006/main" xmlns:r="http://schemas.openxmlformats.org/officeDocument/2006/relationships" xmlns:p="http://schemas.openxmlformats.org/presentationml/2006/main">
-  <p:cSld name="Slide 15">
+  <p:cSld name="Slide 16">
     <p:spTree>
       <p:nvGrpSpPr>
         <p:cNvPr id="1" name=""/>
@@ -12722,7 +14693,7 @@
       </p:sp>
       <p:graphicFrame>
         <p:nvGraphicFramePr>
-          <p:cNvPr id="16" name="Table 0"/>
+          <p:cNvPr id="17" name="Table 0"/>
           <p:cNvGraphicFramePr>
             <a:graphicFrameLocks noGrp="1"/>
           </p:cNvGraphicFramePr>
@@ -13418,7 +15389,7 @@
       </p:graphicFrame>
       <p:graphicFrame>
         <p:nvGraphicFramePr>
-          <p:cNvPr id="31" name="Table 1"/>
+          <p:cNvPr id="33" name="Table 1"/>
           <p:cNvGraphicFramePr>
             <a:graphicFrameLocks noGrp="1"/>
           </p:cNvGraphicFramePr>
@@ -14212,7 +16183,7 @@
       </p:sp>
       <p:graphicFrame>
         <p:nvGraphicFramePr>
-          <p:cNvPr id="46" name="Table 2"/>
+          <p:cNvPr id="49" name="Table 2"/>
           <p:cNvGraphicFramePr>
             <a:graphicFrameLocks noGrp="1"/>
           </p:cNvGraphicFramePr>
@@ -15060,7 +17031,7 @@
                 <a:ea typeface="Malgun Gothic" pitchFamily="34" charset="-122"/>
                 <a:cs typeface="Malgun Gothic" pitchFamily="34" charset="-120"/>
               </a:rPr>
-              <a:t>15</a:t>
+              <a:t>16</a:t>
             </a:r>
             <a:endParaRPr lang="en-US" sz="1000" dirty="0"/>
           </a:p>
@@ -15074,9 +17045,9 @@
 </p:sld>
 </file>
 
-<file path=ppt/slides/slide16.xml><?xml version="1.0" encoding="utf-8"?>
+<file path=ppt/slides/slide17.xml><?xml version="1.0" encoding="utf-8"?>
 <p:sld xmlns:a="http://schemas.openxmlformats.org/drawingml/2006/main" xmlns:r="http://schemas.openxmlformats.org/officeDocument/2006/relationships" xmlns:p="http://schemas.openxmlformats.org/presentationml/2006/main">
-  <p:cSld name="Slide 16">
+  <p:cSld name="Slide 17">
     <p:spTree>
       <p:nvGrpSpPr>
         <p:cNvPr id="1" name=""/>

--- a/contest/presentation/2026_74K_발표자료_10분.pptx
+++ b/contest/presentation/2026_74K_발표자료_10분.pptx
@@ -1809,7 +1809,7 @@
           <a:p>
             <a:r>
               <a:rPr lang="en-US" dirty="0"/>
-              <a:t>경제성입니다. 건조비는 약 2,666만 달러, 연간 운항비는 1,607만 달러이며, 현재 TD9 시황 기준 투자회수기간은 약 0.81년입니다. 정리하면 본 설계선은 관련 국제 규정과 선급 요건을 모두 만족하면서, 메탄올 이중연료와 축발전기, 로터 세일로 EEDI Phase 3까지 만족시킨 74K급 원유운반선입니다.</a:t>
+              <a:t>경제성입니다. 건조비는 약 2,666만 달러입니다. 회수기간은 2026년 8월 시황 기준 0.81년이지만, 2025년 평균 운임과 시장 신조선가를 적용하면 약 8년으로 시황에 크게 좌우됩니다. 정리하면 본 설계선은 국제 규정과 선급 요건을 모두 만족하면서, 메탄올 이중연료와 축발전기, 로터 세일로 EEDI Phase 3까지 만족시킨 74K급 원유운반선입니다.</a:t>
             </a:r>
             <a:endParaRPr lang="en-US" dirty="0"/>
           </a:p>
@@ -1985,7 +1985,7 @@
           <a:p>
             <a:r>
               <a:rPr lang="en-US" dirty="0"/>
-              <a:t>발표는 개념 설계부터 선형, 추진, 구획, 복원성, 구조, 친환경 순으로 진행하겠습니다. 본 설계선의 핵심은 세 가지입니다. 첫째, 메탄올 이중연료입니다. LNG의 극저온 탱크 부담도, 저유황유의 세정장치도 없이 북미 배출규제해역 기준을 충족합니다. 둘째는 축발전기와 로터 세일을 통한 EEDI Phase 3 대응, 셋째는 단거리 TD9 항로 전략입니다.</a:t>
+              <a:t>발표는 개념 설계부터 친환경까지 일곱 섹션 순으로 진행하겠습니다. 본 설계선의 핵심은 세 가지입니다. 첫째, 메탄올 이중연료입니다. LNG의 극저온 탱크 부담도, 저유황유의 세정장치도 없이 북미 배출규제해역 기준을 충족합니다. 둘째는 축발전기와 로터 세일을 통한 EEDI Phase 3 대응, 셋째는 단거리 TD9 항로 전략입니다.</a:t>
             </a:r>
             <a:endParaRPr lang="en-US" dirty="0"/>
           </a:p>
@@ -15959,8 +15959,8 @@
         </p:nvSpPr>
         <p:spPr>
           <a:xfrm>
-            <a:off x="548640" y="4343400"/>
-            <a:ext cx="5212080" cy="822960"/>
+            <a:off x="548640" y="4315968"/>
+            <a:ext cx="5212080" cy="713232"/>
           </a:xfrm>
           <a:prstGeom prst="rect">
             <a:avLst/>
@@ -15988,7 +15988,7 @@
                 <a:ea typeface="Malgun Gothic" pitchFamily="34" charset="-122"/>
                 <a:cs typeface="Malgun Gothic" pitchFamily="34" charset="-120"/>
               </a:rPr>
-              <a:t>연간 355일 운항, 왕복 30.5 항차 (항해 4.81일 + 정박 1일)</a:t>
+              <a:t>연간 355일 운항, 왕복 30.5 항차 (항해 4.81일 + 정박 1일) · 운용비 USD 3.81 M/년</a:t>
             </a:r>
             <a:endParaRPr lang="en-US" sz="1050" dirty="0"/>
           </a:p>
@@ -16009,47 +16009,1114 @@
                 <a:ea typeface="Malgun Gothic" pitchFamily="34" charset="-122"/>
                 <a:cs typeface="Malgun Gothic" pitchFamily="34" charset="-120"/>
               </a:rPr>
-              <a:t>TD9 = WS373 기준 Round Voyage TCE ≈ USD 104,000/day</a:t>
+              <a:t>TD9 = WS373 (2026.8.21, Baltic) → Round Voyage TCE ≈ USD 104,000/day</a:t>
             </a:r>
             <a:endParaRPr lang="en-US" sz="1050" dirty="0"/>
           </a:p>
         </p:txBody>
       </p:sp>
+      <p:graphicFrame>
+        <p:nvGraphicFramePr>
+          <p:cNvPr id="49" name="Table 2"/>
+          <p:cNvGraphicFramePr>
+            <a:graphicFrameLocks noGrp="1"/>
+          </p:cNvGraphicFramePr>
+          <p:nvPr>
+            <p:extLst>
+              <p:ext uri="{D42A27DB-BD31-4B8C-83A1-F6EECF244321}">
+                <p14:modId xmlns:p14="http://schemas.microsoft.com/office/powerpoint/2010/main" val="1579011935"/>
+              </p:ext>
+            </p:extLst>
+          </p:nvPr>
+        </p:nvGraphicFramePr>
+        <p:xfrm>
+          <a:off x="502920" y="5029200"/>
+          <a:ext cx="5212080" cy="914400"/>
+        </p:xfrm>
+        <a:graphic>
+          <a:graphicData uri="http://schemas.openxmlformats.org/drawingml/2006/table">
+            <a:tbl>
+              <a:tblPr/>
+              <a:tblGrid>
+                <a:gridCol w="2560320"/>
+                <a:gridCol w="777240"/>
+                <a:gridCol w="960120"/>
+                <a:gridCol w="914400"/>
+              </a:tblGrid>
+              <a:tr h="265176">
+                <a:tc>
+                  <a:txBody>
+                    <a:bodyPr/>
+                    <a:lstStyle/>
+                    <a:p>
+                      <a:pPr algn="ctr" indent="0" marL="0">
+                        <a:buNone/>
+                      </a:pPr>
+                      <a:r>
+                        <a:rPr lang="en-US" sz="950" b="1" dirty="0">
+                          <a:solidFill>
+                            <a:srgbClr val="262626"/>
+                          </a:solidFill>
+                          <a:latin typeface="Malgun Gothic" pitchFamily="34" charset="0"/>
+                          <a:ea typeface="Malgun Gothic" pitchFamily="34" charset="-122"/>
+                          <a:cs typeface="Malgun Gothic" pitchFamily="34" charset="-120"/>
+                        </a:rPr>
+                        <a:t>단순 투자회수기간 — 시황 · 선가 민감도</a:t>
+                      </a:r>
+                      <a:endParaRPr lang="en-US" sz="950" dirty="0">
+                        <a:latin typeface="Malgun Gothic" charset="0"/>
+                        <a:ea typeface="Malgun Gothic" charset="0"/>
+                        <a:cs typeface="Malgun Gothic" charset="0"/>
+                      </a:endParaRPr>
+                    </a:p>
+                  </a:txBody>
+                  <a:tcPr marL="91440" marR="91440" marT="45720" marB="45720" anchor="ctr">
+                    <a:lnL w="6350" cap="flat" cmpd="sng" algn="ctr">
+                      <a:solidFill>
+                        <a:srgbClr val="9CA3AF"/>
+                      </a:solidFill>
+                      <a:prstDash val="solid"/>
+                      <a:round/>
+                      <a:headEnd type="none" w="med" len="med"/>
+                      <a:tailEnd type="none" w="med" len="med"/>
+                    </a:lnL>
+                    <a:lnR w="6350" cap="flat" cmpd="sng" algn="ctr">
+                      <a:solidFill>
+                        <a:srgbClr val="9CA3AF"/>
+                      </a:solidFill>
+                      <a:prstDash val="solid"/>
+                      <a:round/>
+                      <a:headEnd type="none" w="med" len="med"/>
+                      <a:tailEnd type="none" w="med" len="med"/>
+                    </a:lnR>
+                    <a:lnT w="6350" cap="flat" cmpd="sng" algn="ctr">
+                      <a:solidFill>
+                        <a:srgbClr val="9CA3AF"/>
+                      </a:solidFill>
+                      <a:prstDash val="solid"/>
+                      <a:round/>
+                      <a:headEnd type="none" w="med" len="med"/>
+                      <a:tailEnd type="none" w="med" len="med"/>
+                    </a:lnT>
+                    <a:lnB w="6350" cap="flat" cmpd="sng" algn="ctr">
+                      <a:solidFill>
+                        <a:srgbClr val="9CA3AF"/>
+                      </a:solidFill>
+                      <a:prstDash val="solid"/>
+                      <a:round/>
+                      <a:headEnd type="none" w="med" len="med"/>
+                      <a:tailEnd type="none" w="med" len="med"/>
+                    </a:lnB>
+                    <a:solidFill>
+                      <a:srgbClr val="D9D9D9"/>
+                    </a:solidFill>
+                  </a:tcPr>
+                </a:tc>
+                <a:tc>
+                  <a:txBody>
+                    <a:bodyPr/>
+                    <a:lstStyle/>
+                    <a:p>
+                      <a:pPr algn="ctr" indent="0" marL="0">
+                        <a:buNone/>
+                      </a:pPr>
+                      <a:r>
+                        <a:rPr lang="en-US" sz="950" b="1" dirty="0">
+                          <a:solidFill>
+                            <a:srgbClr val="262626"/>
+                          </a:solidFill>
+                          <a:latin typeface="Malgun Gothic" pitchFamily="34" charset="0"/>
+                          <a:ea typeface="Malgun Gothic" pitchFamily="34" charset="-122"/>
+                          <a:cs typeface="Malgun Gothic" pitchFamily="34" charset="-120"/>
+                        </a:rPr>
+                        <a:t>건조비</a:t>
+                      </a:r>
+                      <a:endParaRPr lang="en-US" sz="950" dirty="0">
+                        <a:latin typeface="Malgun Gothic" charset="0"/>
+                        <a:ea typeface="Malgun Gothic" charset="0"/>
+                        <a:cs typeface="Malgun Gothic" charset="0"/>
+                      </a:endParaRPr>
+                    </a:p>
+                  </a:txBody>
+                  <a:tcPr marL="91440" marR="91440" marT="45720" marB="45720" anchor="ctr">
+                    <a:lnL w="6350" cap="flat" cmpd="sng" algn="ctr">
+                      <a:solidFill>
+                        <a:srgbClr val="9CA3AF"/>
+                      </a:solidFill>
+                      <a:prstDash val="solid"/>
+                      <a:round/>
+                      <a:headEnd type="none" w="med" len="med"/>
+                      <a:tailEnd type="none" w="med" len="med"/>
+                    </a:lnL>
+                    <a:lnR w="6350" cap="flat" cmpd="sng" algn="ctr">
+                      <a:solidFill>
+                        <a:srgbClr val="9CA3AF"/>
+                      </a:solidFill>
+                      <a:prstDash val="solid"/>
+                      <a:round/>
+                      <a:headEnd type="none" w="med" len="med"/>
+                      <a:tailEnd type="none" w="med" len="med"/>
+                    </a:lnR>
+                    <a:lnT w="6350" cap="flat" cmpd="sng" algn="ctr">
+                      <a:solidFill>
+                        <a:srgbClr val="9CA3AF"/>
+                      </a:solidFill>
+                      <a:prstDash val="solid"/>
+                      <a:round/>
+                      <a:headEnd type="none" w="med" len="med"/>
+                      <a:tailEnd type="none" w="med" len="med"/>
+                    </a:lnT>
+                    <a:lnB w="6350" cap="flat" cmpd="sng" algn="ctr">
+                      <a:solidFill>
+                        <a:srgbClr val="9CA3AF"/>
+                      </a:solidFill>
+                      <a:prstDash val="solid"/>
+                      <a:round/>
+                      <a:headEnd type="none" w="med" len="med"/>
+                      <a:tailEnd type="none" w="med" len="med"/>
+                    </a:lnB>
+                    <a:solidFill>
+                      <a:srgbClr val="D9D9D9"/>
+                    </a:solidFill>
+                  </a:tcPr>
+                </a:tc>
+                <a:tc>
+                  <a:txBody>
+                    <a:bodyPr/>
+                    <a:lstStyle/>
+                    <a:p>
+                      <a:pPr algn="ctr" indent="0" marL="0">
+                        <a:buNone/>
+                      </a:pPr>
+                      <a:r>
+                        <a:rPr lang="en-US" sz="950" b="1" dirty="0">
+                          <a:solidFill>
+                            <a:srgbClr val="262626"/>
+                          </a:solidFill>
+                          <a:latin typeface="Malgun Gothic" pitchFamily="34" charset="0"/>
+                          <a:ea typeface="Malgun Gothic" pitchFamily="34" charset="-122"/>
+                          <a:cs typeface="Malgun Gothic" pitchFamily="34" charset="-120"/>
+                        </a:rPr>
+                        <a:t>TCE ($/day)</a:t>
+                      </a:r>
+                      <a:endParaRPr lang="en-US" sz="950" dirty="0">
+                        <a:latin typeface="Malgun Gothic" charset="0"/>
+                        <a:ea typeface="Malgun Gothic" charset="0"/>
+                        <a:cs typeface="Malgun Gothic" charset="0"/>
+                      </a:endParaRPr>
+                    </a:p>
+                  </a:txBody>
+                  <a:tcPr marL="91440" marR="91440" marT="45720" marB="45720" anchor="ctr">
+                    <a:lnL w="6350" cap="flat" cmpd="sng" algn="ctr">
+                      <a:solidFill>
+                        <a:srgbClr val="9CA3AF"/>
+                      </a:solidFill>
+                      <a:prstDash val="solid"/>
+                      <a:round/>
+                      <a:headEnd type="none" w="med" len="med"/>
+                      <a:tailEnd type="none" w="med" len="med"/>
+                    </a:lnL>
+                    <a:lnR w="6350" cap="flat" cmpd="sng" algn="ctr">
+                      <a:solidFill>
+                        <a:srgbClr val="9CA3AF"/>
+                      </a:solidFill>
+                      <a:prstDash val="solid"/>
+                      <a:round/>
+                      <a:headEnd type="none" w="med" len="med"/>
+                      <a:tailEnd type="none" w="med" len="med"/>
+                    </a:lnR>
+                    <a:lnT w="6350" cap="flat" cmpd="sng" algn="ctr">
+                      <a:solidFill>
+                        <a:srgbClr val="9CA3AF"/>
+                      </a:solidFill>
+                      <a:prstDash val="solid"/>
+                      <a:round/>
+                      <a:headEnd type="none" w="med" len="med"/>
+                      <a:tailEnd type="none" w="med" len="med"/>
+                    </a:lnT>
+                    <a:lnB w="6350" cap="flat" cmpd="sng" algn="ctr">
+                      <a:solidFill>
+                        <a:srgbClr val="9CA3AF"/>
+                      </a:solidFill>
+                      <a:prstDash val="solid"/>
+                      <a:round/>
+                      <a:headEnd type="none" w="med" len="med"/>
+                      <a:tailEnd type="none" w="med" len="med"/>
+                    </a:lnB>
+                    <a:solidFill>
+                      <a:srgbClr val="D9D9D9"/>
+                    </a:solidFill>
+                  </a:tcPr>
+                </a:tc>
+                <a:tc>
+                  <a:txBody>
+                    <a:bodyPr/>
+                    <a:lstStyle/>
+                    <a:p>
+                      <a:pPr algn="ctr" indent="0" marL="0">
+                        <a:buNone/>
+                      </a:pPr>
+                      <a:r>
+                        <a:rPr lang="en-US" sz="950" b="1" dirty="0">
+                          <a:solidFill>
+                            <a:srgbClr val="262626"/>
+                          </a:solidFill>
+                          <a:latin typeface="Malgun Gothic" pitchFamily="34" charset="0"/>
+                          <a:ea typeface="Malgun Gothic" pitchFamily="34" charset="-122"/>
+                          <a:cs typeface="Malgun Gothic" pitchFamily="34" charset="-120"/>
+                        </a:rPr>
+                        <a:t>회수기간</a:t>
+                      </a:r>
+                      <a:endParaRPr lang="en-US" sz="950" dirty="0">
+                        <a:latin typeface="Malgun Gothic" charset="0"/>
+                        <a:ea typeface="Malgun Gothic" charset="0"/>
+                        <a:cs typeface="Malgun Gothic" charset="0"/>
+                      </a:endParaRPr>
+                    </a:p>
+                  </a:txBody>
+                  <a:tcPr marL="91440" marR="91440" marT="45720" marB="45720" anchor="ctr">
+                    <a:lnL w="6350" cap="flat" cmpd="sng" algn="ctr">
+                      <a:solidFill>
+                        <a:srgbClr val="9CA3AF"/>
+                      </a:solidFill>
+                      <a:prstDash val="solid"/>
+                      <a:round/>
+                      <a:headEnd type="none" w="med" len="med"/>
+                      <a:tailEnd type="none" w="med" len="med"/>
+                    </a:lnL>
+                    <a:lnR w="6350" cap="flat" cmpd="sng" algn="ctr">
+                      <a:solidFill>
+                        <a:srgbClr val="9CA3AF"/>
+                      </a:solidFill>
+                      <a:prstDash val="solid"/>
+                      <a:round/>
+                      <a:headEnd type="none" w="med" len="med"/>
+                      <a:tailEnd type="none" w="med" len="med"/>
+                    </a:lnR>
+                    <a:lnT w="6350" cap="flat" cmpd="sng" algn="ctr">
+                      <a:solidFill>
+                        <a:srgbClr val="9CA3AF"/>
+                      </a:solidFill>
+                      <a:prstDash val="solid"/>
+                      <a:round/>
+                      <a:headEnd type="none" w="med" len="med"/>
+                      <a:tailEnd type="none" w="med" len="med"/>
+                    </a:lnT>
+                    <a:lnB w="6350" cap="flat" cmpd="sng" algn="ctr">
+                      <a:solidFill>
+                        <a:srgbClr val="9CA3AF"/>
+                      </a:solidFill>
+                      <a:prstDash val="solid"/>
+                      <a:round/>
+                      <a:headEnd type="none" w="med" len="med"/>
+                      <a:tailEnd type="none" w="med" len="med"/>
+                    </a:lnB>
+                    <a:solidFill>
+                      <a:srgbClr val="D9D9D9"/>
+                    </a:solidFill>
+                  </a:tcPr>
+                </a:tc>
+              </a:tr>
+              <a:tr h="265176">
+                <a:tc>
+                  <a:txBody>
+                    <a:bodyPr/>
+                    <a:lstStyle/>
+                    <a:p>
+                      <a:pPr algn="ctr" indent="0" marL="0">
+                        <a:buNone/>
+                      </a:pPr>
+                      <a:r>
+                        <a:rPr lang="en-US" sz="950" dirty="0">
+                          <a:solidFill>
+                            <a:srgbClr val="262626"/>
+                          </a:solidFill>
+                          <a:latin typeface="Malgun Gothic" pitchFamily="34" charset="0"/>
+                          <a:ea typeface="Malgun Gothic" pitchFamily="34" charset="-122"/>
+                          <a:cs typeface="Malgun Gothic" pitchFamily="34" charset="-120"/>
+                        </a:rPr>
+                        <a:t>보고서 기준 (2026.8 TD9 WS373)</a:t>
+                      </a:r>
+                      <a:endParaRPr lang="en-US" sz="950" dirty="0">
+                        <a:latin typeface="Malgun Gothic" charset="0"/>
+                        <a:ea typeface="Malgun Gothic" charset="0"/>
+                        <a:cs typeface="Malgun Gothic" charset="0"/>
+                      </a:endParaRPr>
+                    </a:p>
+                  </a:txBody>
+                  <a:tcPr marL="91440" marR="91440" marT="45720" marB="45720" anchor="ctr">
+                    <a:lnL w="6350" cap="flat" cmpd="sng" algn="ctr">
+                      <a:solidFill>
+                        <a:srgbClr val="9CA3AF"/>
+                      </a:solidFill>
+                      <a:prstDash val="solid"/>
+                      <a:round/>
+                      <a:headEnd type="none" w="med" len="med"/>
+                      <a:tailEnd type="none" w="med" len="med"/>
+                    </a:lnL>
+                    <a:lnR w="6350" cap="flat" cmpd="sng" algn="ctr">
+                      <a:solidFill>
+                        <a:srgbClr val="9CA3AF"/>
+                      </a:solidFill>
+                      <a:prstDash val="solid"/>
+                      <a:round/>
+                      <a:headEnd type="none" w="med" len="med"/>
+                      <a:tailEnd type="none" w="med" len="med"/>
+                    </a:lnR>
+                    <a:lnT w="6350" cap="flat" cmpd="sng" algn="ctr">
+                      <a:solidFill>
+                        <a:srgbClr val="9CA3AF"/>
+                      </a:solidFill>
+                      <a:prstDash val="solid"/>
+                      <a:round/>
+                      <a:headEnd type="none" w="med" len="med"/>
+                      <a:tailEnd type="none" w="med" len="med"/>
+                    </a:lnT>
+                    <a:lnB w="6350" cap="flat" cmpd="sng" algn="ctr">
+                      <a:solidFill>
+                        <a:srgbClr val="9CA3AF"/>
+                      </a:solidFill>
+                      <a:prstDash val="solid"/>
+                      <a:round/>
+                      <a:headEnd type="none" w="med" len="med"/>
+                      <a:tailEnd type="none" w="med" len="med"/>
+                    </a:lnB>
+                  </a:tcPr>
+                </a:tc>
+                <a:tc>
+                  <a:txBody>
+                    <a:bodyPr/>
+                    <a:lstStyle/>
+                    <a:p>
+                      <a:pPr algn="ctr" indent="0" marL="0">
+                        <a:buNone/>
+                      </a:pPr>
+                      <a:r>
+                        <a:rPr lang="en-US" sz="950" dirty="0">
+                          <a:solidFill>
+                            <a:srgbClr val="262626"/>
+                          </a:solidFill>
+                          <a:latin typeface="Malgun Gothic" pitchFamily="34" charset="0"/>
+                          <a:ea typeface="Malgun Gothic" pitchFamily="34" charset="-122"/>
+                          <a:cs typeface="Malgun Gothic" pitchFamily="34" charset="-120"/>
+                        </a:rPr>
+                        <a:t>26.66 M</a:t>
+                      </a:r>
+                      <a:endParaRPr lang="en-US" sz="950" dirty="0">
+                        <a:latin typeface="Malgun Gothic" charset="0"/>
+                        <a:ea typeface="Malgun Gothic" charset="0"/>
+                        <a:cs typeface="Malgun Gothic" charset="0"/>
+                      </a:endParaRPr>
+                    </a:p>
+                  </a:txBody>
+                  <a:tcPr marL="91440" marR="91440" marT="45720" marB="45720" anchor="ctr">
+                    <a:lnL w="6350" cap="flat" cmpd="sng" algn="ctr">
+                      <a:solidFill>
+                        <a:srgbClr val="9CA3AF"/>
+                      </a:solidFill>
+                      <a:prstDash val="solid"/>
+                      <a:round/>
+                      <a:headEnd type="none" w="med" len="med"/>
+                      <a:tailEnd type="none" w="med" len="med"/>
+                    </a:lnL>
+                    <a:lnR w="6350" cap="flat" cmpd="sng" algn="ctr">
+                      <a:solidFill>
+                        <a:srgbClr val="9CA3AF"/>
+                      </a:solidFill>
+                      <a:prstDash val="solid"/>
+                      <a:round/>
+                      <a:headEnd type="none" w="med" len="med"/>
+                      <a:tailEnd type="none" w="med" len="med"/>
+                    </a:lnR>
+                    <a:lnT w="6350" cap="flat" cmpd="sng" algn="ctr">
+                      <a:solidFill>
+                        <a:srgbClr val="9CA3AF"/>
+                      </a:solidFill>
+                      <a:prstDash val="solid"/>
+                      <a:round/>
+                      <a:headEnd type="none" w="med" len="med"/>
+                      <a:tailEnd type="none" w="med" len="med"/>
+                    </a:lnT>
+                    <a:lnB w="6350" cap="flat" cmpd="sng" algn="ctr">
+                      <a:solidFill>
+                        <a:srgbClr val="9CA3AF"/>
+                      </a:solidFill>
+                      <a:prstDash val="solid"/>
+                      <a:round/>
+                      <a:headEnd type="none" w="med" len="med"/>
+                      <a:tailEnd type="none" w="med" len="med"/>
+                    </a:lnB>
+                  </a:tcPr>
+                </a:tc>
+                <a:tc>
+                  <a:txBody>
+                    <a:bodyPr/>
+                    <a:lstStyle/>
+                    <a:p>
+                      <a:pPr algn="ctr" indent="0" marL="0">
+                        <a:buNone/>
+                      </a:pPr>
+                      <a:r>
+                        <a:rPr lang="en-US" sz="950" dirty="0">
+                          <a:solidFill>
+                            <a:srgbClr val="262626"/>
+                          </a:solidFill>
+                          <a:latin typeface="Malgun Gothic" pitchFamily="34" charset="0"/>
+                          <a:ea typeface="Malgun Gothic" pitchFamily="34" charset="-122"/>
+                          <a:cs typeface="Malgun Gothic" pitchFamily="34" charset="-120"/>
+                        </a:rPr>
+                        <a:t>104,000</a:t>
+                      </a:r>
+                      <a:endParaRPr lang="en-US" sz="950" dirty="0">
+                        <a:latin typeface="Malgun Gothic" charset="0"/>
+                        <a:ea typeface="Malgun Gothic" charset="0"/>
+                        <a:cs typeface="Malgun Gothic" charset="0"/>
+                      </a:endParaRPr>
+                    </a:p>
+                  </a:txBody>
+                  <a:tcPr marL="91440" marR="91440" marT="45720" marB="45720" anchor="ctr">
+                    <a:lnL w="6350" cap="flat" cmpd="sng" algn="ctr">
+                      <a:solidFill>
+                        <a:srgbClr val="9CA3AF"/>
+                      </a:solidFill>
+                      <a:prstDash val="solid"/>
+                      <a:round/>
+                      <a:headEnd type="none" w="med" len="med"/>
+                      <a:tailEnd type="none" w="med" len="med"/>
+                    </a:lnL>
+                    <a:lnR w="6350" cap="flat" cmpd="sng" algn="ctr">
+                      <a:solidFill>
+                        <a:srgbClr val="9CA3AF"/>
+                      </a:solidFill>
+                      <a:prstDash val="solid"/>
+                      <a:round/>
+                      <a:headEnd type="none" w="med" len="med"/>
+                      <a:tailEnd type="none" w="med" len="med"/>
+                    </a:lnR>
+                    <a:lnT w="6350" cap="flat" cmpd="sng" algn="ctr">
+                      <a:solidFill>
+                        <a:srgbClr val="9CA3AF"/>
+                      </a:solidFill>
+                      <a:prstDash val="solid"/>
+                      <a:round/>
+                      <a:headEnd type="none" w="med" len="med"/>
+                      <a:tailEnd type="none" w="med" len="med"/>
+                    </a:lnT>
+                    <a:lnB w="6350" cap="flat" cmpd="sng" algn="ctr">
+                      <a:solidFill>
+                        <a:srgbClr val="9CA3AF"/>
+                      </a:solidFill>
+                      <a:prstDash val="solid"/>
+                      <a:round/>
+                      <a:headEnd type="none" w="med" len="med"/>
+                      <a:tailEnd type="none" w="med" len="med"/>
+                    </a:lnB>
+                  </a:tcPr>
+                </a:tc>
+                <a:tc>
+                  <a:txBody>
+                    <a:bodyPr/>
+                    <a:lstStyle/>
+                    <a:p>
+                      <a:pPr algn="ctr" indent="0" marL="0">
+                        <a:buNone/>
+                      </a:pPr>
+                      <a:r>
+                        <a:rPr lang="en-US" sz="950" b="1" dirty="0">
+                          <a:solidFill>
+                            <a:srgbClr val="C00000"/>
+                          </a:solidFill>
+                          <a:latin typeface="Malgun Gothic" pitchFamily="34" charset="0"/>
+                          <a:ea typeface="Malgun Gothic" pitchFamily="34" charset="-122"/>
+                          <a:cs typeface="Malgun Gothic" pitchFamily="34" charset="-120"/>
+                        </a:rPr>
+                        <a:t>0.81년</a:t>
+                      </a:r>
+                      <a:endParaRPr lang="en-US" sz="950" dirty="0">
+                        <a:latin typeface="Malgun Gothic" charset="0"/>
+                        <a:ea typeface="Malgun Gothic" charset="0"/>
+                        <a:cs typeface="Malgun Gothic" charset="0"/>
+                      </a:endParaRPr>
+                    </a:p>
+                  </a:txBody>
+                  <a:tcPr marL="91440" marR="91440" marT="45720" marB="45720" anchor="ctr">
+                    <a:lnL w="6350" cap="flat" cmpd="sng" algn="ctr">
+                      <a:solidFill>
+                        <a:srgbClr val="9CA3AF"/>
+                      </a:solidFill>
+                      <a:prstDash val="solid"/>
+                      <a:round/>
+                      <a:headEnd type="none" w="med" len="med"/>
+                      <a:tailEnd type="none" w="med" len="med"/>
+                    </a:lnL>
+                    <a:lnR w="6350" cap="flat" cmpd="sng" algn="ctr">
+                      <a:solidFill>
+                        <a:srgbClr val="9CA3AF"/>
+                      </a:solidFill>
+                      <a:prstDash val="solid"/>
+                      <a:round/>
+                      <a:headEnd type="none" w="med" len="med"/>
+                      <a:tailEnd type="none" w="med" len="med"/>
+                    </a:lnR>
+                    <a:lnT w="6350" cap="flat" cmpd="sng" algn="ctr">
+                      <a:solidFill>
+                        <a:srgbClr val="9CA3AF"/>
+                      </a:solidFill>
+                      <a:prstDash val="solid"/>
+                      <a:round/>
+                      <a:headEnd type="none" w="med" len="med"/>
+                      <a:tailEnd type="none" w="med" len="med"/>
+                    </a:lnT>
+                    <a:lnB w="6350" cap="flat" cmpd="sng" algn="ctr">
+                      <a:solidFill>
+                        <a:srgbClr val="9CA3AF"/>
+                      </a:solidFill>
+                      <a:prstDash val="solid"/>
+                      <a:round/>
+                      <a:headEnd type="none" w="med" len="med"/>
+                      <a:tailEnd type="none" w="med" len="med"/>
+                    </a:lnB>
+                  </a:tcPr>
+                </a:tc>
+              </a:tr>
+              <a:tr h="265176">
+                <a:tc>
+                  <a:txBody>
+                    <a:bodyPr/>
+                    <a:lstStyle/>
+                    <a:p>
+                      <a:pPr algn="ctr" indent="0" marL="0">
+                        <a:buNone/>
+                      </a:pPr>
+                      <a:r>
+                        <a:rPr lang="en-US" sz="950" dirty="0">
+                          <a:solidFill>
+                            <a:srgbClr val="262626"/>
+                          </a:solidFill>
+                          <a:latin typeface="Malgun Gothic" pitchFamily="34" charset="0"/>
+                          <a:ea typeface="Malgun Gothic" pitchFamily="34" charset="-122"/>
+                          <a:cs typeface="Malgun Gothic" pitchFamily="34" charset="-120"/>
+                        </a:rPr>
+                        <a:t>2025년 시황 수준 적용</a:t>
+                      </a:r>
+                      <a:endParaRPr lang="en-US" sz="950" dirty="0">
+                        <a:latin typeface="Malgun Gothic" charset="0"/>
+                        <a:ea typeface="Malgun Gothic" charset="0"/>
+                        <a:cs typeface="Malgun Gothic" charset="0"/>
+                      </a:endParaRPr>
+                    </a:p>
+                  </a:txBody>
+                  <a:tcPr marL="91440" marR="91440" marT="45720" marB="45720" anchor="ctr">
+                    <a:lnL w="6350" cap="flat" cmpd="sng" algn="ctr">
+                      <a:solidFill>
+                        <a:srgbClr val="9CA3AF"/>
+                      </a:solidFill>
+                      <a:prstDash val="solid"/>
+                      <a:round/>
+                      <a:headEnd type="none" w="med" len="med"/>
+                      <a:tailEnd type="none" w="med" len="med"/>
+                    </a:lnL>
+                    <a:lnR w="6350" cap="flat" cmpd="sng" algn="ctr">
+                      <a:solidFill>
+                        <a:srgbClr val="9CA3AF"/>
+                      </a:solidFill>
+                      <a:prstDash val="solid"/>
+                      <a:round/>
+                      <a:headEnd type="none" w="med" len="med"/>
+                      <a:tailEnd type="none" w="med" len="med"/>
+                    </a:lnR>
+                    <a:lnT w="6350" cap="flat" cmpd="sng" algn="ctr">
+                      <a:solidFill>
+                        <a:srgbClr val="9CA3AF"/>
+                      </a:solidFill>
+                      <a:prstDash val="solid"/>
+                      <a:round/>
+                      <a:headEnd type="none" w="med" len="med"/>
+                      <a:tailEnd type="none" w="med" len="med"/>
+                    </a:lnT>
+                    <a:lnB w="6350" cap="flat" cmpd="sng" algn="ctr">
+                      <a:solidFill>
+                        <a:srgbClr val="9CA3AF"/>
+                      </a:solidFill>
+                      <a:prstDash val="solid"/>
+                      <a:round/>
+                      <a:headEnd type="none" w="med" len="med"/>
+                      <a:tailEnd type="none" w="med" len="med"/>
+                    </a:lnB>
+                  </a:tcPr>
+                </a:tc>
+                <a:tc>
+                  <a:txBody>
+                    <a:bodyPr/>
+                    <a:lstStyle/>
+                    <a:p>
+                      <a:pPr algn="ctr" indent="0" marL="0">
+                        <a:buNone/>
+                      </a:pPr>
+                      <a:r>
+                        <a:rPr lang="en-US" sz="950" dirty="0">
+                          <a:solidFill>
+                            <a:srgbClr val="262626"/>
+                          </a:solidFill>
+                          <a:latin typeface="Malgun Gothic" pitchFamily="34" charset="0"/>
+                          <a:ea typeface="Malgun Gothic" pitchFamily="34" charset="-122"/>
+                          <a:cs typeface="Malgun Gothic" pitchFamily="34" charset="-120"/>
+                        </a:rPr>
+                        <a:t>26.66 M</a:t>
+                      </a:r>
+                      <a:endParaRPr lang="en-US" sz="950" dirty="0">
+                        <a:latin typeface="Malgun Gothic" charset="0"/>
+                        <a:ea typeface="Malgun Gothic" charset="0"/>
+                        <a:cs typeface="Malgun Gothic" charset="0"/>
+                      </a:endParaRPr>
+                    </a:p>
+                  </a:txBody>
+                  <a:tcPr marL="91440" marR="91440" marT="45720" marB="45720" anchor="ctr">
+                    <a:lnL w="6350" cap="flat" cmpd="sng" algn="ctr">
+                      <a:solidFill>
+                        <a:srgbClr val="9CA3AF"/>
+                      </a:solidFill>
+                      <a:prstDash val="solid"/>
+                      <a:round/>
+                      <a:headEnd type="none" w="med" len="med"/>
+                      <a:tailEnd type="none" w="med" len="med"/>
+                    </a:lnL>
+                    <a:lnR w="6350" cap="flat" cmpd="sng" algn="ctr">
+                      <a:solidFill>
+                        <a:srgbClr val="9CA3AF"/>
+                      </a:solidFill>
+                      <a:prstDash val="solid"/>
+                      <a:round/>
+                      <a:headEnd type="none" w="med" len="med"/>
+                      <a:tailEnd type="none" w="med" len="med"/>
+                    </a:lnR>
+                    <a:lnT w="6350" cap="flat" cmpd="sng" algn="ctr">
+                      <a:solidFill>
+                        <a:srgbClr val="9CA3AF"/>
+                      </a:solidFill>
+                      <a:prstDash val="solid"/>
+                      <a:round/>
+                      <a:headEnd type="none" w="med" len="med"/>
+                      <a:tailEnd type="none" w="med" len="med"/>
+                    </a:lnT>
+                    <a:lnB w="6350" cap="flat" cmpd="sng" algn="ctr">
+                      <a:solidFill>
+                        <a:srgbClr val="9CA3AF"/>
+                      </a:solidFill>
+                      <a:prstDash val="solid"/>
+                      <a:round/>
+                      <a:headEnd type="none" w="med" len="med"/>
+                      <a:tailEnd type="none" w="med" len="med"/>
+                    </a:lnB>
+                  </a:tcPr>
+                </a:tc>
+                <a:tc>
+                  <a:txBody>
+                    <a:bodyPr/>
+                    <a:lstStyle/>
+                    <a:p>
+                      <a:pPr algn="ctr" indent="0" marL="0">
+                        <a:buNone/>
+                      </a:pPr>
+                      <a:r>
+                        <a:rPr lang="en-US" sz="950" dirty="0">
+                          <a:solidFill>
+                            <a:srgbClr val="262626"/>
+                          </a:solidFill>
+                          <a:latin typeface="Malgun Gothic" pitchFamily="34" charset="0"/>
+                          <a:ea typeface="Malgun Gothic" pitchFamily="34" charset="-122"/>
+                          <a:cs typeface="Malgun Gothic" pitchFamily="34" charset="-120"/>
+                        </a:rPr>
+                        <a:t>≈ 35,000</a:t>
+                      </a:r>
+                      <a:endParaRPr lang="en-US" sz="950" dirty="0">
+                        <a:latin typeface="Malgun Gothic" charset="0"/>
+                        <a:ea typeface="Malgun Gothic" charset="0"/>
+                        <a:cs typeface="Malgun Gothic" charset="0"/>
+                      </a:endParaRPr>
+                    </a:p>
+                  </a:txBody>
+                  <a:tcPr marL="91440" marR="91440" marT="45720" marB="45720" anchor="ctr">
+                    <a:lnL w="6350" cap="flat" cmpd="sng" algn="ctr">
+                      <a:solidFill>
+                        <a:srgbClr val="9CA3AF"/>
+                      </a:solidFill>
+                      <a:prstDash val="solid"/>
+                      <a:round/>
+                      <a:headEnd type="none" w="med" len="med"/>
+                      <a:tailEnd type="none" w="med" len="med"/>
+                    </a:lnL>
+                    <a:lnR w="6350" cap="flat" cmpd="sng" algn="ctr">
+                      <a:solidFill>
+                        <a:srgbClr val="9CA3AF"/>
+                      </a:solidFill>
+                      <a:prstDash val="solid"/>
+                      <a:round/>
+                      <a:headEnd type="none" w="med" len="med"/>
+                      <a:tailEnd type="none" w="med" len="med"/>
+                    </a:lnR>
+                    <a:lnT w="6350" cap="flat" cmpd="sng" algn="ctr">
+                      <a:solidFill>
+                        <a:srgbClr val="9CA3AF"/>
+                      </a:solidFill>
+                      <a:prstDash val="solid"/>
+                      <a:round/>
+                      <a:headEnd type="none" w="med" len="med"/>
+                      <a:tailEnd type="none" w="med" len="med"/>
+                    </a:lnT>
+                    <a:lnB w="6350" cap="flat" cmpd="sng" algn="ctr">
+                      <a:solidFill>
+                        <a:srgbClr val="9CA3AF"/>
+                      </a:solidFill>
+                      <a:prstDash val="solid"/>
+                      <a:round/>
+                      <a:headEnd type="none" w="med" len="med"/>
+                      <a:tailEnd type="none" w="med" len="med"/>
+                    </a:lnB>
+                  </a:tcPr>
+                </a:tc>
+                <a:tc>
+                  <a:txBody>
+                    <a:bodyPr/>
+                    <a:lstStyle/>
+                    <a:p>
+                      <a:pPr algn="ctr" indent="0" marL="0">
+                        <a:buNone/>
+                      </a:pPr>
+                      <a:r>
+                        <a:rPr lang="en-US" sz="950" b="1" dirty="0">
+                          <a:solidFill>
+                            <a:srgbClr val="1F3864"/>
+                          </a:solidFill>
+                          <a:latin typeface="Malgun Gothic" pitchFamily="34" charset="0"/>
+                          <a:ea typeface="Malgun Gothic" pitchFamily="34" charset="-122"/>
+                          <a:cs typeface="Malgun Gothic" pitchFamily="34" charset="-120"/>
+                        </a:rPr>
+                        <a:t>3.1년</a:t>
+                      </a:r>
+                      <a:endParaRPr lang="en-US" sz="950" dirty="0">
+                        <a:latin typeface="Malgun Gothic" charset="0"/>
+                        <a:ea typeface="Malgun Gothic" charset="0"/>
+                        <a:cs typeface="Malgun Gothic" charset="0"/>
+                      </a:endParaRPr>
+                    </a:p>
+                  </a:txBody>
+                  <a:tcPr marL="91440" marR="91440" marT="45720" marB="45720" anchor="ctr">
+                    <a:lnL w="6350" cap="flat" cmpd="sng" algn="ctr">
+                      <a:solidFill>
+                        <a:srgbClr val="9CA3AF"/>
+                      </a:solidFill>
+                      <a:prstDash val="solid"/>
+                      <a:round/>
+                      <a:headEnd type="none" w="med" len="med"/>
+                      <a:tailEnd type="none" w="med" len="med"/>
+                    </a:lnL>
+                    <a:lnR w="6350" cap="flat" cmpd="sng" algn="ctr">
+                      <a:solidFill>
+                        <a:srgbClr val="9CA3AF"/>
+                      </a:solidFill>
+                      <a:prstDash val="solid"/>
+                      <a:round/>
+                      <a:headEnd type="none" w="med" len="med"/>
+                      <a:tailEnd type="none" w="med" len="med"/>
+                    </a:lnR>
+                    <a:lnT w="6350" cap="flat" cmpd="sng" algn="ctr">
+                      <a:solidFill>
+                        <a:srgbClr val="9CA3AF"/>
+                      </a:solidFill>
+                      <a:prstDash val="solid"/>
+                      <a:round/>
+                      <a:headEnd type="none" w="med" len="med"/>
+                      <a:tailEnd type="none" w="med" len="med"/>
+                    </a:lnT>
+                    <a:lnB w="6350" cap="flat" cmpd="sng" algn="ctr">
+                      <a:solidFill>
+                        <a:srgbClr val="9CA3AF"/>
+                      </a:solidFill>
+                      <a:prstDash val="solid"/>
+                      <a:round/>
+                      <a:headEnd type="none" w="med" len="med"/>
+                      <a:tailEnd type="none" w="med" len="med"/>
+                    </a:lnB>
+                  </a:tcPr>
+                </a:tc>
+              </a:tr>
+              <a:tr h="265176">
+                <a:tc>
+                  <a:txBody>
+                    <a:bodyPr/>
+                    <a:lstStyle/>
+                    <a:p>
+                      <a:pPr algn="ctr" indent="0" marL="0">
+                        <a:buNone/>
+                      </a:pPr>
+                      <a:r>
+                        <a:rPr lang="en-US" sz="950" dirty="0">
+                          <a:solidFill>
+                            <a:srgbClr val="262626"/>
+                          </a:solidFill>
+                          <a:latin typeface="Malgun Gothic" pitchFamily="34" charset="0"/>
+                          <a:ea typeface="Malgun Gothic" pitchFamily="34" charset="-122"/>
+                          <a:cs typeface="Malgun Gothic" pitchFamily="34" charset="-120"/>
+                        </a:rPr>
+                        <a:t>+ 시장 신조선가 적용 (LR1 + MeOH DF)</a:t>
+                      </a:r>
+                      <a:endParaRPr lang="en-US" sz="950" dirty="0">
+                        <a:latin typeface="Malgun Gothic" charset="0"/>
+                        <a:ea typeface="Malgun Gothic" charset="0"/>
+                        <a:cs typeface="Malgun Gothic" charset="0"/>
+                      </a:endParaRPr>
+                    </a:p>
+                  </a:txBody>
+                  <a:tcPr marL="91440" marR="91440" marT="45720" marB="45720" anchor="ctr">
+                    <a:lnL w="6350" cap="flat" cmpd="sng" algn="ctr">
+                      <a:solidFill>
+                        <a:srgbClr val="9CA3AF"/>
+                      </a:solidFill>
+                      <a:prstDash val="solid"/>
+                      <a:round/>
+                      <a:headEnd type="none" w="med" len="med"/>
+                      <a:tailEnd type="none" w="med" len="med"/>
+                    </a:lnL>
+                    <a:lnR w="6350" cap="flat" cmpd="sng" algn="ctr">
+                      <a:solidFill>
+                        <a:srgbClr val="9CA3AF"/>
+                      </a:solidFill>
+                      <a:prstDash val="solid"/>
+                      <a:round/>
+                      <a:headEnd type="none" w="med" len="med"/>
+                      <a:tailEnd type="none" w="med" len="med"/>
+                    </a:lnR>
+                    <a:lnT w="6350" cap="flat" cmpd="sng" algn="ctr">
+                      <a:solidFill>
+                        <a:srgbClr val="9CA3AF"/>
+                      </a:solidFill>
+                      <a:prstDash val="solid"/>
+                      <a:round/>
+                      <a:headEnd type="none" w="med" len="med"/>
+                      <a:tailEnd type="none" w="med" len="med"/>
+                    </a:lnT>
+                    <a:lnB w="6350" cap="flat" cmpd="sng" algn="ctr">
+                      <a:solidFill>
+                        <a:srgbClr val="9CA3AF"/>
+                      </a:solidFill>
+                      <a:prstDash val="solid"/>
+                      <a:round/>
+                      <a:headEnd type="none" w="med" len="med"/>
+                      <a:tailEnd type="none" w="med" len="med"/>
+                    </a:lnB>
+                  </a:tcPr>
+                </a:tc>
+                <a:tc>
+                  <a:txBody>
+                    <a:bodyPr/>
+                    <a:lstStyle/>
+                    <a:p>
+                      <a:pPr algn="ctr" indent="0" marL="0">
+                        <a:buNone/>
+                      </a:pPr>
+                      <a:r>
+                        <a:rPr lang="en-US" sz="950" dirty="0">
+                          <a:solidFill>
+                            <a:srgbClr val="262626"/>
+                          </a:solidFill>
+                          <a:latin typeface="Malgun Gothic" pitchFamily="34" charset="0"/>
+                          <a:ea typeface="Malgun Gothic" pitchFamily="34" charset="-122"/>
+                          <a:cs typeface="Malgun Gothic" pitchFamily="34" charset="-120"/>
+                        </a:rPr>
+                        <a:t>≈ 66 M</a:t>
+                      </a:r>
+                      <a:endParaRPr lang="en-US" sz="950" dirty="0">
+                        <a:latin typeface="Malgun Gothic" charset="0"/>
+                        <a:ea typeface="Malgun Gothic" charset="0"/>
+                        <a:cs typeface="Malgun Gothic" charset="0"/>
+                      </a:endParaRPr>
+                    </a:p>
+                  </a:txBody>
+                  <a:tcPr marL="91440" marR="91440" marT="45720" marB="45720" anchor="ctr">
+                    <a:lnL w="6350" cap="flat" cmpd="sng" algn="ctr">
+                      <a:solidFill>
+                        <a:srgbClr val="9CA3AF"/>
+                      </a:solidFill>
+                      <a:prstDash val="solid"/>
+                      <a:round/>
+                      <a:headEnd type="none" w="med" len="med"/>
+                      <a:tailEnd type="none" w="med" len="med"/>
+                    </a:lnL>
+                    <a:lnR w="6350" cap="flat" cmpd="sng" algn="ctr">
+                      <a:solidFill>
+                        <a:srgbClr val="9CA3AF"/>
+                      </a:solidFill>
+                      <a:prstDash val="solid"/>
+                      <a:round/>
+                      <a:headEnd type="none" w="med" len="med"/>
+                      <a:tailEnd type="none" w="med" len="med"/>
+                    </a:lnR>
+                    <a:lnT w="6350" cap="flat" cmpd="sng" algn="ctr">
+                      <a:solidFill>
+                        <a:srgbClr val="9CA3AF"/>
+                      </a:solidFill>
+                      <a:prstDash val="solid"/>
+                      <a:round/>
+                      <a:headEnd type="none" w="med" len="med"/>
+                      <a:tailEnd type="none" w="med" len="med"/>
+                    </a:lnT>
+                    <a:lnB w="6350" cap="flat" cmpd="sng" algn="ctr">
+                      <a:solidFill>
+                        <a:srgbClr val="9CA3AF"/>
+                      </a:solidFill>
+                      <a:prstDash val="solid"/>
+                      <a:round/>
+                      <a:headEnd type="none" w="med" len="med"/>
+                      <a:tailEnd type="none" w="med" len="med"/>
+                    </a:lnB>
+                  </a:tcPr>
+                </a:tc>
+                <a:tc>
+                  <a:txBody>
+                    <a:bodyPr/>
+                    <a:lstStyle/>
+                    <a:p>
+                      <a:pPr algn="ctr" indent="0" marL="0">
+                        <a:buNone/>
+                      </a:pPr>
+                      <a:r>
+                        <a:rPr lang="en-US" sz="950" dirty="0">
+                          <a:solidFill>
+                            <a:srgbClr val="262626"/>
+                          </a:solidFill>
+                          <a:latin typeface="Malgun Gothic" pitchFamily="34" charset="0"/>
+                          <a:ea typeface="Malgun Gothic" pitchFamily="34" charset="-122"/>
+                          <a:cs typeface="Malgun Gothic" pitchFamily="34" charset="-120"/>
+                        </a:rPr>
+                        <a:t>≈ 35,000</a:t>
+                      </a:r>
+                      <a:endParaRPr lang="en-US" sz="950" dirty="0">
+                        <a:latin typeface="Malgun Gothic" charset="0"/>
+                        <a:ea typeface="Malgun Gothic" charset="0"/>
+                        <a:cs typeface="Malgun Gothic" charset="0"/>
+                      </a:endParaRPr>
+                    </a:p>
+                  </a:txBody>
+                  <a:tcPr marL="91440" marR="91440" marT="45720" marB="45720" anchor="ctr">
+                    <a:lnL w="6350" cap="flat" cmpd="sng" algn="ctr">
+                      <a:solidFill>
+                        <a:srgbClr val="9CA3AF"/>
+                      </a:solidFill>
+                      <a:prstDash val="solid"/>
+                      <a:round/>
+                      <a:headEnd type="none" w="med" len="med"/>
+                      <a:tailEnd type="none" w="med" len="med"/>
+                    </a:lnL>
+                    <a:lnR w="6350" cap="flat" cmpd="sng" algn="ctr">
+                      <a:solidFill>
+                        <a:srgbClr val="9CA3AF"/>
+                      </a:solidFill>
+                      <a:prstDash val="solid"/>
+                      <a:round/>
+                      <a:headEnd type="none" w="med" len="med"/>
+                      <a:tailEnd type="none" w="med" len="med"/>
+                    </a:lnR>
+                    <a:lnT w="6350" cap="flat" cmpd="sng" algn="ctr">
+                      <a:solidFill>
+                        <a:srgbClr val="9CA3AF"/>
+                      </a:solidFill>
+                      <a:prstDash val="solid"/>
+                      <a:round/>
+                      <a:headEnd type="none" w="med" len="med"/>
+                      <a:tailEnd type="none" w="med" len="med"/>
+                    </a:lnT>
+                    <a:lnB w="6350" cap="flat" cmpd="sng" algn="ctr">
+                      <a:solidFill>
+                        <a:srgbClr val="9CA3AF"/>
+                      </a:solidFill>
+                      <a:prstDash val="solid"/>
+                      <a:round/>
+                      <a:headEnd type="none" w="med" len="med"/>
+                      <a:tailEnd type="none" w="med" len="med"/>
+                    </a:lnB>
+                  </a:tcPr>
+                </a:tc>
+                <a:tc>
+                  <a:txBody>
+                    <a:bodyPr/>
+                    <a:lstStyle/>
+                    <a:p>
+                      <a:pPr algn="ctr" indent="0" marL="0">
+                        <a:buNone/>
+                      </a:pPr>
+                      <a:r>
+                        <a:rPr lang="en-US" sz="950" b="1" dirty="0">
+                          <a:solidFill>
+                            <a:srgbClr val="1F3864"/>
+                          </a:solidFill>
+                          <a:latin typeface="Malgun Gothic" pitchFamily="34" charset="0"/>
+                          <a:ea typeface="Malgun Gothic" pitchFamily="34" charset="-122"/>
+                          <a:cs typeface="Malgun Gothic" pitchFamily="34" charset="-120"/>
+                        </a:rPr>
+                        <a:t>7.7년</a:t>
+                      </a:r>
+                      <a:endParaRPr lang="en-US" sz="950" dirty="0">
+                        <a:latin typeface="Malgun Gothic" charset="0"/>
+                        <a:ea typeface="Malgun Gothic" charset="0"/>
+                        <a:cs typeface="Malgun Gothic" charset="0"/>
+                      </a:endParaRPr>
+                    </a:p>
+                  </a:txBody>
+                  <a:tcPr marL="91440" marR="91440" marT="45720" marB="45720" anchor="ctr">
+                    <a:lnL w="6350" cap="flat" cmpd="sng" algn="ctr">
+                      <a:solidFill>
+                        <a:srgbClr val="9CA3AF"/>
+                      </a:solidFill>
+                      <a:prstDash val="solid"/>
+                      <a:round/>
+                      <a:headEnd type="none" w="med" len="med"/>
+                      <a:tailEnd type="none" w="med" len="med"/>
+                    </a:lnL>
+                    <a:lnR w="6350" cap="flat" cmpd="sng" algn="ctr">
+                      <a:solidFill>
+                        <a:srgbClr val="9CA3AF"/>
+                      </a:solidFill>
+                      <a:prstDash val="solid"/>
+                      <a:round/>
+                      <a:headEnd type="none" w="med" len="med"/>
+                      <a:tailEnd type="none" w="med" len="med"/>
+                    </a:lnR>
+                    <a:lnT w="6350" cap="flat" cmpd="sng" algn="ctr">
+                      <a:solidFill>
+                        <a:srgbClr val="9CA3AF"/>
+                      </a:solidFill>
+                      <a:prstDash val="solid"/>
+                      <a:round/>
+                      <a:headEnd type="none" w="med" len="med"/>
+                      <a:tailEnd type="none" w="med" len="med"/>
+                    </a:lnT>
+                    <a:lnB w="6350" cap="flat" cmpd="sng" algn="ctr">
+                      <a:solidFill>
+                        <a:srgbClr val="9CA3AF"/>
+                      </a:solidFill>
+                      <a:prstDash val="solid"/>
+                      <a:round/>
+                      <a:headEnd type="none" w="med" len="med"/>
+                      <a:tailEnd type="none" w="med" len="med"/>
+                    </a:lnB>
+                  </a:tcPr>
+                </a:tc>
+              </a:tr>
+            </a:tbl>
+          </a:graphicData>
+        </a:graphic>
+      </p:graphicFrame>
       <p:sp>
         <p:nvSpPr>
-          <p:cNvPr id="8" name="Shape 3"/>
-          <p:cNvSpPr/>
-          <p:nvPr/>
-        </p:nvSpPr>
-        <p:spPr>
-          <a:xfrm>
-            <a:off x="502920" y="5120640"/>
-            <a:ext cx="5212080" cy="1143000"/>
-          </a:xfrm>
-          <a:prstGeom prst="rect">
-            <a:avLst/>
-          </a:prstGeom>
-          <a:solidFill>
-            <a:srgbClr val="F2F5FA"/>
-          </a:solidFill>
-          <a:ln w="15875">
-            <a:solidFill>
-              <a:srgbClr val="1F3864"/>
-            </a:solidFill>
-            <a:prstDash val="solid"/>
-          </a:ln>
-        </p:spPr>
-      </p:sp>
-      <p:sp>
-        <p:nvSpPr>
-          <p:cNvPr id="9" name="Text 4"/>
+          <p:cNvPr id="9" name="Text 3"/>
           <p:cNvSpPr txBox="1"/>
           <p:nvPr/>
         </p:nvSpPr>
         <p:spPr>
           <a:xfrm>
-            <a:off x="502920" y="5230368"/>
-            <a:ext cx="5212080" cy="320040"/>
+            <a:off x="502920" y="6126480"/>
+            <a:ext cx="5212080" cy="219456"/>
           </a:xfrm>
           <a:prstGeom prst="rect">
             <a:avLst/>
@@ -16065,62 +17132,23 @@
               <a:buNone/>
             </a:pPr>
             <a:r>
-              <a:rPr lang="en-US" sz="1300" b="1" dirty="0">
+              <a:rPr lang="en-US" sz="850" dirty="0">
                 <a:solidFill>
-                  <a:srgbClr val="1F3864"/>
+                  <a:srgbClr val="595959"/>
                 </a:solidFill>
                 <a:latin typeface="Malgun Gothic" pitchFamily="34" charset="0"/>
                 <a:ea typeface="Malgun Gothic" pitchFamily="34" charset="-122"/>
                 <a:cs typeface="Malgun Gothic" pitchFamily="34" charset="-120"/>
               </a:rPr>
-              <a:t>단순 투자회수기간</a:t>
+              <a:t>출처 — TCE: Baltic TD9 주간 리포트 (2025년 1.5만~5만 $/day 변동) · 선가: 2024~26 LR1 계약 55~70 M + 메탄올 DF 10%</a:t>
             </a:r>
-            <a:endParaRPr lang="en-US" sz="1300" dirty="0"/>
-          </a:p>
-        </p:txBody>
-      </p:sp>
-      <p:sp>
-        <p:nvSpPr>
-          <p:cNvPr id="10" name="Text 5"/>
-          <p:cNvSpPr txBox="1"/>
-          <p:nvPr/>
-        </p:nvSpPr>
-        <p:spPr>
-          <a:xfrm>
-            <a:off x="502920" y="5559552"/>
-            <a:ext cx="5212080" cy="594360"/>
-          </a:xfrm>
-          <a:prstGeom prst="rect">
-            <a:avLst/>
-          </a:prstGeom>
-          <a:noFill/>
-          <a:ln/>
-        </p:spPr>
-        <p:txBody>
-          <a:bodyPr wrap="square" lIns="0" tIns="0" rIns="0" bIns="0" rtlCol="0" anchor="ctr"/>
-          <a:lstStyle/>
-          <a:p>
-            <a:pPr algn="ctr" indent="0" marL="0">
-              <a:buNone/>
-            </a:pPr>
-            <a:r>
-              <a:rPr lang="en-US" sz="2400" b="1" dirty="0">
-                <a:solidFill>
-                  <a:srgbClr val="C00000"/>
-                </a:solidFill>
-                <a:latin typeface="Malgun Gothic" pitchFamily="34" charset="0"/>
-                <a:ea typeface="Malgun Gothic" pitchFamily="34" charset="-122"/>
-                <a:cs typeface="Malgun Gothic" pitchFamily="34" charset="-120"/>
-              </a:rPr>
-              <a:t>약 0.81년 (9.7개월)</a:t>
-            </a:r>
-            <a:endParaRPr lang="en-US" sz="2400" dirty="0"/>
+            <a:endParaRPr lang="en-US" sz="850" dirty="0"/>
           </a:p>
         </p:txBody>
       </p:sp>
       <p:pic>
         <p:nvPicPr>
-          <p:cNvPr id="11" name="Image 0" descr="imgs/p1-008-000.png">    </p:cNvPr>
+          <p:cNvPr id="10" name="Image 0" descr="imgs/p1-008-000.png">    </p:cNvPr>
           <p:cNvPicPr>
             <a:picLocks noChangeAspect="1"/>
           </p:cNvPicPr>
@@ -16144,7 +17172,7 @@
       </p:pic>
       <p:sp>
         <p:nvSpPr>
-          <p:cNvPr id="12" name="Text 6"/>
+          <p:cNvPr id="11" name="Text 4"/>
           <p:cNvSpPr txBox="1"/>
           <p:nvPr/>
         </p:nvSpPr>
@@ -16183,7 +17211,7 @@
       </p:sp>
       <p:graphicFrame>
         <p:nvGraphicFramePr>
-          <p:cNvPr id="49" name="Table 2"/>
+          <p:cNvPr id="65" name="Table 3"/>
           <p:cNvGraphicFramePr>
             <a:graphicFrameLocks noGrp="1"/>
           </p:cNvGraphicFramePr>
@@ -16879,7 +17907,7 @@
       </p:graphicFrame>
       <p:sp>
         <p:nvSpPr>
-          <p:cNvPr id="14" name="Text 7"/>
+          <p:cNvPr id="13" name="Text 5"/>
           <p:cNvSpPr txBox="1"/>
           <p:nvPr/>
         </p:nvSpPr>
@@ -16922,7 +17950,7 @@
       </p:sp>
       <p:sp>
         <p:nvSpPr>
-          <p:cNvPr id="15" name="Text 8"/>
+          <p:cNvPr id="14" name="Text 6"/>
           <p:cNvSpPr txBox="1"/>
           <p:nvPr/>
         </p:nvSpPr>
@@ -16961,7 +17989,7 @@
       </p:sp>
       <p:sp>
         <p:nvSpPr>
-          <p:cNvPr id="16" name="Text 9"/>
+          <p:cNvPr id="15" name="Text 7"/>
           <p:cNvSpPr txBox="1"/>
           <p:nvPr/>
         </p:nvSpPr>
@@ -17000,7 +18028,7 @@
       </p:sp>
       <p:sp>
         <p:nvSpPr>
-          <p:cNvPr id="17" name="Text 10"/>
+          <p:cNvPr id="16" name="Text 8"/>
           <p:cNvSpPr txBox="1"/>
           <p:nvPr/>
         </p:nvSpPr>

--- a/contest/presentation/2026_74K_발표자료_10분.pptx
+++ b/contest/presentation/2026_74K_발표자료_10분.pptx
@@ -1809,7 +1809,7 @@
           <a:p>
             <a:r>
               <a:rPr lang="en-US" dirty="0"/>
-              <a:t>경제성입니다. 건조비는 약 2,666만 달러입니다. 회수기간은 2026년 8월 시황 기준 0.81년이지만, 2025년 평균 운임과 시장 신조선가를 적용하면 약 8년으로 시황에 크게 좌우됩니다. 정리하면 본 설계선은 국제 규정과 선급 요건을 모두 만족하면서, 메탄올 이중연료와 축발전기, 로터 세일로 EEDI Phase 3까지 만족시킨 74K급 원유운반선입니다.</a:t>
+              <a:t>경제성입니다. 건조비는 약 2,666만 달러입니다. 회수기간은 2026년 8월 시황 기준 0.81년이지만, LR1 5년 평균 운임과 시장 신조선가를 적용하면 약 8년으로 시황에 크게 좌우됩니다. 정리하면 본 설계선은 국제 규정과 선급 요건을 모두 만족하면서, 메탄올 이중연료와 축발전기, 로터 세일로 EEDI Phase 3까지 만족시킨 74K급 원유운반선입니다.</a:t>
             </a:r>
             <a:endParaRPr lang="en-US" dirty="0"/>
           </a:p>
@@ -15960,7 +15960,7 @@
         <p:spPr>
           <a:xfrm>
             <a:off x="548640" y="4315968"/>
-            <a:ext cx="5212080" cy="713232"/>
+            <a:ext cx="5212080" cy="658368"/>
           </a:xfrm>
           <a:prstGeom prst="rect">
             <a:avLst/>
@@ -15980,7 +15980,7 @@
               <a:buChar char="▪"/>
             </a:pPr>
             <a:r>
-              <a:rPr lang="en-US" sz="1050" dirty="0">
+              <a:rPr lang="en-US" sz="1000" dirty="0">
                 <a:solidFill>
                   <a:srgbClr val="262626"/>
                 </a:solidFill>
@@ -15988,9 +15988,9 @@
                 <a:ea typeface="Malgun Gothic" pitchFamily="34" charset="-122"/>
                 <a:cs typeface="Malgun Gothic" pitchFamily="34" charset="-120"/>
               </a:rPr>
-              <a:t>연간 355일 운항, 왕복 30.5 항차 (항해 4.81일 + 정박 1일) · 운용비 USD 3.81 M/년</a:t>
+              <a:t>연간 355일 운항 · 왕복 30.5항차 (항해 4.81일 + 정박 1일) · 운용비 3.81 M $/년</a:t>
             </a:r>
-            <a:endParaRPr lang="en-US" sz="1050" dirty="0"/>
+            <a:endParaRPr lang="en-US" sz="1000" dirty="0"/>
           </a:p>
           <a:p>
             <a:pPr marL="165100" indent="-165100">
@@ -16001,7 +16001,7 @@
               <a:buChar char="▪"/>
             </a:pPr>
             <a:r>
-              <a:rPr lang="en-US" sz="1050" dirty="0">
+              <a:rPr lang="en-US" sz="1000" dirty="0">
                 <a:solidFill>
                   <a:srgbClr val="262626"/>
                 </a:solidFill>
@@ -16009,9 +16009,9 @@
                 <a:ea typeface="Malgun Gothic" pitchFamily="34" charset="-122"/>
                 <a:cs typeface="Malgun Gothic" pitchFamily="34" charset="-120"/>
               </a:rPr>
-              <a:t>TD9 = WS373 (2026.8.21, Baltic) → Round Voyage TCE ≈ USD 104,000/day</a:t>
+              <a:t>TD9 WS373 (8.21) → TCE ≈ 104,000 $/day · 일주일 뒤 (8.28) WS197 → 39,600</a:t>
             </a:r>
-            <a:endParaRPr lang="en-US" sz="1050" dirty="0"/>
+            <a:endParaRPr lang="en-US" sz="1000" dirty="0"/>
           </a:p>
         </p:txBody>
       </p:sp>
@@ -16335,7 +16335,7 @@
                           <a:ea typeface="Malgun Gothic" pitchFamily="34" charset="-122"/>
                           <a:cs typeface="Malgun Gothic" pitchFamily="34" charset="-120"/>
                         </a:rPr>
-                        <a:t>보고서 기준 (2026.8 TD9 WS373)</a:t>
+                        <a:t>보고서 기준 (2026.8.21 TD9 WS373)</a:t>
                       </a:r>
                       <a:endParaRPr lang="en-US" sz="950" dirty="0">
                         <a:latin typeface="Malgun Gothic" charset="0"/>
@@ -16597,7 +16597,7 @@
                           <a:ea typeface="Malgun Gothic" pitchFamily="34" charset="-122"/>
                           <a:cs typeface="Malgun Gothic" pitchFamily="34" charset="-120"/>
                         </a:rPr>
-                        <a:t>2025년 시황 수준 적용</a:t>
+                        <a:t>LR1 5년 평균 운임 적용 (2021~25)</a:t>
                       </a:r>
                       <a:endParaRPr lang="en-US" sz="950" dirty="0">
                         <a:latin typeface="Malgun Gothic" charset="0"/>
@@ -16727,7 +16727,7 @@
                           <a:ea typeface="Malgun Gothic" pitchFamily="34" charset="-122"/>
                           <a:cs typeface="Malgun Gothic" pitchFamily="34" charset="-120"/>
                         </a:rPr>
-                        <a:t>≈ 35,000</a:t>
+                        <a:t>≈ 33,000</a:t>
                       </a:r>
                       <a:endParaRPr lang="en-US" sz="950" dirty="0">
                         <a:latin typeface="Malgun Gothic" charset="0"/>
@@ -16792,7 +16792,7 @@
                           <a:ea typeface="Malgun Gothic" pitchFamily="34" charset="-122"/>
                           <a:cs typeface="Malgun Gothic" pitchFamily="34" charset="-120"/>
                         </a:rPr>
-                        <a:t>3.1년</a:t>
+                        <a:t>3.4년</a:t>
                       </a:r>
                       <a:endParaRPr lang="en-US" sz="950" dirty="0">
                         <a:latin typeface="Malgun Gothic" charset="0"/>
@@ -16989,7 +16989,7 @@
                           <a:ea typeface="Malgun Gothic" pitchFamily="34" charset="-122"/>
                           <a:cs typeface="Malgun Gothic" pitchFamily="34" charset="-120"/>
                         </a:rPr>
-                        <a:t>≈ 35,000</a:t>
+                        <a:t>≈ 33,000</a:t>
                       </a:r>
                       <a:endParaRPr lang="en-US" sz="950" dirty="0">
                         <a:latin typeface="Malgun Gothic" charset="0"/>
@@ -17054,7 +17054,7 @@
                           <a:ea typeface="Malgun Gothic" pitchFamily="34" charset="-122"/>
                           <a:cs typeface="Malgun Gothic" pitchFamily="34" charset="-120"/>
                         </a:rPr>
-                        <a:t>7.7년</a:t>
+                        <a:t>8.3년</a:t>
                       </a:r>
                       <a:endParaRPr lang="en-US" sz="950" dirty="0">
                         <a:latin typeface="Malgun Gothic" charset="0"/>
@@ -17140,7 +17140,7 @@
                 <a:ea typeface="Malgun Gothic" pitchFamily="34" charset="-122"/>
                 <a:cs typeface="Malgun Gothic" pitchFamily="34" charset="-120"/>
               </a:rPr>
-              <a:t>출처 — TCE: Baltic TD9 주간 리포트 (2025년 1.5만~5만 $/day 변동) · 선가: 2024~26 LR1 계약 55~70 M + 메탄올 DF 10%</a:t>
+              <a:t>출처 — TCE: TORM·Hafnia LR1 실현 평균 2021~25 (3.1~3.3만 $/day) · 선가: LR1 계약 2024~26 중국 53~56 M · 한국 58~62 M, 메탄올 DF +10~11%</a:t>
             </a:r>
             <a:endParaRPr lang="en-US" sz="850" dirty="0"/>
           </a:p>

--- a/contest/presentation/2026_74K_발표자료_10분.pptx
+++ b/contest/presentation/2026_74K_발표자료_10분.pptx
@@ -1369,7 +1369,7 @@
           <a:p>
             <a:r>
               <a:rPr lang="en-US" dirty="0"/>
-              <a:t>화물창은 MARPOL에 따라 윙탱크 폭과 이중저 높이를 각각 2.4미터로 한 이중선체이며, 총 용적 77,839세제곱미터입니다. 가상 기름 유출량과 슬롭탱크 용량도 규정 이내입니다. 건현은 ICLL 기준 허용 만재흘수 16.4미터로 스캔틀링 흘수를 상회하고, 의장수 2,559로 앵커와 체인을 결정했습니다. 가시거리도 전 흘수 조건에서 SOLAS 규정을 만족합니다.</a:t>
+              <a:t>화물창은 MARPOL에 따라 윙탱크 폭과 이중저 높이를 각각 2.4미터로 한 이중선체이며, 총 용적 77,839세제곱미터입니다. 가상 기름 유출량과 슬롭탱크 용량도 규정 이내입니다. 건현은 ICLL 기준 허용 만재흘수 16.4미터로 스캔틀링 흘수를 상회하고, 의장수 2,559로 앵커와 체인을 결정했습니다. 가시거리도 SOLAS 규정을 만족합니다.</a:t>
             </a:r>
             <a:endParaRPr lang="en-US" dirty="0"/>
           </a:p>
@@ -1457,7 +1457,7 @@
           <a:p>
             <a:r>
               <a:rPr lang="en-US" dirty="0"/>
-              <a:t>복원성입니다. 경하중량은 로터 세일을 포함해 14,724톤이며, 경하부터 만재까지 출항과 도착을 나눈 열 가지 적재조건을 검토했습니다. 모든 조건에서 IS Code 2008 비손상 기준과 종강도 허용치를 만족했습니다. 손상 복원성은 MARPOL 28규칙의 네 가지 손상 케이스 전부에서 잔존복원성 기준을 만족했습니다.</a:t>
+              <a:t>복원성입니다. 경하중량은 로터 세일을 포함해 14,724톤이며, 경하부터 만재까지 열 가지 적재조건을 검토했습니다. 모든 조건에서 IS Code 2008 비손상 기준과 종강도 허용치를 만족했습니다. 손상 복원성은 MARPOL 28규칙의 네 가지 손상 케이스 전부에서 잔존복원성 기준을 만족했습니다.</a:t>
             </a:r>
             <a:endParaRPr lang="en-US" dirty="0"/>
           </a:p>
@@ -1809,7 +1809,7 @@
           <a:p>
             <a:r>
               <a:rPr lang="en-US" dirty="0"/>
-              <a:t>경제성입니다. 건조비는 약 2,666만 달러입니다. 회수기간은 2026년 8월 시황 기준 0.81년이지만, LR1 5년 평균 운임과 시장 신조선가를 적용하면 약 8년으로 시황에 크게 좌우됩니다. 정리하면 본 설계선은 국제 규정과 선급 요건을 모두 만족하면서, 메탄올 이중연료와 축발전기, 로터 세일로 EEDI Phase 3까지 만족시킨 74K급 원유운반선입니다.</a:t>
+              <a:t>경제성입니다. 건조비는 약 2,666만 달러입니다. 회수기간은 2026년 8월 시황 기준 0.81년이지만, LR1 5년 평균 운임과 시장 신조선가를 적용하면 약 8년으로 시황에 크게 좌우됩니다. 정리하면 본 설계선은 국제 규정과 선급 요건을 모두 만족하면서, 메탄올 이중연료와 축발전기, 로터 세일로 EEDI Phase 3까지 만족시킨 74K급 원유운반선입니다. 캐비테이션 정량 검토와 로터 기초 해석은 후속 과제로 인식하고 있습니다.</a:t>
             </a:r>
             <a:endParaRPr lang="en-US" dirty="0"/>
           </a:p>
@@ -1985,7 +1985,7 @@
           <a:p>
             <a:r>
               <a:rPr lang="en-US" dirty="0"/>
-              <a:t>발표는 개념 설계부터 친환경까지 일곱 섹션 순으로 진행하겠습니다. 본 설계선의 핵심은 세 가지입니다. 첫째, 메탄올 이중연료입니다. LNG의 극저온 탱크 부담도, 저유황유의 세정장치도 없이 북미 배출규제해역 기준을 충족합니다. 둘째는 축발전기와 로터 세일을 통한 EEDI Phase 3 대응, 셋째는 단거리 TD9 항로 전략입니다.</a:t>
+              <a:t>발표는 개념 설계부터 친환경까지 일곱 섹션 순으로 진행하겠습니다. 핵심은 세 가지입니다. 첫째, 메탄올 이중연료입니다. LNG의 극저온 탱크 부담도, 저유황유의 세정장치도 없이 북미 배출규제해역 기준을 충족합니다. 둘째는 축발전기와 로터 세일을 통한 EEDI Phase 3 대응, 셋째는 단거리 TD9 항로 전략입니다.</a:t>
             </a:r>
             <a:endParaRPr lang="en-US" dirty="0"/>
           </a:p>
@@ -2073,7 +2073,7 @@
           <a:p>
             <a:r>
               <a:rPr lang="en-US" dirty="0"/>
-              <a:t>먼저 항로 선정입니다. 메탄올 벙커링이 가능하고 미국 최대 원유 수출항인 Corpus Christi를 공통 양하항으로 두고 세 항로를 비교했습니다. 콜롬비아 Conveñas 항로는 본선 규격과 일치하는 공인 운임지수 TD9가 있고 물동량도 가장 많습니다. 특히 편도 1,652해리 단거리라 메탄올 탱크가 만재 배수용적의 1.1퍼센트에 그쳐, 메탄올 추진의 약점인 적재량 손실을 해소합니다.</a:t>
+              <a:t>먼저 항로 선정입니다. 미국 최대 원유 수출항이자 메탄올 벙커링이 가능한 Corpus Christi를 공통 양하항으로 두고 세 항로를 비교했습니다. 콜롬비아 Conveñas 항로는 본선 규격과 일치하는 공인 운임지수 TD9가 있고 물동량도 가장 많습니다. 특히 편도 1,652해리 단거리라 메탄올 탱크가 만재 배수용적의 1.1퍼센트에 그쳐, 메탄올 추진의 약점인 적재량 손실을 해소합니다.</a:t>
             </a:r>
             <a:endParaRPr lang="en-US" dirty="0"/>
           </a:p>
@@ -2337,7 +2337,7 @@
           <a:p>
             <a:r>
               <a:rPr lang="en-US" dirty="0"/>
-              <a:t>저항은 Holtrop-Mennen 경험식을 CFD 및 ITTC 1978 실선 확장 결과와 비교해 보정계수 0.7315를 산출해 적용했습니다. 설계속도는 연료비와 항차수 증가에 따른 운임 수익을 함께 반영해, 연간 순이익이 최대가 되는 14.3노트로 선정했습니다. 이때 추정된 소요 마력은 약 9,650킬로와트입니다.</a:t>
+              <a:t>저항은 Holtrop-Mennen 경험식을 CFD 및 ITTC 1978 실선 확장 결과와 비교해 보정계수 0.7315를 산출해 적용했습니다. 설계속도는 연료비와 항차수 증가에 따른 운임 수익을 함께 반영해, 연간 순이익이 최대가 되는 14.3노트로 선정했습니다. 추정 소요 마력은 약 9,650킬로와트입니다.</a:t>
             </a:r>
             <a:endParaRPr lang="en-US" dirty="0"/>
           </a:p>
@@ -2425,7 +2425,7 @@
           <a:p>
             <a:r>
               <a:rPr lang="en-US" dirty="0"/>
-              <a:t>주기관은 메탄올 이중연료 운전이 가능한 5G60ME-C10.5-LGIM을 선정했습니다. 앞서 추정한 마력이 MEPC 최소추진마력 10,840킬로와트에 못 미쳐, 이를 상회하는 SMCR 10,890킬로와트로 결정했습니다. 질소산화물은 EGRTC로 대응하고, 축발전기 1,000킬로와트로 항해 중 보조기관 가동을 최소화했습니다. 이것만으로 EEDI가 4.411에서 3.580까지 내려갑니다.</a:t>
+              <a:t>주기관은 메탄올 이중연료 5G60ME-C10.5-LGIM을 선정했습니다. 앞서 추정한 마력이 MEPC 최소추진마력 10,840킬로와트에 못 미쳐, 이를 상회하는 SMCR 10,890킬로와트로 결정했습니다. 질소산화물은 EGRTC로 대응하고, 축발전기 1,000킬로와트로 항해 중 보조기관 가동을 최소화했습니다. 이것만으로 EEDI가 4.411에서 3.580까지 내려갑니다.</a:t>
             </a:r>
             <a:endParaRPr lang="en-US" dirty="0"/>
           </a:p>
@@ -2601,7 +2601,7 @@
           <a:p>
             <a:r>
               <a:rPr lang="en-US" dirty="0"/>
-              <a:t>타 면적은 네 가지 추정법의 결과 범위 안에서 42.83제곱미터로 정하고, 제작이 용이한 NACA 단면의 Semi-spade 타를 채택했습니다. 프로펠러·선체 간 간격도 기준을 만족합니다. 조종성능은 두 흘수 조건에서 선회, 지그재그, 크래시 스톱, 나선 시험을 수행했고 전 항목이 IMO 기준을 만족했습니다.</a:t>
+              <a:t>타 면적은 네 가지 추정법의 결과 범위 안에서 42.83제곱미터로 정하고, NACA 단면의 Semi-spade 타를 채택했습니다. 프로펠러·선체 간 간격도 기준을 만족합니다. 조종성능은 두 흘수 조건에서 선회, 지그재그, 크래시 스톱, 나선 시험을 수행했고 전 항목이 IMO 기준을 만족했습니다.</a:t>
             </a:r>
             <a:endParaRPr lang="en-US" dirty="0"/>
           </a:p>
@@ -14017,8 +14017,8 @@
         </p:nvSpPr>
         <p:spPr>
           <a:xfrm>
-            <a:off x="6263640" y="2880360"/>
-            <a:ext cx="5486400" cy="1371600"/>
+            <a:off x="6263640" y="2852928"/>
+            <a:ext cx="5486400" cy="1481328"/>
           </a:xfrm>
           <a:prstGeom prst="rect">
             <a:avLst/>
@@ -14038,7 +14038,7 @@
               <a:buChar char="▪"/>
             </a:pPr>
             <a:r>
-              <a:rPr lang="en-US" sz="1050" dirty="0">
+              <a:rPr lang="en-US" sz="1000" dirty="0">
                 <a:solidFill>
                   <a:srgbClr val="262626"/>
                 </a:solidFill>
@@ -14046,9 +14046,9 @@
                 <a:ea typeface="Malgun Gothic" pitchFamily="34" charset="-122"/>
                 <a:cs typeface="Malgun Gothic" pitchFamily="34" charset="-120"/>
               </a:rPr>
-              <a:t>카리브해 — 연중 안정적인 북동무역풍(045~090°) + Caribbean Low-Level Jet</a:t>
+              <a:t>카리브해 — 연중 안정적인 북동무역풍(045~090°) + Caribbean Low-Level Jet, 항로 실측 풍황(U10 7.0 m/s)으로 계산</a:t>
             </a:r>
-            <a:endParaRPr lang="en-US" sz="1050" dirty="0"/>
+            <a:endParaRPr lang="en-US" sz="1000" dirty="0"/>
           </a:p>
           <a:p>
             <a:pPr marL="165100" indent="-165100">
@@ -14059,7 +14059,7 @@
               <a:buChar char="▪"/>
             </a:pPr>
             <a:r>
-              <a:rPr lang="en-US" sz="1050" dirty="0">
+              <a:rPr lang="en-US" sz="1000" dirty="0">
                 <a:solidFill>
                   <a:srgbClr val="262626"/>
                 </a:solidFill>
@@ -14067,9 +14067,9 @@
                 <a:ea typeface="Malgun Gothic" pitchFamily="34" charset="-122"/>
                 <a:cs typeface="Malgun Gothic" pitchFamily="34" charset="-120"/>
               </a:rPr>
-              <a:t>시야각 4.6° &lt; 5° (SOLAS V/22), 화물탱크 위험구역 이격 · 관통형 지지대 반영</a:t>
+              <a:t>실선·문헌 절감률 6.5~9.1%(Maersk Pelican · TR Lady · Aframax 해석)와 부합 — 약풍 항로 사례는 2%대</a:t>
             </a:r>
-            <a:endParaRPr lang="en-US" sz="1050" dirty="0"/>
+            <a:endParaRPr lang="en-US" sz="1000" dirty="0"/>
           </a:p>
           <a:p>
             <a:pPr marL="165100" indent="-165100">
@@ -14080,7 +14080,7 @@
               <a:buChar char="▪"/>
             </a:pPr>
             <a:r>
-              <a:rPr lang="en-US" sz="1050" dirty="0">
+              <a:rPr lang="en-US" sz="1000" dirty="0">
                 <a:solidFill>
                   <a:srgbClr val="262626"/>
                 </a:solidFill>
@@ -14088,9 +14088,30 @@
                 <a:ea typeface="Malgun Gothic" pitchFamily="34" charset="-122"/>
                 <a:cs typeface="Malgun Gothic" pitchFamily="34" charset="-120"/>
               </a:rPr>
-              <a:t>실선 실적(Maersk Pelican 8.2%, TR Lady 9.1%)과 부합하는 절감률</a:t>
+              <a:t>로터 구동전력 3기 정격 345 kW를 전부 차감해도 순절감 380 kW 이상 (NCR 4.6%)</a:t>
             </a:r>
-            <a:endParaRPr lang="en-US" sz="1050" dirty="0"/>
+            <a:endParaRPr lang="en-US" sz="1000" dirty="0"/>
+          </a:p>
+          <a:p>
+            <a:pPr marL="165100" indent="-165100">
+              <a:spcAft>
+                <a:spcPts val="700"/>
+              </a:spcAft>
+              <a:buSzPct val="100000"/>
+              <a:buChar char="▪"/>
+            </a:pPr>
+            <a:r>
+              <a:rPr lang="en-US" sz="1000" dirty="0">
+                <a:solidFill>
+                  <a:srgbClr val="262626"/>
+                </a:solidFill>
+                <a:latin typeface="Malgun Gothic" pitchFamily="34" charset="0"/>
+                <a:ea typeface="Malgun Gothic" pitchFamily="34" charset="-122"/>
+                <a:cs typeface="Malgun Gothic" pitchFamily="34" charset="-120"/>
+              </a:rPr>
+              <a:t>시야각 4.6° &lt; 5° (SOLAS V/22), 화물탱크 위험구역 이격 · 관통형 지지대 반영</a:t>
+            </a:r>
+            <a:endParaRPr lang="en-US" sz="1000" dirty="0"/>
           </a:p>
         </p:txBody>
       </p:sp>
@@ -14506,7 +14527,7 @@
               <a:buNone/>
             </a:pPr>
             <a:r>
-              <a:rPr lang="en-US" sz="1350" b="1" dirty="0">
+              <a:rPr lang="en-US" sz="1300" b="1" dirty="0">
                 <a:solidFill>
                   <a:srgbClr val="C00000"/>
                 </a:solidFill>
@@ -14514,9 +14535,9 @@
                 <a:ea typeface="Malgun Gothic" pitchFamily="34" charset="-122"/>
                 <a:cs typeface="Malgun Gothic" pitchFamily="34" charset="-120"/>
               </a:rPr>
-              <a:t>→  Attained EEDI 3.475 &lt; Required 3.568 — EEDI Phase 3 만족</a:t>
+              <a:t>→  Attained EEDI 3.475 &lt; Required 3.568 — Phase 3 만족</a:t>
             </a:r>
-            <a:endParaRPr lang="en-US" sz="1350" dirty="0"/>
+            <a:endParaRPr lang="en-US" sz="1300" dirty="0"/>
           </a:p>
         </p:txBody>
       </p:sp>
@@ -17235,7 +17256,7 @@
                 <a:gridCol w="2286000"/>
                 <a:gridCol w="3456432"/>
               </a:tblGrid>
-              <a:tr h="338328">
+              <a:tr h="301752">
                 <a:tc>
                   <a:txBody>
                     <a:bodyPr/>
@@ -17373,7 +17394,7 @@
                   </a:tcPr>
                 </a:tc>
               </a:tr>
-              <a:tr h="338328">
+              <a:tr h="301752">
                 <a:tc>
                   <a:txBody>
                     <a:bodyPr/>
@@ -17505,7 +17526,7 @@
                   </a:tcPr>
                 </a:tc>
               </a:tr>
-              <a:tr h="338328">
+              <a:tr h="301752">
                 <a:tc>
                   <a:txBody>
                     <a:bodyPr/>
@@ -17637,7 +17658,7 @@
                   </a:tcPr>
                 </a:tc>
               </a:tr>
-              <a:tr h="338328">
+              <a:tr h="301752">
                 <a:tc>
                   <a:txBody>
                     <a:bodyPr/>
@@ -17769,7 +17790,7 @@
                   </a:tcPr>
                 </a:tc>
               </a:tr>
-              <a:tr h="338328">
+              <a:tr h="301752">
                 <a:tc>
                   <a:txBody>
                     <a:bodyPr/>
@@ -17913,8 +17934,8 @@
         </p:nvSpPr>
         <p:spPr>
           <a:xfrm>
-            <a:off x="6035040" y="5303520"/>
-            <a:ext cx="5715000" cy="457200"/>
+            <a:off x="6035040" y="5074920"/>
+            <a:ext cx="5715000" cy="777240"/>
           </a:xfrm>
           <a:prstGeom prst="rect">
             <a:avLst/>
@@ -17934,7 +17955,7 @@
               <a:buChar char="▪"/>
             </a:pPr>
             <a:r>
-              <a:rPr lang="en-US" sz="1100" dirty="0">
+              <a:rPr lang="en-US" sz="1000" dirty="0">
                 <a:solidFill>
                   <a:srgbClr val="262626"/>
                 </a:solidFill>
@@ -17944,7 +17965,28 @@
               </a:rPr>
               <a:t>ICLL · SOLAS · MARPOL · IS Code · IMO 조종성 기준 및 CSR 구조 요건 전부 만족</a:t>
             </a:r>
-            <a:endParaRPr lang="en-US" sz="1100" dirty="0"/>
+            <a:endParaRPr lang="en-US" sz="1000" dirty="0"/>
+          </a:p>
+          <a:p>
+            <a:pPr marL="165100" indent="-165100">
+              <a:spcAft>
+                <a:spcPts val="700"/>
+              </a:spcAft>
+              <a:buSzPct val="100000"/>
+              <a:buChar char="▪"/>
+            </a:pPr>
+            <a:r>
+              <a:rPr lang="en-US" sz="1000" dirty="0">
+                <a:solidFill>
+                  <a:srgbClr val="262626"/>
+                </a:solidFill>
+                <a:latin typeface="Malgun Gothic" pitchFamily="34" charset="0"/>
+                <a:ea typeface="Malgun Gothic" pitchFamily="34" charset="-122"/>
+                <a:cs typeface="Malgun Gothic" pitchFamily="34" charset="-120"/>
+              </a:rPr>
+              <a:t>후속 과제 — 프로펠러 캐비테이션 정량 검토 · 로터세일 기초 구조 및 풍하중 조종성 · 적하지침서 기반 정수중 하중 확정</a:t>
+            </a:r>
+            <a:endParaRPr lang="en-US" sz="1000" dirty="0"/>
           </a:p>
         </p:txBody>
       </p:sp>
